--- a/progress-updates/20260609 updates.pptx
+++ b/progress-updates/20260609 updates.pptx
@@ -5,7 +5,7 @@
     <p:sldMasterId id="2147483648" r:id="rId1"/>
   </p:sldMasterIdLst>
   <p:notesMasterIdLst>
-    <p:notesMasterId r:id="rId9"/>
+    <p:notesMasterId r:id="rId12"/>
   </p:notesMasterIdLst>
   <p:sldIdLst>
     <p:sldId id="256" r:id="rId2"/>
@@ -15,6 +15,9 @@
     <p:sldId id="277" r:id="rId6"/>
     <p:sldId id="281" r:id="rId7"/>
     <p:sldId id="280" r:id="rId8"/>
+    <p:sldId id="283" r:id="rId9"/>
+    <p:sldId id="284" r:id="rId10"/>
+    <p:sldId id="282" r:id="rId11"/>
   </p:sldIdLst>
   <p:sldSz cx="12192000" cy="6858000"/>
   <p:notesSz cx="6858000" cy="9144000"/>
@@ -203,7 +206,7 @@
           <a:p>
             <a:fld id="{A9EB0D4F-7B20-C843-AEA0-6DA76DB40034}" type="datetimeFigureOut">
               <a:rPr lang="en-TW" smtClean="0"/>
-              <a:t>2026/6/5</a:t>
+              <a:t>2026/6/7</a:t>
             </a:fld>
             <a:endParaRPr lang="en-TW"/>
           </a:p>
@@ -620,7 +623,7 @@
           <a:p>
             <a:fld id="{7B32B428-AB21-474F-A4D9-979B203162CD}" type="datetimeFigureOut">
               <a:rPr lang="en-TW" smtClean="0"/>
-              <a:t>2026/6/5</a:t>
+              <a:t>2026/6/7</a:t>
             </a:fld>
             <a:endParaRPr lang="en-TW"/>
           </a:p>
@@ -820,7 +823,7 @@
           <a:p>
             <a:fld id="{7B32B428-AB21-474F-A4D9-979B203162CD}" type="datetimeFigureOut">
               <a:rPr lang="en-TW" smtClean="0"/>
-              <a:t>2026/6/5</a:t>
+              <a:t>2026/6/7</a:t>
             </a:fld>
             <a:endParaRPr lang="en-TW"/>
           </a:p>
@@ -1030,7 +1033,7 @@
           <a:p>
             <a:fld id="{7B32B428-AB21-474F-A4D9-979B203162CD}" type="datetimeFigureOut">
               <a:rPr lang="en-TW" smtClean="0"/>
-              <a:t>2026/6/5</a:t>
+              <a:t>2026/6/7</a:t>
             </a:fld>
             <a:endParaRPr lang="en-TW"/>
           </a:p>
@@ -1230,7 +1233,7 @@
           <a:p>
             <a:fld id="{7B32B428-AB21-474F-A4D9-979B203162CD}" type="datetimeFigureOut">
               <a:rPr lang="en-TW" smtClean="0"/>
-              <a:t>2026/6/5</a:t>
+              <a:t>2026/6/7</a:t>
             </a:fld>
             <a:endParaRPr lang="en-TW"/>
           </a:p>
@@ -1506,7 +1509,7 @@
           <a:p>
             <a:fld id="{7B32B428-AB21-474F-A4D9-979B203162CD}" type="datetimeFigureOut">
               <a:rPr lang="en-TW" smtClean="0"/>
-              <a:t>2026/6/5</a:t>
+              <a:t>2026/6/7</a:t>
             </a:fld>
             <a:endParaRPr lang="en-TW"/>
           </a:p>
@@ -1774,7 +1777,7 @@
           <a:p>
             <a:fld id="{7B32B428-AB21-474F-A4D9-979B203162CD}" type="datetimeFigureOut">
               <a:rPr lang="en-TW" smtClean="0"/>
-              <a:t>2026/6/5</a:t>
+              <a:t>2026/6/7</a:t>
             </a:fld>
             <a:endParaRPr lang="en-TW"/>
           </a:p>
@@ -2189,7 +2192,7 @@
           <a:p>
             <a:fld id="{7B32B428-AB21-474F-A4D9-979B203162CD}" type="datetimeFigureOut">
               <a:rPr lang="en-TW" smtClean="0"/>
-              <a:t>2026/6/5</a:t>
+              <a:t>2026/6/7</a:t>
             </a:fld>
             <a:endParaRPr lang="en-TW"/>
           </a:p>
@@ -2331,7 +2334,7 @@
           <a:p>
             <a:fld id="{7B32B428-AB21-474F-A4D9-979B203162CD}" type="datetimeFigureOut">
               <a:rPr lang="en-TW" smtClean="0"/>
-              <a:t>2026/6/5</a:t>
+              <a:t>2026/6/7</a:t>
             </a:fld>
             <a:endParaRPr lang="en-TW"/>
           </a:p>
@@ -2444,7 +2447,7 @@
           <a:p>
             <a:fld id="{7B32B428-AB21-474F-A4D9-979B203162CD}" type="datetimeFigureOut">
               <a:rPr lang="en-TW" smtClean="0"/>
-              <a:t>2026/6/5</a:t>
+              <a:t>2026/6/7</a:t>
             </a:fld>
             <a:endParaRPr lang="en-TW"/>
           </a:p>
@@ -2757,7 +2760,7 @@
           <a:p>
             <a:fld id="{7B32B428-AB21-474F-A4D9-979B203162CD}" type="datetimeFigureOut">
               <a:rPr lang="en-TW" smtClean="0"/>
-              <a:t>2026/6/5</a:t>
+              <a:t>2026/6/7</a:t>
             </a:fld>
             <a:endParaRPr lang="en-TW"/>
           </a:p>
@@ -3046,7 +3049,7 @@
           <a:p>
             <a:fld id="{7B32B428-AB21-474F-A4D9-979B203162CD}" type="datetimeFigureOut">
               <a:rPr lang="en-TW" smtClean="0"/>
-              <a:t>2026/6/5</a:t>
+              <a:t>2026/6/7</a:t>
             </a:fld>
             <a:endParaRPr lang="en-TW"/>
           </a:p>
@@ -3289,7 +3292,7 @@
           <a:p>
             <a:fld id="{7B32B428-AB21-474F-A4D9-979B203162CD}" type="datetimeFigureOut">
               <a:rPr lang="en-TW" smtClean="0"/>
-              <a:t>2026/6/5</a:t>
+              <a:t>2026/6/7</a:t>
             </a:fld>
             <a:endParaRPr lang="en-TW"/>
           </a:p>
@@ -3775,6 +3778,135 @@
 </p:sld>
 </file>
 
+<file path=ppt/slides/slide10.xml><?xml version="1.0" encoding="utf-8"?>
+<p:sld xmlns:a="http://schemas.openxmlformats.org/drawingml/2006/main" xmlns:r="http://schemas.openxmlformats.org/officeDocument/2006/relationships" xmlns:p="http://schemas.openxmlformats.org/presentationml/2006/main">
+  <p:cSld>
+    <p:spTree>
+      <p:nvGrpSpPr>
+        <p:cNvPr id="1" name=""/>
+        <p:cNvGrpSpPr/>
+        <p:nvPr/>
+      </p:nvGrpSpPr>
+      <p:grpSpPr>
+        <a:xfrm>
+          <a:off x="0" y="0"/>
+          <a:ext cx="0" cy="0"/>
+          <a:chOff x="0" y="0"/>
+          <a:chExt cx="0" cy="0"/>
+        </a:xfrm>
+      </p:grpSpPr>
+      <p:sp>
+        <p:nvSpPr>
+          <p:cNvPr id="2" name="Title 1">
+            <a:extLst>
+              <a:ext uri="{FF2B5EF4-FFF2-40B4-BE49-F238E27FC236}">
+                <a16:creationId xmlns:a16="http://schemas.microsoft.com/office/drawing/2014/main" id="{39418C76-D18F-9C1B-1192-CD6192CC87ED}"/>
+              </a:ext>
+            </a:extLst>
+          </p:cNvPr>
+          <p:cNvSpPr>
+            <a:spLocks noGrp="1"/>
+          </p:cNvSpPr>
+          <p:nvPr>
+            <p:ph type="title"/>
+          </p:nvPr>
+        </p:nvSpPr>
+        <p:spPr>
+          <a:xfrm>
+            <a:off x="0" y="0"/>
+            <a:ext cx="10515600" cy="1325563"/>
+          </a:xfrm>
+        </p:spPr>
+        <p:txBody>
+          <a:bodyPr>
+            <a:normAutofit/>
+          </a:bodyPr>
+          <a:lstStyle/>
+          <a:p>
+            <a:r>
+              <a:rPr lang="en-US" sz="4000" dirty="0"/>
+              <a:t>To-dos</a:t>
+            </a:r>
+            <a:endParaRPr lang="en-TW" sz="4000" dirty="0"/>
+          </a:p>
+        </p:txBody>
+      </p:sp>
+      <p:sp>
+        <p:nvSpPr>
+          <p:cNvPr id="10" name="Content Placeholder 2">
+            <a:extLst>
+              <a:ext uri="{FF2B5EF4-FFF2-40B4-BE49-F238E27FC236}">
+                <a16:creationId xmlns:a16="http://schemas.microsoft.com/office/drawing/2014/main" id="{A3A4D24E-F981-72B4-F9CC-00A99363702B}"/>
+              </a:ext>
+            </a:extLst>
+          </p:cNvPr>
+          <p:cNvSpPr>
+            <a:spLocks noGrp="1"/>
+          </p:cNvSpPr>
+          <p:nvPr>
+            <p:ph idx="1"/>
+          </p:nvPr>
+        </p:nvSpPr>
+        <p:spPr>
+          <a:xfrm>
+            <a:off x="92241" y="1428581"/>
+            <a:ext cx="11542295" cy="4351338"/>
+          </a:xfrm>
+        </p:spPr>
+        <p:txBody>
+          <a:bodyPr/>
+          <a:lstStyle/>
+          <a:p>
+            <a:r>
+              <a:rPr lang="en-US" dirty="0"/>
+              <a:t>Check VOT slope exclusion criteria in TJ paper</a:t>
+            </a:r>
+            <a:br>
+              <a:rPr lang="en-US" dirty="0"/>
+            </a:br>
+            <a:r>
+              <a:rPr lang="en-US" sz="2400" dirty="0"/>
+              <a:t>*see details in (TJ-OSF)section-2-methods.Rmd</a:t>
+            </a:r>
+            <a:r>
+              <a:rPr lang="en-US" dirty="0"/>
+              <a:t> </a:t>
+            </a:r>
+          </a:p>
+          <a:p>
+            <a:r>
+              <a:rPr lang="en-US" dirty="0"/>
+              <a:t>Complete 18 stimuli lists (exposure + test)</a:t>
+            </a:r>
+          </a:p>
+          <a:p>
+            <a:r>
+              <a:rPr lang="en-US" dirty="0"/>
+              <a:t>Sanity check of stimuli lists (counterbalancing and phonetic distributions)</a:t>
+            </a:r>
+            <a:endParaRPr lang="en-TW" dirty="0"/>
+          </a:p>
+          <a:p>
+            <a:pPr marL="0" indent="0">
+              <a:buNone/>
+            </a:pPr>
+            <a:endParaRPr lang="en-TW" dirty="0"/>
+          </a:p>
+        </p:txBody>
+      </p:sp>
+    </p:spTree>
+    <p:extLst>
+      <p:ext uri="{BB962C8B-B14F-4D97-AF65-F5344CB8AC3E}">
+        <p14:creationId xmlns:p14="http://schemas.microsoft.com/office/powerpoint/2010/main" val="381367419"/>
+      </p:ext>
+    </p:extLst>
+  </p:cSld>
+  <p:clrMapOvr>
+    <a:masterClrMapping/>
+  </p:clrMapOvr>
+</p:sld>
+</file>
+
 <file path=ppt/slides/slide2.xml><?xml version="1.0" encoding="utf-8"?>
 <p:sld xmlns:a="http://schemas.openxmlformats.org/drawingml/2006/main" xmlns:r="http://schemas.openxmlformats.org/officeDocument/2006/relationships" xmlns:p="http://schemas.openxmlformats.org/presentationml/2006/main">
   <p:cSld>
@@ -4929,6 +5061,387 @@
     <p:extLst>
       <p:ext uri="{BB962C8B-B14F-4D97-AF65-F5344CB8AC3E}">
         <p14:creationId xmlns:p14="http://schemas.microsoft.com/office/powerpoint/2010/main" val="790275714"/>
+      </p:ext>
+    </p:extLst>
+  </p:cSld>
+  <p:clrMapOvr>
+    <a:masterClrMapping/>
+  </p:clrMapOvr>
+</p:sld>
+</file>
+
+<file path=ppt/slides/slide8.xml><?xml version="1.0" encoding="utf-8"?>
+<p:sld xmlns:a="http://schemas.openxmlformats.org/drawingml/2006/main" xmlns:r="http://schemas.openxmlformats.org/officeDocument/2006/relationships" xmlns:p="http://schemas.openxmlformats.org/presentationml/2006/main">
+  <p:cSld>
+    <p:spTree>
+      <p:nvGrpSpPr>
+        <p:cNvPr id="1" name=""/>
+        <p:cNvGrpSpPr/>
+        <p:nvPr/>
+      </p:nvGrpSpPr>
+      <p:grpSpPr>
+        <a:xfrm>
+          <a:off x="0" y="0"/>
+          <a:ext cx="0" cy="0"/>
+          <a:chOff x="0" y="0"/>
+          <a:chExt cx="0" cy="0"/>
+        </a:xfrm>
+      </p:grpSpPr>
+      <p:sp>
+        <p:nvSpPr>
+          <p:cNvPr id="2" name="Title 1">
+            <a:extLst>
+              <a:ext uri="{FF2B5EF4-FFF2-40B4-BE49-F238E27FC236}">
+                <a16:creationId xmlns:a16="http://schemas.microsoft.com/office/drawing/2014/main" id="{39418C76-D18F-9C1B-1192-CD6192CC87ED}"/>
+              </a:ext>
+            </a:extLst>
+          </p:cNvPr>
+          <p:cNvSpPr>
+            <a:spLocks noGrp="1"/>
+          </p:cNvSpPr>
+          <p:nvPr>
+            <p:ph type="title"/>
+          </p:nvPr>
+        </p:nvSpPr>
+        <p:spPr>
+          <a:xfrm>
+            <a:off x="0" y="-48658"/>
+            <a:ext cx="10515600" cy="1325563"/>
+          </a:xfrm>
+        </p:spPr>
+        <p:txBody>
+          <a:bodyPr>
+            <a:normAutofit/>
+          </a:bodyPr>
+          <a:lstStyle/>
+          <a:p>
+            <a:r>
+              <a:rPr lang="en-US" sz="4000" dirty="0"/>
+              <a:t>Tan &amp; Jaeger (2025) – RT distribution</a:t>
+            </a:r>
+            <a:endParaRPr lang="en-TW" sz="4000" dirty="0"/>
+          </a:p>
+        </p:txBody>
+      </p:sp>
+      <p:sp>
+        <p:nvSpPr>
+          <p:cNvPr id="3" name="Content Placeholder 2">
+            <a:extLst>
+              <a:ext uri="{FF2B5EF4-FFF2-40B4-BE49-F238E27FC236}">
+                <a16:creationId xmlns:a16="http://schemas.microsoft.com/office/drawing/2014/main" id="{64BEFE99-231F-0CDA-B2BA-30185A640B78}"/>
+              </a:ext>
+            </a:extLst>
+          </p:cNvPr>
+          <p:cNvSpPr>
+            <a:spLocks noGrp="1"/>
+          </p:cNvSpPr>
+          <p:nvPr>
+            <p:ph idx="1"/>
+          </p:nvPr>
+        </p:nvSpPr>
+        <p:spPr>
+          <a:xfrm>
+            <a:off x="92241" y="1428581"/>
+            <a:ext cx="11542295" cy="4351338"/>
+          </a:xfrm>
+        </p:spPr>
+        <p:txBody>
+          <a:bodyPr/>
+          <a:lstStyle/>
+          <a:p>
+            <a:r>
+              <a:rPr lang="en-US" dirty="0"/>
+              <a:t>The exclusion criteria do not appear to be correctly implemented:</a:t>
+            </a:r>
+            <a:br>
+              <a:rPr lang="en-US" dirty="0"/>
+            </a:br>
+            <a:r>
+              <a:rPr lang="en-US" dirty="0"/>
+              <a:t>*</a:t>
+            </a:r>
+            <a:r>
+              <a:rPr lang="en-US" sz="2400" dirty="0"/>
+              <a:t>super long RT tail in the final dataset (</a:t>
+            </a:r>
+            <a:r>
+              <a:rPr lang="en-US" sz="2400" dirty="0" err="1"/>
+              <a:t>d.for_analysis</a:t>
+            </a:r>
+            <a:r>
+              <a:rPr lang="en-US" sz="2400" dirty="0"/>
+              <a:t>)!</a:t>
+            </a:r>
+            <a:endParaRPr lang="en-TW" dirty="0"/>
+          </a:p>
+        </p:txBody>
+      </p:sp>
+      <p:pic>
+        <p:nvPicPr>
+          <p:cNvPr id="7" name="Picture 6">
+            <a:extLst>
+              <a:ext uri="{FF2B5EF4-FFF2-40B4-BE49-F238E27FC236}">
+                <a16:creationId xmlns:a16="http://schemas.microsoft.com/office/drawing/2014/main" id="{9637183E-F8C2-7763-7F74-59075272D8E3}"/>
+              </a:ext>
+            </a:extLst>
+          </p:cNvPr>
+          <p:cNvPicPr>
+            <a:picLocks noChangeAspect="1"/>
+          </p:cNvPicPr>
+          <p:nvPr/>
+        </p:nvPicPr>
+        <p:blipFill>
+          <a:blip r:embed="rId2"/>
+          <a:stretch>
+            <a:fillRect/>
+          </a:stretch>
+        </p:blipFill>
+        <p:spPr>
+          <a:xfrm>
+            <a:off x="1454483" y="2659980"/>
+            <a:ext cx="8411411" cy="3770203"/>
+          </a:xfrm>
+          <a:prstGeom prst="rect">
+            <a:avLst/>
+          </a:prstGeom>
+        </p:spPr>
+      </p:pic>
+      <p:sp>
+        <p:nvSpPr>
+          <p:cNvPr id="9" name="TextBox 8">
+            <a:extLst>
+              <a:ext uri="{FF2B5EF4-FFF2-40B4-BE49-F238E27FC236}">
+                <a16:creationId xmlns:a16="http://schemas.microsoft.com/office/drawing/2014/main" id="{2A9A4975-C67D-A49A-9F1F-1C7ACB4726F6}"/>
+              </a:ext>
+            </a:extLst>
+          </p:cNvPr>
+          <p:cNvSpPr txBox="1"/>
+          <p:nvPr/>
+        </p:nvSpPr>
+        <p:spPr>
+          <a:xfrm>
+            <a:off x="6196262" y="2818764"/>
+            <a:ext cx="3441032" cy="646331"/>
+          </a:xfrm>
+          <a:prstGeom prst="rect">
+            <a:avLst/>
+          </a:prstGeom>
+          <a:noFill/>
+        </p:spPr>
+        <p:txBody>
+          <a:bodyPr wrap="square">
+            <a:spAutoFit/>
+          </a:bodyPr>
+          <a:lstStyle/>
+          <a:p>
+            <a:r>
+              <a:rPr lang="en-US" dirty="0"/>
+              <a:t>RT &gt; 3000ms: 480/25224 (0.02%)</a:t>
+            </a:r>
+            <a:br>
+              <a:rPr lang="en-US" dirty="0"/>
+            </a:br>
+            <a:r>
+              <a:rPr lang="en-US" dirty="0"/>
+              <a:t>RT &lt; 200ms: 0%</a:t>
+            </a:r>
+            <a:endParaRPr lang="en-TW" dirty="0"/>
+          </a:p>
+        </p:txBody>
+      </p:sp>
+    </p:spTree>
+    <p:extLst>
+      <p:ext uri="{BB962C8B-B14F-4D97-AF65-F5344CB8AC3E}">
+        <p14:creationId xmlns:p14="http://schemas.microsoft.com/office/powerpoint/2010/main" val="1429974961"/>
+      </p:ext>
+    </p:extLst>
+  </p:cSld>
+  <p:clrMapOvr>
+    <a:masterClrMapping/>
+  </p:clrMapOvr>
+</p:sld>
+</file>
+
+<file path=ppt/slides/slide9.xml><?xml version="1.0" encoding="utf-8"?>
+<p:sld xmlns:a="http://schemas.openxmlformats.org/drawingml/2006/main" xmlns:r="http://schemas.openxmlformats.org/officeDocument/2006/relationships" xmlns:p="http://schemas.openxmlformats.org/presentationml/2006/main">
+  <p:cSld>
+    <p:spTree>
+      <p:nvGrpSpPr>
+        <p:cNvPr id="1" name=""/>
+        <p:cNvGrpSpPr/>
+        <p:nvPr/>
+      </p:nvGrpSpPr>
+      <p:grpSpPr>
+        <a:xfrm>
+          <a:off x="0" y="0"/>
+          <a:ext cx="0" cy="0"/>
+          <a:chOff x="0" y="0"/>
+          <a:chExt cx="0" cy="0"/>
+        </a:xfrm>
+      </p:grpSpPr>
+      <p:sp>
+        <p:nvSpPr>
+          <p:cNvPr id="2" name="Title 1">
+            <a:extLst>
+              <a:ext uri="{FF2B5EF4-FFF2-40B4-BE49-F238E27FC236}">
+                <a16:creationId xmlns:a16="http://schemas.microsoft.com/office/drawing/2014/main" id="{39418C76-D18F-9C1B-1192-CD6192CC87ED}"/>
+              </a:ext>
+            </a:extLst>
+          </p:cNvPr>
+          <p:cNvSpPr>
+            <a:spLocks noGrp="1"/>
+          </p:cNvSpPr>
+          <p:nvPr>
+            <p:ph type="title"/>
+          </p:nvPr>
+        </p:nvSpPr>
+        <p:spPr>
+          <a:xfrm>
+            <a:off x="0" y="-48658"/>
+            <a:ext cx="10515600" cy="1325563"/>
+          </a:xfrm>
+        </p:spPr>
+        <p:txBody>
+          <a:bodyPr>
+            <a:normAutofit/>
+          </a:bodyPr>
+          <a:lstStyle/>
+          <a:p>
+            <a:r>
+              <a:rPr lang="en-US" sz="4000" dirty="0"/>
+              <a:t>Tan &amp; Jaeger (2025) – RT distribution (subset)</a:t>
+            </a:r>
+            <a:endParaRPr lang="en-TW" sz="4000" dirty="0"/>
+          </a:p>
+        </p:txBody>
+      </p:sp>
+      <p:sp>
+        <p:nvSpPr>
+          <p:cNvPr id="3" name="Content Placeholder 2">
+            <a:extLst>
+              <a:ext uri="{FF2B5EF4-FFF2-40B4-BE49-F238E27FC236}">
+                <a16:creationId xmlns:a16="http://schemas.microsoft.com/office/drawing/2014/main" id="{64BEFE99-231F-0CDA-B2BA-30185A640B78}"/>
+              </a:ext>
+            </a:extLst>
+          </p:cNvPr>
+          <p:cNvSpPr>
+            <a:spLocks noGrp="1"/>
+          </p:cNvSpPr>
+          <p:nvPr>
+            <p:ph idx="1"/>
+          </p:nvPr>
+        </p:nvSpPr>
+        <p:spPr>
+          <a:xfrm>
+            <a:off x="44113" y="1043565"/>
+            <a:ext cx="11542295" cy="629824"/>
+          </a:xfrm>
+        </p:spPr>
+        <p:txBody>
+          <a:bodyPr/>
+          <a:lstStyle/>
+          <a:p>
+            <a:r>
+              <a:rPr lang="en-US" dirty="0"/>
+              <a:t>Exclude trials with RT &gt; 3000ms</a:t>
+            </a:r>
+            <a:endParaRPr lang="en-TW" dirty="0"/>
+          </a:p>
+        </p:txBody>
+      </p:sp>
+      <p:pic>
+        <p:nvPicPr>
+          <p:cNvPr id="7" name="Picture 6">
+            <a:extLst>
+              <a:ext uri="{FF2B5EF4-FFF2-40B4-BE49-F238E27FC236}">
+                <a16:creationId xmlns:a16="http://schemas.microsoft.com/office/drawing/2014/main" id="{9637183E-F8C2-7763-7F74-59075272D8E3}"/>
+              </a:ext>
+            </a:extLst>
+          </p:cNvPr>
+          <p:cNvPicPr>
+            <a:picLocks noChangeAspect="1"/>
+          </p:cNvPicPr>
+          <p:nvPr/>
+        </p:nvPicPr>
+        <p:blipFill>
+          <a:blip r:embed="rId2"/>
+          <a:srcRect/>
+          <a:stretch/>
+        </p:blipFill>
+        <p:spPr>
+          <a:xfrm>
+            <a:off x="56145" y="1673389"/>
+            <a:ext cx="4857599" cy="2312100"/>
+          </a:xfrm>
+          <a:prstGeom prst="rect">
+            <a:avLst/>
+          </a:prstGeom>
+        </p:spPr>
+      </p:pic>
+      <p:pic>
+        <p:nvPicPr>
+          <p:cNvPr id="5" name="Picture 4">
+            <a:extLst>
+              <a:ext uri="{FF2B5EF4-FFF2-40B4-BE49-F238E27FC236}">
+                <a16:creationId xmlns:a16="http://schemas.microsoft.com/office/drawing/2014/main" id="{4AE2AF1C-35CA-942E-9AE2-016E2B2CEEF7}"/>
+              </a:ext>
+            </a:extLst>
+          </p:cNvPr>
+          <p:cNvPicPr>
+            <a:picLocks noChangeAspect="1"/>
+          </p:cNvPicPr>
+          <p:nvPr/>
+        </p:nvPicPr>
+        <p:blipFill>
+          <a:blip r:embed="rId3"/>
+          <a:stretch>
+            <a:fillRect/>
+          </a:stretch>
+        </p:blipFill>
+        <p:spPr>
+          <a:xfrm>
+            <a:off x="5137480" y="1986707"/>
+            <a:ext cx="6891846" cy="4125332"/>
+          </a:xfrm>
+          <a:prstGeom prst="rect">
+            <a:avLst/>
+          </a:prstGeom>
+        </p:spPr>
+      </p:pic>
+      <p:pic>
+        <p:nvPicPr>
+          <p:cNvPr id="8" name="Picture 7">
+            <a:extLst>
+              <a:ext uri="{FF2B5EF4-FFF2-40B4-BE49-F238E27FC236}">
+                <a16:creationId xmlns:a16="http://schemas.microsoft.com/office/drawing/2014/main" id="{42D857CF-A1C4-3497-4F9F-FCC0CE35759D}"/>
+              </a:ext>
+            </a:extLst>
+          </p:cNvPr>
+          <p:cNvPicPr>
+            <a:picLocks noChangeAspect="1"/>
+          </p:cNvPicPr>
+          <p:nvPr/>
+        </p:nvPicPr>
+        <p:blipFill>
+          <a:blip r:embed="rId4"/>
+          <a:stretch>
+            <a:fillRect/>
+          </a:stretch>
+        </p:blipFill>
+        <p:spPr>
+          <a:xfrm>
+            <a:off x="75341" y="4059496"/>
+            <a:ext cx="4938036" cy="2569902"/>
+          </a:xfrm>
+          <a:prstGeom prst="rect">
+            <a:avLst/>
+          </a:prstGeom>
+        </p:spPr>
+      </p:pic>
+    </p:spTree>
+    <p:extLst>
+      <p:ext uri="{BB962C8B-B14F-4D97-AF65-F5344CB8AC3E}">
+        <p14:creationId xmlns:p14="http://schemas.microsoft.com/office/powerpoint/2010/main" val="2917893610"/>
       </p:ext>
     </p:extLst>
   </p:cSld>

--- a/progress-updates/20260609 updates.pptx
+++ b/progress-updates/20260609 updates.pptx
@@ -5,7 +5,7 @@
     <p:sldMasterId id="2147483648" r:id="rId1"/>
   </p:sldMasterIdLst>
   <p:notesMasterIdLst>
-    <p:notesMasterId r:id="rId12"/>
+    <p:notesMasterId r:id="rId11"/>
   </p:notesMasterIdLst>
   <p:sldIdLst>
     <p:sldId id="256" r:id="rId2"/>
@@ -15,9 +15,8 @@
     <p:sldId id="277" r:id="rId6"/>
     <p:sldId id="281" r:id="rId7"/>
     <p:sldId id="280" r:id="rId8"/>
-    <p:sldId id="283" r:id="rId9"/>
-    <p:sldId id="284" r:id="rId10"/>
-    <p:sldId id="282" r:id="rId11"/>
+    <p:sldId id="282" r:id="rId9"/>
+    <p:sldId id="283" r:id="rId10"/>
   </p:sldIdLst>
   <p:sldSz cx="12192000" cy="6858000"/>
   <p:notesSz cx="6858000" cy="9144000"/>
@@ -206,7 +205,7 @@
           <a:p>
             <a:fld id="{A9EB0D4F-7B20-C843-AEA0-6DA76DB40034}" type="datetimeFigureOut">
               <a:rPr lang="en-TW" smtClean="0"/>
-              <a:t>2026/6/7</a:t>
+              <a:t>6/8/26</a:t>
             </a:fld>
             <a:endParaRPr lang="en-TW"/>
           </a:p>
@@ -623,7 +622,7 @@
           <a:p>
             <a:fld id="{7B32B428-AB21-474F-A4D9-979B203162CD}" type="datetimeFigureOut">
               <a:rPr lang="en-TW" smtClean="0"/>
-              <a:t>2026/6/7</a:t>
+              <a:t>6/8/26</a:t>
             </a:fld>
             <a:endParaRPr lang="en-TW"/>
           </a:p>
@@ -823,7 +822,7 @@
           <a:p>
             <a:fld id="{7B32B428-AB21-474F-A4D9-979B203162CD}" type="datetimeFigureOut">
               <a:rPr lang="en-TW" smtClean="0"/>
-              <a:t>2026/6/7</a:t>
+              <a:t>6/8/26</a:t>
             </a:fld>
             <a:endParaRPr lang="en-TW"/>
           </a:p>
@@ -1033,7 +1032,7 @@
           <a:p>
             <a:fld id="{7B32B428-AB21-474F-A4D9-979B203162CD}" type="datetimeFigureOut">
               <a:rPr lang="en-TW" smtClean="0"/>
-              <a:t>2026/6/7</a:t>
+              <a:t>6/8/26</a:t>
             </a:fld>
             <a:endParaRPr lang="en-TW"/>
           </a:p>
@@ -1233,7 +1232,7 @@
           <a:p>
             <a:fld id="{7B32B428-AB21-474F-A4D9-979B203162CD}" type="datetimeFigureOut">
               <a:rPr lang="en-TW" smtClean="0"/>
-              <a:t>2026/6/7</a:t>
+              <a:t>6/8/26</a:t>
             </a:fld>
             <a:endParaRPr lang="en-TW"/>
           </a:p>
@@ -1509,7 +1508,7 @@
           <a:p>
             <a:fld id="{7B32B428-AB21-474F-A4D9-979B203162CD}" type="datetimeFigureOut">
               <a:rPr lang="en-TW" smtClean="0"/>
-              <a:t>2026/6/7</a:t>
+              <a:t>6/8/26</a:t>
             </a:fld>
             <a:endParaRPr lang="en-TW"/>
           </a:p>
@@ -1777,7 +1776,7 @@
           <a:p>
             <a:fld id="{7B32B428-AB21-474F-A4D9-979B203162CD}" type="datetimeFigureOut">
               <a:rPr lang="en-TW" smtClean="0"/>
-              <a:t>2026/6/7</a:t>
+              <a:t>6/8/26</a:t>
             </a:fld>
             <a:endParaRPr lang="en-TW"/>
           </a:p>
@@ -2192,7 +2191,7 @@
           <a:p>
             <a:fld id="{7B32B428-AB21-474F-A4D9-979B203162CD}" type="datetimeFigureOut">
               <a:rPr lang="en-TW" smtClean="0"/>
-              <a:t>2026/6/7</a:t>
+              <a:t>6/8/26</a:t>
             </a:fld>
             <a:endParaRPr lang="en-TW"/>
           </a:p>
@@ -2334,7 +2333,7 @@
           <a:p>
             <a:fld id="{7B32B428-AB21-474F-A4D9-979B203162CD}" type="datetimeFigureOut">
               <a:rPr lang="en-TW" smtClean="0"/>
-              <a:t>2026/6/7</a:t>
+              <a:t>6/8/26</a:t>
             </a:fld>
             <a:endParaRPr lang="en-TW"/>
           </a:p>
@@ -2447,7 +2446,7 @@
           <a:p>
             <a:fld id="{7B32B428-AB21-474F-A4D9-979B203162CD}" type="datetimeFigureOut">
               <a:rPr lang="en-TW" smtClean="0"/>
-              <a:t>2026/6/7</a:t>
+              <a:t>6/8/26</a:t>
             </a:fld>
             <a:endParaRPr lang="en-TW"/>
           </a:p>
@@ -2760,7 +2759,7 @@
           <a:p>
             <a:fld id="{7B32B428-AB21-474F-A4D9-979B203162CD}" type="datetimeFigureOut">
               <a:rPr lang="en-TW" smtClean="0"/>
-              <a:t>2026/6/7</a:t>
+              <a:t>6/8/26</a:t>
             </a:fld>
             <a:endParaRPr lang="en-TW"/>
           </a:p>
@@ -3049,7 +3048,7 @@
           <a:p>
             <a:fld id="{7B32B428-AB21-474F-A4D9-979B203162CD}" type="datetimeFigureOut">
               <a:rPr lang="en-TW" smtClean="0"/>
-              <a:t>2026/6/7</a:t>
+              <a:t>6/8/26</a:t>
             </a:fld>
             <a:endParaRPr lang="en-TW"/>
           </a:p>
@@ -3292,7 +3291,7 @@
           <a:p>
             <a:fld id="{7B32B428-AB21-474F-A4D9-979B203162CD}" type="datetimeFigureOut">
               <a:rPr lang="en-TW" smtClean="0"/>
-              <a:t>2026/6/7</a:t>
+              <a:t>6/8/26</a:t>
             </a:fld>
             <a:endParaRPr lang="en-TW"/>
           </a:p>
@@ -3778,135 +3777,6 @@
 </p:sld>
 </file>
 
-<file path=ppt/slides/slide10.xml><?xml version="1.0" encoding="utf-8"?>
-<p:sld xmlns:a="http://schemas.openxmlformats.org/drawingml/2006/main" xmlns:r="http://schemas.openxmlformats.org/officeDocument/2006/relationships" xmlns:p="http://schemas.openxmlformats.org/presentationml/2006/main">
-  <p:cSld>
-    <p:spTree>
-      <p:nvGrpSpPr>
-        <p:cNvPr id="1" name=""/>
-        <p:cNvGrpSpPr/>
-        <p:nvPr/>
-      </p:nvGrpSpPr>
-      <p:grpSpPr>
-        <a:xfrm>
-          <a:off x="0" y="0"/>
-          <a:ext cx="0" cy="0"/>
-          <a:chOff x="0" y="0"/>
-          <a:chExt cx="0" cy="0"/>
-        </a:xfrm>
-      </p:grpSpPr>
-      <p:sp>
-        <p:nvSpPr>
-          <p:cNvPr id="2" name="Title 1">
-            <a:extLst>
-              <a:ext uri="{FF2B5EF4-FFF2-40B4-BE49-F238E27FC236}">
-                <a16:creationId xmlns:a16="http://schemas.microsoft.com/office/drawing/2014/main" id="{39418C76-D18F-9C1B-1192-CD6192CC87ED}"/>
-              </a:ext>
-            </a:extLst>
-          </p:cNvPr>
-          <p:cNvSpPr>
-            <a:spLocks noGrp="1"/>
-          </p:cNvSpPr>
-          <p:nvPr>
-            <p:ph type="title"/>
-          </p:nvPr>
-        </p:nvSpPr>
-        <p:spPr>
-          <a:xfrm>
-            <a:off x="0" y="0"/>
-            <a:ext cx="10515600" cy="1325563"/>
-          </a:xfrm>
-        </p:spPr>
-        <p:txBody>
-          <a:bodyPr>
-            <a:normAutofit/>
-          </a:bodyPr>
-          <a:lstStyle/>
-          <a:p>
-            <a:r>
-              <a:rPr lang="en-US" sz="4000" dirty="0"/>
-              <a:t>To-dos</a:t>
-            </a:r>
-            <a:endParaRPr lang="en-TW" sz="4000" dirty="0"/>
-          </a:p>
-        </p:txBody>
-      </p:sp>
-      <p:sp>
-        <p:nvSpPr>
-          <p:cNvPr id="10" name="Content Placeholder 2">
-            <a:extLst>
-              <a:ext uri="{FF2B5EF4-FFF2-40B4-BE49-F238E27FC236}">
-                <a16:creationId xmlns:a16="http://schemas.microsoft.com/office/drawing/2014/main" id="{A3A4D24E-F981-72B4-F9CC-00A99363702B}"/>
-              </a:ext>
-            </a:extLst>
-          </p:cNvPr>
-          <p:cNvSpPr>
-            <a:spLocks noGrp="1"/>
-          </p:cNvSpPr>
-          <p:nvPr>
-            <p:ph idx="1"/>
-          </p:nvPr>
-        </p:nvSpPr>
-        <p:spPr>
-          <a:xfrm>
-            <a:off x="92241" y="1428581"/>
-            <a:ext cx="11542295" cy="4351338"/>
-          </a:xfrm>
-        </p:spPr>
-        <p:txBody>
-          <a:bodyPr/>
-          <a:lstStyle/>
-          <a:p>
-            <a:r>
-              <a:rPr lang="en-US" dirty="0"/>
-              <a:t>Check VOT slope exclusion criteria in TJ paper</a:t>
-            </a:r>
-            <a:br>
-              <a:rPr lang="en-US" dirty="0"/>
-            </a:br>
-            <a:r>
-              <a:rPr lang="en-US" sz="2400" dirty="0"/>
-              <a:t>*see details in (TJ-OSF)section-2-methods.Rmd</a:t>
-            </a:r>
-            <a:r>
-              <a:rPr lang="en-US" dirty="0"/>
-              <a:t> </a:t>
-            </a:r>
-          </a:p>
-          <a:p>
-            <a:r>
-              <a:rPr lang="en-US" dirty="0"/>
-              <a:t>Complete 18 stimuli lists (exposure + test)</a:t>
-            </a:r>
-          </a:p>
-          <a:p>
-            <a:r>
-              <a:rPr lang="en-US" dirty="0"/>
-              <a:t>Sanity check of stimuli lists (counterbalancing and phonetic distributions)</a:t>
-            </a:r>
-            <a:endParaRPr lang="en-TW" dirty="0"/>
-          </a:p>
-          <a:p>
-            <a:pPr marL="0" indent="0">
-              <a:buNone/>
-            </a:pPr>
-            <a:endParaRPr lang="en-TW" dirty="0"/>
-          </a:p>
-        </p:txBody>
-      </p:sp>
-    </p:spTree>
-    <p:extLst>
-      <p:ext uri="{BB962C8B-B14F-4D97-AF65-F5344CB8AC3E}">
-        <p14:creationId xmlns:p14="http://schemas.microsoft.com/office/powerpoint/2010/main" val="381367419"/>
-      </p:ext>
-    </p:extLst>
-  </p:cSld>
-  <p:clrMapOvr>
-    <a:masterClrMapping/>
-  </p:clrMapOvr>
-</p:sld>
-</file>
-
 <file path=ppt/slides/slide2.xml><?xml version="1.0" encoding="utf-8"?>
 <p:sld xmlns:a="http://schemas.openxmlformats.org/drawingml/2006/main" xmlns:r="http://schemas.openxmlformats.org/officeDocument/2006/relationships" xmlns:p="http://schemas.openxmlformats.org/presentationml/2006/main">
   <p:cSld>
@@ -5089,99 +4959,161 @@
       </p:grpSpPr>
       <p:sp>
         <p:nvSpPr>
-          <p:cNvPr id="2" name="Title 1">
-            <a:extLst>
-              <a:ext uri="{FF2B5EF4-FFF2-40B4-BE49-F238E27FC236}">
-                <a16:creationId xmlns:a16="http://schemas.microsoft.com/office/drawing/2014/main" id="{39418C76-D18F-9C1B-1192-CD6192CC87ED}"/>
-              </a:ext>
-            </a:extLst>
-          </p:cNvPr>
-          <p:cNvSpPr>
-            <a:spLocks noGrp="1"/>
-          </p:cNvSpPr>
-          <p:nvPr>
-            <p:ph type="title"/>
-          </p:nvPr>
+          <p:cNvPr id="4" name="TextBox 3">
+            <a:extLst>
+              <a:ext uri="{FF2B5EF4-FFF2-40B4-BE49-F238E27FC236}">
+                <a16:creationId xmlns:a16="http://schemas.microsoft.com/office/drawing/2014/main" id="{22C2A107-6B83-91D7-F9A5-8FA410A5B0D8}"/>
+              </a:ext>
+            </a:extLst>
+          </p:cNvPr>
+          <p:cNvSpPr txBox="1"/>
+          <p:nvPr/>
         </p:nvSpPr>
         <p:spPr>
           <a:xfrm>
-            <a:off x="0" y="-48658"/>
-            <a:ext cx="10515600" cy="1325563"/>
+            <a:off x="253388" y="157356"/>
+            <a:ext cx="2797048" cy="1754326"/>
           </a:xfrm>
+          <a:prstGeom prst="rect">
+            <a:avLst/>
+          </a:prstGeom>
+          <a:noFill/>
         </p:spPr>
         <p:txBody>
-          <a:bodyPr>
-            <a:normAutofit/>
+          <a:bodyPr wrap="none" rtlCol="0">
+            <a:spAutoFit/>
           </a:bodyPr>
           <a:lstStyle/>
           <a:p>
             <a:r>
-              <a:rPr lang="en-US" sz="4000" dirty="0"/>
-              <a:t>Tan &amp; Jaeger (2025) – RT distribution</a:t>
-            </a:r>
-            <a:endParaRPr lang="en-TW" sz="4000" dirty="0"/>
-          </a:p>
-        </p:txBody>
-      </p:sp>
-      <p:sp>
-        <p:nvSpPr>
-          <p:cNvPr id="3" name="Content Placeholder 2">
-            <a:extLst>
-              <a:ext uri="{FF2B5EF4-FFF2-40B4-BE49-F238E27FC236}">
-                <a16:creationId xmlns:a16="http://schemas.microsoft.com/office/drawing/2014/main" id="{64BEFE99-231F-0CDA-B2BA-30185A640B78}"/>
-              </a:ext>
-            </a:extLst>
-          </p:cNvPr>
-          <p:cNvSpPr>
-            <a:spLocks noGrp="1"/>
-          </p:cNvSpPr>
-          <p:nvPr>
-            <p:ph idx="1"/>
-          </p:nvPr>
-        </p:nvSpPr>
-        <p:spPr>
-          <a:xfrm>
-            <a:off x="92241" y="1428581"/>
-            <a:ext cx="11542295" cy="4351338"/>
-          </a:xfrm>
-        </p:spPr>
-        <p:txBody>
-          <a:bodyPr/>
-          <a:lstStyle/>
-          <a:p>
-            <a:r>
-              <a:rPr lang="en-US" dirty="0"/>
-              <a:t>The exclusion criteria do not appear to be correctly implemented:</a:t>
-            </a:r>
-            <a:br>
-              <a:rPr lang="en-US" dirty="0"/>
-            </a:br>
-            <a:r>
-              <a:rPr lang="en-US" dirty="0"/>
-              <a:t>*</a:t>
-            </a:r>
-            <a:r>
-              <a:rPr lang="en-US" sz="2400" dirty="0"/>
-              <a:t>super long RT tail in the final dataset (</a:t>
-            </a:r>
-            <a:r>
-              <a:rPr lang="en-US" sz="2400" dirty="0" err="1"/>
-              <a:t>d.for_analysis</a:t>
-            </a:r>
-            <a:r>
-              <a:rPr lang="en-US" sz="2400" dirty="0"/>
-              <a:t>)!</a:t>
-            </a:r>
-            <a:endParaRPr lang="en-TW" dirty="0"/>
+              <a:rPr lang="en-US" altLang="zh-CN" dirty="0"/>
+              <a:t>Spanish</a:t>
+            </a:r>
+            <a:r>
+              <a:rPr lang="zh-CN" altLang="en-US" dirty="0"/>
+              <a:t> </a:t>
+            </a:r>
+            <a:r>
+              <a:rPr lang="en-US" altLang="zh-CN" dirty="0"/>
+              <a:t>instruction</a:t>
+            </a:r>
+          </a:p>
+          <a:p>
+            <a:endParaRPr lang="en-US" altLang="zh-CN" dirty="0"/>
+          </a:p>
+          <a:p>
+            <a:pPr marL="285750" indent="-285750">
+              <a:buFont typeface="Arial" panose="020B0604020202020204" pitchFamily="34" charset="0"/>
+              <a:buChar char="•"/>
+            </a:pPr>
+            <a:r>
+              <a:rPr lang="en-US" altLang="zh-CN" dirty="0"/>
+              <a:t>Avoid</a:t>
+            </a:r>
+            <a:r>
+              <a:rPr lang="zh-CN" altLang="en-US" dirty="0"/>
+              <a:t> </a:t>
+            </a:r>
+            <a:r>
+              <a:rPr lang="en-US" altLang="zh-CN" dirty="0"/>
+              <a:t>/d/,</a:t>
+            </a:r>
+            <a:r>
+              <a:rPr lang="zh-CN" altLang="en-US" dirty="0"/>
+              <a:t> </a:t>
+            </a:r>
+            <a:r>
+              <a:rPr lang="en-US" altLang="zh-CN" dirty="0"/>
+              <a:t>/t/</a:t>
+            </a:r>
+          </a:p>
+          <a:p>
+            <a:pPr marL="285750" indent="-285750">
+              <a:buFont typeface="Arial" panose="020B0604020202020204" pitchFamily="34" charset="0"/>
+              <a:buChar char="•"/>
+            </a:pPr>
+            <a:r>
+              <a:rPr lang="en-US" altLang="zh-CN" dirty="0"/>
+              <a:t>Keep</a:t>
+            </a:r>
+            <a:r>
+              <a:rPr lang="zh-CN" altLang="en-US" dirty="0"/>
+              <a:t> </a:t>
+            </a:r>
+            <a:r>
+              <a:rPr lang="en-US" altLang="zh-CN" dirty="0"/>
+              <a:t>it</a:t>
+            </a:r>
+            <a:r>
+              <a:rPr lang="zh-CN" altLang="en-US" dirty="0"/>
+              <a:t> </a:t>
+            </a:r>
+            <a:r>
+              <a:rPr lang="en-US" altLang="zh-CN" dirty="0"/>
+              <a:t>short</a:t>
+            </a:r>
+          </a:p>
+          <a:p>
+            <a:pPr marL="285750" indent="-285750">
+              <a:buFont typeface="Arial" panose="020B0604020202020204" pitchFamily="34" charset="0"/>
+              <a:buChar char="•"/>
+            </a:pPr>
+            <a:r>
+              <a:rPr lang="en-US" altLang="zh-CN" dirty="0"/>
+              <a:t>Third</a:t>
+            </a:r>
+            <a:r>
+              <a:rPr lang="zh-CN" altLang="en-US" dirty="0"/>
+              <a:t> </a:t>
+            </a:r>
+            <a:r>
+              <a:rPr lang="en-US" altLang="zh-CN" dirty="0"/>
+              <a:t>person</a:t>
+            </a:r>
+            <a:r>
+              <a:rPr lang="zh-CN" altLang="en-US" dirty="0"/>
+              <a:t> </a:t>
+            </a:r>
+            <a:r>
+              <a:rPr lang="en-US" altLang="zh-CN" dirty="0"/>
+              <a:t>perspective</a:t>
+            </a:r>
+          </a:p>
+          <a:p>
+            <a:pPr marL="285750" indent="-285750">
+              <a:buFont typeface="Arial" panose="020B0604020202020204" pitchFamily="34" charset="0"/>
+              <a:buChar char="•"/>
+            </a:pPr>
+            <a:r>
+              <a:rPr lang="en-US" altLang="zh-CN" dirty="0"/>
+              <a:t>And</a:t>
+            </a:r>
+            <a:r>
+              <a:rPr lang="zh-CN" altLang="en-US" dirty="0"/>
+              <a:t> </a:t>
+            </a:r>
+            <a:r>
+              <a:rPr lang="en-US" altLang="zh-CN" dirty="0"/>
+              <a:t>no</a:t>
+            </a:r>
+            <a:r>
+              <a:rPr lang="zh-CN" altLang="en-US" dirty="0"/>
+              <a:t> </a:t>
+            </a:r>
+            <a:r>
+              <a:rPr lang="en-US" altLang="zh-CN" dirty="0"/>
+              <a:t>audio?</a:t>
+            </a:r>
+            <a:endParaRPr lang="en-US" dirty="0"/>
           </a:p>
         </p:txBody>
       </p:sp>
       <p:pic>
         <p:nvPicPr>
-          <p:cNvPr id="7" name="Picture 6">
-            <a:extLst>
-              <a:ext uri="{FF2B5EF4-FFF2-40B4-BE49-F238E27FC236}">
-                <a16:creationId xmlns:a16="http://schemas.microsoft.com/office/drawing/2014/main" id="{9637183E-F8C2-7763-7F74-59075272D8E3}"/>
+          <p:cNvPr id="6" name="Picture 5">
+            <a:extLst>
+              <a:ext uri="{FF2B5EF4-FFF2-40B4-BE49-F238E27FC236}">
+                <a16:creationId xmlns:a16="http://schemas.microsoft.com/office/drawing/2014/main" id="{CACC1561-5E9A-EE75-D7CD-89E9E46BE5E1}"/>
               </a:ext>
             </a:extLst>
           </p:cNvPr>
@@ -5198,61 +5130,18 @@
         </p:blipFill>
         <p:spPr>
           <a:xfrm>
-            <a:off x="1454483" y="2659980"/>
-            <a:ext cx="8411411" cy="3770203"/>
+            <a:off x="2022971" y="2106865"/>
+            <a:ext cx="8476563" cy="4670897"/>
           </a:xfrm>
           <a:prstGeom prst="rect">
             <a:avLst/>
           </a:prstGeom>
         </p:spPr>
       </p:pic>
-      <p:sp>
-        <p:nvSpPr>
-          <p:cNvPr id="9" name="TextBox 8">
-            <a:extLst>
-              <a:ext uri="{FF2B5EF4-FFF2-40B4-BE49-F238E27FC236}">
-                <a16:creationId xmlns:a16="http://schemas.microsoft.com/office/drawing/2014/main" id="{2A9A4975-C67D-A49A-9F1F-1C7ACB4726F6}"/>
-              </a:ext>
-            </a:extLst>
-          </p:cNvPr>
-          <p:cNvSpPr txBox="1"/>
-          <p:nvPr/>
-        </p:nvSpPr>
-        <p:spPr>
-          <a:xfrm>
-            <a:off x="6196262" y="2818764"/>
-            <a:ext cx="3441032" cy="646331"/>
-          </a:xfrm>
-          <a:prstGeom prst="rect">
-            <a:avLst/>
-          </a:prstGeom>
-          <a:noFill/>
-        </p:spPr>
-        <p:txBody>
-          <a:bodyPr wrap="square">
-            <a:spAutoFit/>
-          </a:bodyPr>
-          <a:lstStyle/>
-          <a:p>
-            <a:r>
-              <a:rPr lang="en-US" dirty="0"/>
-              <a:t>RT &gt; 3000ms: 480/25224 (0.02%)</a:t>
-            </a:r>
-            <a:br>
-              <a:rPr lang="en-US" dirty="0"/>
-            </a:br>
-            <a:r>
-              <a:rPr lang="en-US" dirty="0"/>
-              <a:t>RT &lt; 200ms: 0%</a:t>
-            </a:r>
-            <a:endParaRPr lang="en-TW" dirty="0"/>
-          </a:p>
-        </p:txBody>
-      </p:sp>
     </p:spTree>
     <p:extLst>
       <p:ext uri="{BB962C8B-B14F-4D97-AF65-F5344CB8AC3E}">
-        <p14:creationId xmlns:p14="http://schemas.microsoft.com/office/powerpoint/2010/main" val="1429974961"/>
+        <p14:creationId xmlns:p14="http://schemas.microsoft.com/office/powerpoint/2010/main" val="2838626071"/>
       </p:ext>
     </p:extLst>
   </p:cSld>
@@ -5281,167 +5170,139 @@
       </p:grpSpPr>
       <p:sp>
         <p:nvSpPr>
-          <p:cNvPr id="2" name="Title 1">
-            <a:extLst>
-              <a:ext uri="{FF2B5EF4-FFF2-40B4-BE49-F238E27FC236}">
-                <a16:creationId xmlns:a16="http://schemas.microsoft.com/office/drawing/2014/main" id="{39418C76-D18F-9C1B-1192-CD6192CC87ED}"/>
-              </a:ext>
-            </a:extLst>
-          </p:cNvPr>
-          <p:cNvSpPr>
-            <a:spLocks noGrp="1"/>
-          </p:cNvSpPr>
-          <p:nvPr>
-            <p:ph type="title"/>
-          </p:nvPr>
+          <p:cNvPr id="4" name="TextBox 3">
+            <a:extLst>
+              <a:ext uri="{FF2B5EF4-FFF2-40B4-BE49-F238E27FC236}">
+                <a16:creationId xmlns:a16="http://schemas.microsoft.com/office/drawing/2014/main" id="{917DC09E-3156-39EB-3CC6-62DB75304BD5}"/>
+              </a:ext>
+            </a:extLst>
+          </p:cNvPr>
+          <p:cNvSpPr txBox="1"/>
+          <p:nvPr/>
         </p:nvSpPr>
         <p:spPr>
           <a:xfrm>
-            <a:off x="0" y="-48658"/>
-            <a:ext cx="10515600" cy="1325563"/>
-          </a:xfrm>
-        </p:spPr>
-        <p:txBody>
-          <a:bodyPr>
-            <a:normAutofit/>
-          </a:bodyPr>
-          <a:lstStyle/>
-          <a:p>
-            <a:r>
-              <a:rPr lang="en-US" sz="4000" dirty="0"/>
-              <a:t>Tan &amp; Jaeger (2025) – RT distribution (subset)</a:t>
-            </a:r>
-            <a:endParaRPr lang="en-TW" sz="4000" dirty="0"/>
-          </a:p>
-        </p:txBody>
-      </p:sp>
-      <p:sp>
-        <p:nvSpPr>
-          <p:cNvPr id="3" name="Content Placeholder 2">
-            <a:extLst>
-              <a:ext uri="{FF2B5EF4-FFF2-40B4-BE49-F238E27FC236}">
-                <a16:creationId xmlns:a16="http://schemas.microsoft.com/office/drawing/2014/main" id="{64BEFE99-231F-0CDA-B2BA-30185A640B78}"/>
-              </a:ext>
-            </a:extLst>
-          </p:cNvPr>
-          <p:cNvSpPr>
-            <a:spLocks noGrp="1"/>
-          </p:cNvSpPr>
-          <p:nvPr>
-            <p:ph idx="1"/>
-          </p:nvPr>
-        </p:nvSpPr>
-        <p:spPr>
-          <a:xfrm>
-            <a:off x="44113" y="1043565"/>
-            <a:ext cx="11542295" cy="629824"/>
-          </a:xfrm>
-        </p:spPr>
-        <p:txBody>
-          <a:bodyPr/>
-          <a:lstStyle/>
-          <a:p>
-            <a:r>
-              <a:rPr lang="en-US" dirty="0"/>
-              <a:t>Exclude trials with RT &gt; 3000ms</a:t>
-            </a:r>
-            <a:endParaRPr lang="en-TW" dirty="0"/>
-          </a:p>
-        </p:txBody>
-      </p:sp>
-      <p:pic>
-        <p:nvPicPr>
-          <p:cNvPr id="7" name="Picture 6">
-            <a:extLst>
-              <a:ext uri="{FF2B5EF4-FFF2-40B4-BE49-F238E27FC236}">
-                <a16:creationId xmlns:a16="http://schemas.microsoft.com/office/drawing/2014/main" id="{9637183E-F8C2-7763-7F74-59075272D8E3}"/>
-              </a:ext>
-            </a:extLst>
-          </p:cNvPr>
-          <p:cNvPicPr>
-            <a:picLocks noChangeAspect="1"/>
-          </p:cNvPicPr>
-          <p:nvPr/>
-        </p:nvPicPr>
-        <p:blipFill>
-          <a:blip r:embed="rId2"/>
-          <a:srcRect/>
-          <a:stretch/>
-        </p:blipFill>
-        <p:spPr>
-          <a:xfrm>
-            <a:off x="56145" y="1673389"/>
-            <a:ext cx="4857599" cy="2312100"/>
+            <a:off x="253388" y="154236"/>
+            <a:ext cx="1987147" cy="369332"/>
           </a:xfrm>
           <a:prstGeom prst="rect">
             <a:avLst/>
           </a:prstGeom>
+          <a:noFill/>
         </p:spPr>
-      </p:pic>
-      <p:pic>
-        <p:nvPicPr>
-          <p:cNvPr id="5" name="Picture 4">
-            <a:extLst>
-              <a:ext uri="{FF2B5EF4-FFF2-40B4-BE49-F238E27FC236}">
-                <a16:creationId xmlns:a16="http://schemas.microsoft.com/office/drawing/2014/main" id="{4AE2AF1C-35CA-942E-9AE2-016E2B2CEEF7}"/>
-              </a:ext>
-            </a:extLst>
-          </p:cNvPr>
-          <p:cNvPicPr>
-            <a:picLocks noChangeAspect="1"/>
-          </p:cNvPicPr>
+        <p:txBody>
+          <a:bodyPr wrap="none" rtlCol="0">
+            <a:spAutoFit/>
+          </a:bodyPr>
+          <a:lstStyle/>
+          <a:p>
+            <a:r>
+              <a:rPr lang="en-US" altLang="zh-CN" dirty="0"/>
+              <a:t>General</a:t>
+            </a:r>
+            <a:r>
+              <a:rPr lang="zh-CN" altLang="en-US" dirty="0"/>
+              <a:t> </a:t>
+            </a:r>
+            <a:r>
+              <a:rPr lang="en-US" altLang="zh-CN" dirty="0"/>
+              <a:t>instruction</a:t>
+            </a:r>
+          </a:p>
+        </p:txBody>
+      </p:sp>
+      <p:sp>
+        <p:nvSpPr>
+          <p:cNvPr id="5" name="TextBox 4">
+            <a:extLst>
+              <a:ext uri="{FF2B5EF4-FFF2-40B4-BE49-F238E27FC236}">
+                <a16:creationId xmlns:a16="http://schemas.microsoft.com/office/drawing/2014/main" id="{0A36EB46-FAED-3DE2-DACD-F920CC9FA7E3}"/>
+              </a:ext>
+            </a:extLst>
+          </p:cNvPr>
+          <p:cNvSpPr txBox="1"/>
           <p:nvPr/>
-        </p:nvPicPr>
-        <p:blipFill>
-          <a:blip r:embed="rId3"/>
-          <a:stretch>
-            <a:fillRect/>
-          </a:stretch>
-        </p:blipFill>
+        </p:nvSpPr>
         <p:spPr>
           <a:xfrm>
-            <a:off x="5137480" y="1986707"/>
-            <a:ext cx="6891846" cy="4125332"/>
+            <a:off x="253388" y="523568"/>
+            <a:ext cx="5142049" cy="369332"/>
           </a:xfrm>
           <a:prstGeom prst="rect">
             <a:avLst/>
           </a:prstGeom>
+          <a:noFill/>
         </p:spPr>
-      </p:pic>
-      <p:pic>
-        <p:nvPicPr>
-          <p:cNvPr id="8" name="Picture 7">
-            <a:extLst>
-              <a:ext uri="{FF2B5EF4-FFF2-40B4-BE49-F238E27FC236}">
-                <a16:creationId xmlns:a16="http://schemas.microsoft.com/office/drawing/2014/main" id="{42D857CF-A1C4-3497-4F9F-FCC0CE35759D}"/>
-              </a:ext>
-            </a:extLst>
-          </p:cNvPr>
-          <p:cNvPicPr>
-            <a:picLocks noChangeAspect="1"/>
-          </p:cNvPicPr>
-          <p:nvPr/>
-        </p:nvPicPr>
-        <p:blipFill>
-          <a:blip r:embed="rId4"/>
-          <a:stretch>
-            <a:fillRect/>
-          </a:stretch>
-        </p:blipFill>
-        <p:spPr>
-          <a:xfrm>
-            <a:off x="75341" y="4059496"/>
-            <a:ext cx="4938036" cy="2569902"/>
-          </a:xfrm>
-          <a:prstGeom prst="rect">
-            <a:avLst/>
-          </a:prstGeom>
-        </p:spPr>
-      </p:pic>
+        <p:txBody>
+          <a:bodyPr wrap="none" rtlCol="0">
+            <a:spAutoFit/>
+          </a:bodyPr>
+          <a:lstStyle/>
+          <a:p>
+            <a:pPr marL="285750" indent="-285750">
+              <a:buFont typeface="Arial" panose="020B0604020202020204" pitchFamily="34" charset="0"/>
+              <a:buChar char="•"/>
+            </a:pPr>
+            <a:r>
+              <a:rPr lang="en-US" altLang="zh-CN" dirty="0"/>
+              <a:t>ask</a:t>
+            </a:r>
+            <a:r>
+              <a:rPr lang="zh-CN" altLang="en-US" dirty="0"/>
+              <a:t> </a:t>
+            </a:r>
+            <a:r>
+              <a:rPr lang="en-US" altLang="zh-CN" dirty="0"/>
+              <a:t>participants</a:t>
+            </a:r>
+            <a:r>
+              <a:rPr lang="zh-CN" altLang="en-US" dirty="0"/>
+              <a:t> </a:t>
+            </a:r>
+            <a:r>
+              <a:rPr lang="en-US" altLang="zh-CN" dirty="0"/>
+              <a:t>to</a:t>
+            </a:r>
+            <a:r>
+              <a:rPr lang="zh-CN" altLang="en-US" dirty="0"/>
+              <a:t> </a:t>
+            </a:r>
+            <a:r>
+              <a:rPr lang="en-US" altLang="zh-CN" dirty="0"/>
+              <a:t>respond</a:t>
+            </a:r>
+            <a:r>
+              <a:rPr lang="zh-CN" altLang="en-US" dirty="0"/>
+              <a:t> </a:t>
+            </a:r>
+            <a:r>
+              <a:rPr lang="en-US" altLang="zh-CN" dirty="0"/>
+              <a:t>quickly</a:t>
+            </a:r>
+            <a:r>
+              <a:rPr lang="zh-CN" altLang="en-US" dirty="0"/>
+              <a:t> </a:t>
+            </a:r>
+            <a:r>
+              <a:rPr lang="en-US" altLang="zh-CN" dirty="0"/>
+              <a:t>and</a:t>
+            </a:r>
+            <a:r>
+              <a:rPr lang="zh-CN" altLang="en-US" dirty="0"/>
+              <a:t> </a:t>
+            </a:r>
+            <a:r>
+              <a:rPr lang="en-US" altLang="zh-CN"/>
+              <a:t>accurately</a:t>
+            </a:r>
+            <a:endParaRPr lang="en-US" altLang="zh-CN" dirty="0"/>
+          </a:p>
+        </p:txBody>
+      </p:sp>
     </p:spTree>
     <p:extLst>
       <p:ext uri="{BB962C8B-B14F-4D97-AF65-F5344CB8AC3E}">
-        <p14:creationId xmlns:p14="http://schemas.microsoft.com/office/powerpoint/2010/main" val="2917893610"/>
+        <p14:creationId xmlns:p14="http://schemas.microsoft.com/office/powerpoint/2010/main" val="420446843"/>
       </p:ext>
     </p:extLst>
   </p:cSld>

--- a/progress-updates/20260609 updates.pptx
+++ b/progress-updates/20260609 updates.pptx
@@ -5292,13 +5292,43 @@
               <a:t> </a:t>
             </a:r>
             <a:r>
-              <a:rPr lang="en-US" altLang="zh-CN"/>
+              <a:rPr lang="en-US" altLang="zh-CN" dirty="0"/>
               <a:t>accurately</a:t>
             </a:r>
-            <a:endParaRPr lang="en-US" altLang="zh-CN" dirty="0"/>
-          </a:p>
-        </p:txBody>
-      </p:sp>
+          </a:p>
+        </p:txBody>
+      </p:sp>
+      <p:pic>
+        <p:nvPicPr>
+          <p:cNvPr id="6" name="Picture 5">
+            <a:extLst>
+              <a:ext uri="{FF2B5EF4-FFF2-40B4-BE49-F238E27FC236}">
+                <a16:creationId xmlns:a16="http://schemas.microsoft.com/office/drawing/2014/main" id="{4625CB16-8EEF-AF8B-0672-90D7C128155E}"/>
+              </a:ext>
+            </a:extLst>
+          </p:cNvPr>
+          <p:cNvPicPr>
+            <a:picLocks noChangeAspect="1"/>
+          </p:cNvPicPr>
+          <p:nvPr/>
+        </p:nvPicPr>
+        <p:blipFill>
+          <a:blip r:embed="rId2"/>
+          <a:srcRect t="7851"/>
+          <a:stretch>
+            <a:fillRect/>
+          </a:stretch>
+        </p:blipFill>
+        <p:spPr>
+          <a:xfrm>
+            <a:off x="487184" y="1082123"/>
+            <a:ext cx="7772400" cy="3034328"/>
+          </a:xfrm>
+          <a:prstGeom prst="rect">
+            <a:avLst/>
+          </a:prstGeom>
+        </p:spPr>
+      </p:pic>
     </p:spTree>
     <p:extLst>
       <p:ext uri="{BB962C8B-B14F-4D97-AF65-F5344CB8AC3E}">

--- a/progress-updates/20260609 updates.pptx
+++ b/progress-updates/20260609 updates.pptx
@@ -5,7 +5,7 @@
     <p:sldMasterId id="2147483648" r:id="rId1"/>
   </p:sldMasterIdLst>
   <p:notesMasterIdLst>
-    <p:notesMasterId r:id="rId19"/>
+    <p:notesMasterId r:id="rId21"/>
   </p:notesMasterIdLst>
   <p:sldIdLst>
     <p:sldId id="256" r:id="rId2"/>
@@ -15,16 +15,18 @@
     <p:sldId id="277" r:id="rId6"/>
     <p:sldId id="281" r:id="rId7"/>
     <p:sldId id="280" r:id="rId8"/>
-    <p:sldId id="290" r:id="rId9"/>
-    <p:sldId id="284" r:id="rId10"/>
-    <p:sldId id="287" r:id="rId11"/>
-    <p:sldId id="285" r:id="rId12"/>
-    <p:sldId id="286" r:id="rId13"/>
-    <p:sldId id="288" r:id="rId14"/>
-    <p:sldId id="289" r:id="rId15"/>
-    <p:sldId id="291" r:id="rId16"/>
-    <p:sldId id="282" r:id="rId17"/>
-    <p:sldId id="283" r:id="rId18"/>
+    <p:sldId id="292" r:id="rId9"/>
+    <p:sldId id="293" r:id="rId10"/>
+    <p:sldId id="290" r:id="rId11"/>
+    <p:sldId id="284" r:id="rId12"/>
+    <p:sldId id="287" r:id="rId13"/>
+    <p:sldId id="285" r:id="rId14"/>
+    <p:sldId id="286" r:id="rId15"/>
+    <p:sldId id="288" r:id="rId16"/>
+    <p:sldId id="289" r:id="rId17"/>
+    <p:sldId id="291" r:id="rId18"/>
+    <p:sldId id="282" r:id="rId19"/>
+    <p:sldId id="283" r:id="rId20"/>
   </p:sldIdLst>
   <p:sldSz cx="12192000" cy="6858000"/>
   <p:notesSz cx="6858000" cy="9144000"/>
@@ -213,7 +215,7 @@
           <a:p>
             <a:fld id="{A9EB0D4F-7B20-C843-AEA0-6DA76DB40034}" type="datetimeFigureOut">
               <a:rPr lang="en-TW" smtClean="0"/>
-              <a:t>2026/6/8</a:t>
+              <a:t>2026/6/9</a:t>
             </a:fld>
             <a:endParaRPr lang="en-TW"/>
           </a:p>
@@ -630,7 +632,7 @@
           <a:p>
             <a:fld id="{7B32B428-AB21-474F-A4D9-979B203162CD}" type="datetimeFigureOut">
               <a:rPr lang="en-TW" smtClean="0"/>
-              <a:t>2026/6/8</a:t>
+              <a:t>2026/6/9</a:t>
             </a:fld>
             <a:endParaRPr lang="en-TW"/>
           </a:p>
@@ -830,7 +832,7 @@
           <a:p>
             <a:fld id="{7B32B428-AB21-474F-A4D9-979B203162CD}" type="datetimeFigureOut">
               <a:rPr lang="en-TW" smtClean="0"/>
-              <a:t>2026/6/8</a:t>
+              <a:t>2026/6/9</a:t>
             </a:fld>
             <a:endParaRPr lang="en-TW"/>
           </a:p>
@@ -1040,7 +1042,7 @@
           <a:p>
             <a:fld id="{7B32B428-AB21-474F-A4D9-979B203162CD}" type="datetimeFigureOut">
               <a:rPr lang="en-TW" smtClean="0"/>
-              <a:t>2026/6/8</a:t>
+              <a:t>2026/6/9</a:t>
             </a:fld>
             <a:endParaRPr lang="en-TW"/>
           </a:p>
@@ -1240,7 +1242,7 @@
           <a:p>
             <a:fld id="{7B32B428-AB21-474F-A4D9-979B203162CD}" type="datetimeFigureOut">
               <a:rPr lang="en-TW" smtClean="0"/>
-              <a:t>2026/6/8</a:t>
+              <a:t>2026/6/9</a:t>
             </a:fld>
             <a:endParaRPr lang="en-TW"/>
           </a:p>
@@ -1516,7 +1518,7 @@
           <a:p>
             <a:fld id="{7B32B428-AB21-474F-A4D9-979B203162CD}" type="datetimeFigureOut">
               <a:rPr lang="en-TW" smtClean="0"/>
-              <a:t>2026/6/8</a:t>
+              <a:t>2026/6/9</a:t>
             </a:fld>
             <a:endParaRPr lang="en-TW"/>
           </a:p>
@@ -1784,7 +1786,7 @@
           <a:p>
             <a:fld id="{7B32B428-AB21-474F-A4D9-979B203162CD}" type="datetimeFigureOut">
               <a:rPr lang="en-TW" smtClean="0"/>
-              <a:t>2026/6/8</a:t>
+              <a:t>2026/6/9</a:t>
             </a:fld>
             <a:endParaRPr lang="en-TW"/>
           </a:p>
@@ -2199,7 +2201,7 @@
           <a:p>
             <a:fld id="{7B32B428-AB21-474F-A4D9-979B203162CD}" type="datetimeFigureOut">
               <a:rPr lang="en-TW" smtClean="0"/>
-              <a:t>2026/6/8</a:t>
+              <a:t>2026/6/9</a:t>
             </a:fld>
             <a:endParaRPr lang="en-TW"/>
           </a:p>
@@ -2341,7 +2343,7 @@
           <a:p>
             <a:fld id="{7B32B428-AB21-474F-A4D9-979B203162CD}" type="datetimeFigureOut">
               <a:rPr lang="en-TW" smtClean="0"/>
-              <a:t>2026/6/8</a:t>
+              <a:t>2026/6/9</a:t>
             </a:fld>
             <a:endParaRPr lang="en-TW"/>
           </a:p>
@@ -2454,7 +2456,7 @@
           <a:p>
             <a:fld id="{7B32B428-AB21-474F-A4D9-979B203162CD}" type="datetimeFigureOut">
               <a:rPr lang="en-TW" smtClean="0"/>
-              <a:t>2026/6/8</a:t>
+              <a:t>2026/6/9</a:t>
             </a:fld>
             <a:endParaRPr lang="en-TW"/>
           </a:p>
@@ -2767,7 +2769,7 @@
           <a:p>
             <a:fld id="{7B32B428-AB21-474F-A4D9-979B203162CD}" type="datetimeFigureOut">
               <a:rPr lang="en-TW" smtClean="0"/>
-              <a:t>2026/6/8</a:t>
+              <a:t>2026/6/9</a:t>
             </a:fld>
             <a:endParaRPr lang="en-TW"/>
           </a:p>
@@ -3056,7 +3058,7 @@
           <a:p>
             <a:fld id="{7B32B428-AB21-474F-A4D9-979B203162CD}" type="datetimeFigureOut">
               <a:rPr lang="en-TW" smtClean="0"/>
-              <a:t>2026/6/8</a:t>
+              <a:t>2026/6/9</a:t>
             </a:fld>
             <a:endParaRPr lang="en-TW"/>
           </a:p>
@@ -3299,7 +3301,7 @@
           <a:p>
             <a:fld id="{7B32B428-AB21-474F-A4D9-979B203162CD}" type="datetimeFigureOut">
               <a:rPr lang="en-TW" smtClean="0"/>
-              <a:t>2026/6/8</a:t>
+              <a:t>2026/6/9</a:t>
             </a:fld>
             <a:endParaRPr lang="en-TW"/>
           </a:p>
@@ -3832,6 +3834,272 @@
           <a:p>
             <a:r>
               <a:rPr lang="en-US" sz="4000" dirty="0"/>
+              <a:t>Decision on timeout limit</a:t>
+            </a:r>
+            <a:endParaRPr lang="en-TW" sz="4000" dirty="0"/>
+          </a:p>
+        </p:txBody>
+      </p:sp>
+      <p:sp>
+        <p:nvSpPr>
+          <p:cNvPr id="10" name="TextBox 9">
+            <a:extLst>
+              <a:ext uri="{FF2B5EF4-FFF2-40B4-BE49-F238E27FC236}">
+                <a16:creationId xmlns:a16="http://schemas.microsoft.com/office/drawing/2014/main" id="{99766FC6-9284-42DC-EBCA-F06B1D853AE7}"/>
+              </a:ext>
+            </a:extLst>
+          </p:cNvPr>
+          <p:cNvSpPr txBox="1"/>
+          <p:nvPr/>
+        </p:nvSpPr>
+        <p:spPr>
+          <a:xfrm>
+            <a:off x="142875" y="1691323"/>
+            <a:ext cx="11906250" cy="2246769"/>
+          </a:xfrm>
+          <a:prstGeom prst="rect">
+            <a:avLst/>
+          </a:prstGeom>
+          <a:noFill/>
+        </p:spPr>
+        <p:txBody>
+          <a:bodyPr wrap="square">
+            <a:spAutoFit/>
+          </a:bodyPr>
+          <a:lstStyle/>
+          <a:p>
+            <a:r>
+              <a:rPr lang="en-US" sz="2800" dirty="0"/>
+              <a:t>Instruction: respond as quickly and accurately as possible</a:t>
+            </a:r>
+          </a:p>
+          <a:p>
+            <a:r>
+              <a:rPr lang="en-US" sz="2800" dirty="0"/>
+              <a:t>S</a:t>
+            </a:r>
+            <a:r>
+              <a:rPr lang="en-TW" sz="2800" dirty="0"/>
+              <a:t>et up 5 second response window</a:t>
+            </a:r>
+          </a:p>
+          <a:p>
+            <a:r>
+              <a:rPr lang="en-TW" sz="2800" dirty="0"/>
+              <a:t>Exclude RTs&lt;200ms or RTs&gt;3000</a:t>
+            </a:r>
+          </a:p>
+          <a:p>
+            <a:r>
+              <a:rPr lang="en-TW" sz="2800" dirty="0"/>
+              <a:t>Exclude participant-level and trial-level outliers (+-3SD) </a:t>
+            </a:r>
+          </a:p>
+          <a:p>
+            <a:endParaRPr lang="en-TW" sz="2800" dirty="0"/>
+          </a:p>
+        </p:txBody>
+      </p:sp>
+    </p:spTree>
+    <p:extLst>
+      <p:ext uri="{BB962C8B-B14F-4D97-AF65-F5344CB8AC3E}">
+        <p14:creationId xmlns:p14="http://schemas.microsoft.com/office/powerpoint/2010/main" val="2534962535"/>
+      </p:ext>
+    </p:extLst>
+  </p:cSld>
+  <p:clrMapOvr>
+    <a:masterClrMapping/>
+  </p:clrMapOvr>
+</p:sld>
+</file>
+
+<file path=ppt/slides/slide11.xml><?xml version="1.0" encoding="utf-8"?>
+<p:sld xmlns:a="http://schemas.openxmlformats.org/drawingml/2006/main" xmlns:r="http://schemas.openxmlformats.org/officeDocument/2006/relationships" xmlns:p="http://schemas.openxmlformats.org/presentationml/2006/main">
+  <p:cSld>
+    <p:spTree>
+      <p:nvGrpSpPr>
+        <p:cNvPr id="1" name=""/>
+        <p:cNvGrpSpPr/>
+        <p:nvPr/>
+      </p:nvGrpSpPr>
+      <p:grpSpPr>
+        <a:xfrm>
+          <a:off x="0" y="0"/>
+          <a:ext cx="0" cy="0"/>
+          <a:chOff x="0" y="0"/>
+          <a:chExt cx="0" cy="0"/>
+        </a:xfrm>
+      </p:grpSpPr>
+      <p:sp>
+        <p:nvSpPr>
+          <p:cNvPr id="2" name="Title 1">
+            <a:extLst>
+              <a:ext uri="{FF2B5EF4-FFF2-40B4-BE49-F238E27FC236}">
+                <a16:creationId xmlns:a16="http://schemas.microsoft.com/office/drawing/2014/main" id="{39418C76-D18F-9C1B-1192-CD6192CC87ED}"/>
+              </a:ext>
+            </a:extLst>
+          </p:cNvPr>
+          <p:cNvSpPr>
+            <a:spLocks noGrp="1"/>
+          </p:cNvSpPr>
+          <p:nvPr>
+            <p:ph type="title"/>
+          </p:nvPr>
+        </p:nvSpPr>
+        <p:spPr>
+          <a:xfrm>
+            <a:off x="0" y="0"/>
+            <a:ext cx="10515600" cy="1325563"/>
+          </a:xfrm>
+        </p:spPr>
+        <p:txBody>
+          <a:bodyPr>
+            <a:normAutofit/>
+          </a:bodyPr>
+          <a:lstStyle/>
+          <a:p>
+            <a:r>
+              <a:rPr lang="en-US" sz="4000" dirty="0"/>
+              <a:t>Test blocks design</a:t>
+            </a:r>
+            <a:endParaRPr lang="en-TW" sz="4000" dirty="0"/>
+          </a:p>
+        </p:txBody>
+      </p:sp>
+      <p:sp>
+        <p:nvSpPr>
+          <p:cNvPr id="11" name="TextBox 10">
+            <a:extLst>
+              <a:ext uri="{FF2B5EF4-FFF2-40B4-BE49-F238E27FC236}">
+                <a16:creationId xmlns:a16="http://schemas.microsoft.com/office/drawing/2014/main" id="{A7CBE9AE-A73E-F7CF-227A-E52FB6D05059}"/>
+              </a:ext>
+            </a:extLst>
+          </p:cNvPr>
+          <p:cNvSpPr txBox="1"/>
+          <p:nvPr/>
+        </p:nvSpPr>
+        <p:spPr>
+          <a:xfrm>
+            <a:off x="142875" y="1691323"/>
+            <a:ext cx="11906250" cy="3970318"/>
+          </a:xfrm>
+          <a:prstGeom prst="rect">
+            <a:avLst/>
+          </a:prstGeom>
+          <a:noFill/>
+        </p:spPr>
+        <p:txBody>
+          <a:bodyPr wrap="square">
+            <a:spAutoFit/>
+          </a:bodyPr>
+          <a:lstStyle/>
+          <a:p>
+            <a:r>
+              <a:rPr lang="en-TW" sz="2800" dirty="0"/>
+              <a:t>Create 18 lists based on the counterbalancing constrainsts in TJ2025</a:t>
+            </a:r>
+          </a:p>
+          <a:p>
+            <a:r>
+              <a:rPr lang="en-TW" sz="2800" dirty="0"/>
+              <a:t>72 tokens (3 continuum x 12 VOT step x 2 rep) - distributed across 6 test blocks</a:t>
+            </a:r>
+          </a:p>
+          <a:p>
+            <a:endParaRPr lang="en-TW" sz="2800" dirty="0"/>
+          </a:p>
+          <a:p>
+            <a:pPr marL="514350" indent="-514350">
+              <a:buAutoNum type="arabicParenBoth"/>
+            </a:pPr>
+            <a:r>
+              <a:rPr lang="en-TW" sz="2800" dirty="0"/>
+              <a:t>each block contain all 12 VOT steps</a:t>
+            </a:r>
+          </a:p>
+          <a:p>
+            <a:pPr marL="514350" indent="-514350">
+              <a:buAutoNum type="arabicParenBoth"/>
+            </a:pPr>
+            <a:endParaRPr lang="en-TW" sz="2800" dirty="0"/>
+          </a:p>
+          <a:p>
+            <a:r>
+              <a:rPr lang="en-TW" sz="2800" dirty="0"/>
+              <a:t>(2) tokens from each of the three continua occur equally frequently within block (four tokens from each continuum)</a:t>
+            </a:r>
+          </a:p>
+          <a:p>
+            <a:endParaRPr lang="en-TW" sz="2800" dirty="0"/>
+          </a:p>
+          <a:p>
+            <a:r>
+              <a:rPr lang="en-TW" sz="2800" dirty="0"/>
+              <a:t>(3) the exact same token appears no more than once within block</a:t>
+            </a:r>
+          </a:p>
+        </p:txBody>
+      </p:sp>
+    </p:spTree>
+    <p:extLst>
+      <p:ext uri="{BB962C8B-B14F-4D97-AF65-F5344CB8AC3E}">
+        <p14:creationId xmlns:p14="http://schemas.microsoft.com/office/powerpoint/2010/main" val="4092480120"/>
+      </p:ext>
+    </p:extLst>
+  </p:cSld>
+  <p:clrMapOvr>
+    <a:masterClrMapping/>
+  </p:clrMapOvr>
+</p:sld>
+</file>
+
+<file path=ppt/slides/slide12.xml><?xml version="1.0" encoding="utf-8"?>
+<p:sld xmlns:a="http://schemas.openxmlformats.org/drawingml/2006/main" xmlns:r="http://schemas.openxmlformats.org/officeDocument/2006/relationships" xmlns:p="http://schemas.openxmlformats.org/presentationml/2006/main">
+  <p:cSld>
+    <p:spTree>
+      <p:nvGrpSpPr>
+        <p:cNvPr id="1" name=""/>
+        <p:cNvGrpSpPr/>
+        <p:nvPr/>
+      </p:nvGrpSpPr>
+      <p:grpSpPr>
+        <a:xfrm>
+          <a:off x="0" y="0"/>
+          <a:ext cx="0" cy="0"/>
+          <a:chOff x="0" y="0"/>
+          <a:chExt cx="0" cy="0"/>
+        </a:xfrm>
+      </p:grpSpPr>
+      <p:sp>
+        <p:nvSpPr>
+          <p:cNvPr id="2" name="Title 1">
+            <a:extLst>
+              <a:ext uri="{FF2B5EF4-FFF2-40B4-BE49-F238E27FC236}">
+                <a16:creationId xmlns:a16="http://schemas.microsoft.com/office/drawing/2014/main" id="{39418C76-D18F-9C1B-1192-CD6192CC87ED}"/>
+              </a:ext>
+            </a:extLst>
+          </p:cNvPr>
+          <p:cNvSpPr>
+            <a:spLocks noGrp="1"/>
+          </p:cNvSpPr>
+          <p:nvPr>
+            <p:ph type="title"/>
+          </p:nvPr>
+        </p:nvSpPr>
+        <p:spPr>
+          <a:xfrm>
+            <a:off x="0" y="0"/>
+            <a:ext cx="10515600" cy="1325563"/>
+          </a:xfrm>
+        </p:spPr>
+        <p:txBody>
+          <a:bodyPr>
+            <a:normAutofit/>
+          </a:bodyPr>
+          <a:lstStyle/>
+          <a:p>
+            <a:r>
+              <a:rPr lang="en-US" sz="4000" dirty="0"/>
               <a:t>Test blocks design</a:t>
             </a:r>
             <a:endParaRPr lang="en-TW" sz="4000" dirty="0"/>
@@ -6944,7 +7212,7 @@
 </p:sld>
 </file>
 
-<file path=ppt/slides/slide11.xml><?xml version="1.0" encoding="utf-8"?>
+<file path=ppt/slides/slide13.xml><?xml version="1.0" encoding="utf-8"?>
 <p:sld xmlns:a="http://schemas.openxmlformats.org/drawingml/2006/main" xmlns:r="http://schemas.openxmlformats.org/officeDocument/2006/relationships" xmlns:p="http://schemas.openxmlformats.org/presentationml/2006/main">
   <p:cSld>
     <p:spTree>
@@ -10805,7 +11073,7 @@
 </p:sld>
 </file>
 
-<file path=ppt/slides/slide12.xml><?xml version="1.0" encoding="utf-8"?>
+<file path=ppt/slides/slide14.xml><?xml version="1.0" encoding="utf-8"?>
 <p:sld xmlns:a="http://schemas.openxmlformats.org/drawingml/2006/main" xmlns:r="http://schemas.openxmlformats.org/officeDocument/2006/relationships" xmlns:p="http://schemas.openxmlformats.org/presentationml/2006/main">
   <p:cSld>
     <p:spTree>
@@ -14138,7 +14406,7 @@
 </p:sld>
 </file>
 
-<file path=ppt/slides/slide13.xml><?xml version="1.0" encoding="utf-8"?>
+<file path=ppt/slides/slide15.xml><?xml version="1.0" encoding="utf-8"?>
 <p:sld xmlns:a="http://schemas.openxmlformats.org/drawingml/2006/main" xmlns:r="http://schemas.openxmlformats.org/officeDocument/2006/relationships" xmlns:p="http://schemas.openxmlformats.org/presentationml/2006/main">
   <p:cSld>
     <p:spTree>
@@ -19289,7 +19557,7 @@
 </p:sld>
 </file>
 
-<file path=ppt/slides/slide14.xml><?xml version="1.0" encoding="utf-8"?>
+<file path=ppt/slides/slide16.xml><?xml version="1.0" encoding="utf-8"?>
 <p:sld xmlns:a="http://schemas.openxmlformats.org/drawingml/2006/main" xmlns:r="http://schemas.openxmlformats.org/officeDocument/2006/relationships" xmlns:p="http://schemas.openxmlformats.org/presentationml/2006/main">
   <p:cSld>
     <p:spTree>
@@ -26196,7 +26464,7 @@
 </p:sld>
 </file>
 
-<file path=ppt/slides/slide15.xml><?xml version="1.0" encoding="utf-8"?>
+<file path=ppt/slides/slide17.xml><?xml version="1.0" encoding="utf-8"?>
 <p:sld xmlns:a="http://schemas.openxmlformats.org/drawingml/2006/main" xmlns:r="http://schemas.openxmlformats.org/officeDocument/2006/relationships" xmlns:p="http://schemas.openxmlformats.org/presentationml/2006/main">
   <p:cSld>
     <p:spTree>
@@ -26301,7 +26569,7 @@
 </p:sld>
 </file>
 
-<file path=ppt/slides/slide16.xml><?xml version="1.0" encoding="utf-8"?>
+<file path=ppt/slides/slide18.xml><?xml version="1.0" encoding="utf-8"?>
 <p:sld xmlns:a="http://schemas.openxmlformats.org/drawingml/2006/main" xmlns:r="http://schemas.openxmlformats.org/officeDocument/2006/relationships" xmlns:p="http://schemas.openxmlformats.org/presentationml/2006/main">
   <p:cSld>
     <p:spTree>
@@ -26512,7 +26780,7 @@
 </p:sld>
 </file>
 
-<file path=ppt/slides/slide17.xml><?xml version="1.0" encoding="utf-8"?>
+<file path=ppt/slides/slide19.xml><?xml version="1.0" encoding="utf-8"?>
 <p:sld xmlns:a="http://schemas.openxmlformats.org/drawingml/2006/main" xmlns:r="http://schemas.openxmlformats.org/officeDocument/2006/relationships" xmlns:p="http://schemas.openxmlformats.org/presentationml/2006/main">
   <p:cSld>
     <p:spTree>
@@ -27913,18 +28181,48 @@
           <a:p>
             <a:r>
               <a:rPr lang="en-US" sz="4000" dirty="0"/>
-              <a:t>Decision on timeout limit</a:t>
+              <a:t>RT distribution in Tan &amp; Jaeger (2025)</a:t>
             </a:r>
             <a:endParaRPr lang="en-TW" sz="4000" dirty="0"/>
           </a:p>
         </p:txBody>
       </p:sp>
+      <p:pic>
+        <p:nvPicPr>
+          <p:cNvPr id="11" name="Picture 10">
+            <a:extLst>
+              <a:ext uri="{FF2B5EF4-FFF2-40B4-BE49-F238E27FC236}">
+                <a16:creationId xmlns:a16="http://schemas.microsoft.com/office/drawing/2014/main" id="{AF99771D-0957-6130-A218-6B74149664DF}"/>
+              </a:ext>
+            </a:extLst>
+          </p:cNvPr>
+          <p:cNvPicPr>
+            <a:picLocks noChangeAspect="1"/>
+          </p:cNvPicPr>
+          <p:nvPr/>
+        </p:nvPicPr>
+        <p:blipFill>
+          <a:blip r:embed="rId2"/>
+          <a:stretch>
+            <a:fillRect/>
+          </a:stretch>
+        </p:blipFill>
+        <p:spPr>
+          <a:xfrm>
+            <a:off x="1576138" y="1658352"/>
+            <a:ext cx="8445838" cy="4525880"/>
+          </a:xfrm>
+          <a:prstGeom prst="rect">
+            <a:avLst/>
+          </a:prstGeom>
+        </p:spPr>
+      </p:pic>
       <p:sp>
         <p:nvSpPr>
-          <p:cNvPr id="10" name="TextBox 9">
+          <p:cNvPr id="12" name="TextBox 11">
             <a:extLst>
               <a:ext uri="{FF2B5EF4-FFF2-40B4-BE49-F238E27FC236}">
-                <a16:creationId xmlns:a16="http://schemas.microsoft.com/office/drawing/2014/main" id="{99766FC6-9284-42DC-EBCA-F06B1D853AE7}"/>
+                <a16:creationId xmlns:a16="http://schemas.microsoft.com/office/drawing/2014/main" id="{3FF7F783-3C8F-188C-43E1-D63456B82E7A}"/>
               </a:ext>
             </a:extLst>
           </p:cNvPr>
@@ -27933,8 +28231,8 @@
         </p:nvSpPr>
         <p:spPr>
           <a:xfrm>
-            <a:off x="142875" y="1691323"/>
-            <a:ext cx="11906250" cy="2246769"/>
+            <a:off x="6641431" y="1858851"/>
+            <a:ext cx="5077326" cy="1200329"/>
           </a:xfrm>
           <a:prstGeom prst="rect">
             <a:avLst/>
@@ -27948,41 +28246,29 @@
           <a:lstStyle/>
           <a:p>
             <a:r>
-              <a:rPr lang="en-US" sz="2800" dirty="0"/>
-              <a:t>Instruction: respond as quickly and accurately as possible</a:t>
+              <a:rPr lang="en-US" sz="2400" dirty="0"/>
+              <a:t>N=25704</a:t>
             </a:r>
           </a:p>
           <a:p>
             <a:r>
-              <a:rPr lang="en-US" sz="2800" dirty="0"/>
-              <a:t>S</a:t>
-            </a:r>
-            <a:r>
-              <a:rPr lang="en-TW" sz="2800" dirty="0"/>
-              <a:t>et up 5 second response window</a:t>
+              <a:rPr lang="en-US" sz="2400" dirty="0"/>
+              <a:t>RT &gt; 3000ms: 480/25704 (1.86%)</a:t>
             </a:r>
           </a:p>
           <a:p>
             <a:r>
-              <a:rPr lang="en-TW" sz="2800" dirty="0"/>
-              <a:t>Exclude RTs&lt;200ms or RTs&gt;3000</a:t>
+              <a:rPr lang="en-US" sz="2400" dirty="0"/>
+              <a:t>RT &lt; 200ms: 0%</a:t>
             </a:r>
-          </a:p>
-          <a:p>
-            <a:r>
-              <a:rPr lang="en-TW" sz="2800" dirty="0"/>
-              <a:t>Exclude participant-level and trial-level outliers (+-3SD) </a:t>
-            </a:r>
-          </a:p>
-          <a:p>
-            <a:endParaRPr lang="en-TW" sz="2800" dirty="0"/>
+            <a:endParaRPr lang="en-TW" sz="2400" dirty="0"/>
           </a:p>
         </p:txBody>
       </p:sp>
     </p:spTree>
     <p:extLst>
       <p:ext uri="{BB962C8B-B14F-4D97-AF65-F5344CB8AC3E}">
-        <p14:creationId xmlns:p14="http://schemas.microsoft.com/office/powerpoint/2010/main" val="2534962535"/>
+        <p14:creationId xmlns:p14="http://schemas.microsoft.com/office/powerpoint/2010/main" val="1662108139"/>
       </p:ext>
     </p:extLst>
   </p:cSld>
@@ -28039,90 +28325,106 @@
           <a:p>
             <a:r>
               <a:rPr lang="en-US" sz="4000" dirty="0"/>
-              <a:t>Test blocks design</a:t>
+              <a:t>RT distribution in Tan &amp; Jaeger (2025)</a:t>
             </a:r>
             <a:endParaRPr lang="en-TW" sz="4000" dirty="0"/>
           </a:p>
         </p:txBody>
       </p:sp>
-      <p:sp>
-        <p:nvSpPr>
-          <p:cNvPr id="11" name="TextBox 10">
+      <p:pic>
+        <p:nvPicPr>
+          <p:cNvPr id="4" name="Picture 3">
             <a:extLst>
               <a:ext uri="{FF2B5EF4-FFF2-40B4-BE49-F238E27FC236}">
-                <a16:creationId xmlns:a16="http://schemas.microsoft.com/office/drawing/2014/main" id="{A7CBE9AE-A73E-F7CF-227A-E52FB6D05059}"/>
+                <a16:creationId xmlns:a16="http://schemas.microsoft.com/office/drawing/2014/main" id="{2A6DF796-0997-7C1C-4C0D-409441C07B5E}"/>
               </a:ext>
             </a:extLst>
           </p:cNvPr>
-          <p:cNvSpPr txBox="1"/>
+          <p:cNvPicPr>
+            <a:picLocks noChangeAspect="1"/>
+          </p:cNvPicPr>
           <p:nvPr/>
-        </p:nvSpPr>
+        </p:nvPicPr>
+        <p:blipFill>
+          <a:blip r:embed="rId2"/>
+          <a:stretch>
+            <a:fillRect/>
+          </a:stretch>
+        </p:blipFill>
         <p:spPr>
           <a:xfrm>
-            <a:off x="142875" y="1691323"/>
-            <a:ext cx="11906250" cy="3970318"/>
+            <a:off x="84224" y="1078499"/>
+            <a:ext cx="5366082" cy="2868914"/>
           </a:xfrm>
           <a:prstGeom prst="rect">
             <a:avLst/>
           </a:prstGeom>
-          <a:noFill/>
         </p:spPr>
-        <p:txBody>
-          <a:bodyPr wrap="square">
-            <a:spAutoFit/>
-          </a:bodyPr>
-          <a:lstStyle/>
-          <a:p>
-            <a:r>
-              <a:rPr lang="en-TW" sz="2800" dirty="0"/>
-              <a:t>Create 18 lists based on the counterbalancing constrainsts in TJ2025</a:t>
-            </a:r>
-          </a:p>
-          <a:p>
-            <a:r>
-              <a:rPr lang="en-TW" sz="2800" dirty="0"/>
-              <a:t>72 tokens (3 continuum x 12 VOT step x 2 rep) - distributed across 6 test blocks</a:t>
-            </a:r>
-          </a:p>
-          <a:p>
-            <a:endParaRPr lang="en-TW" sz="2800" dirty="0"/>
-          </a:p>
-          <a:p>
-            <a:pPr marL="514350" indent="-514350">
-              <a:buAutoNum type="arabicParenBoth"/>
-            </a:pPr>
-            <a:r>
-              <a:rPr lang="en-TW" sz="2800" dirty="0"/>
-              <a:t>each block contain all 12 VOT steps</a:t>
-            </a:r>
-          </a:p>
-          <a:p>
-            <a:pPr marL="514350" indent="-514350">
-              <a:buAutoNum type="arabicParenBoth"/>
-            </a:pPr>
-            <a:endParaRPr lang="en-TW" sz="2800" dirty="0"/>
-          </a:p>
-          <a:p>
-            <a:r>
-              <a:rPr lang="en-TW" sz="2800" dirty="0"/>
-              <a:t>(2) tokens from each of the three continua occur equally frequently within block (four tokens from each continuum)</a:t>
-            </a:r>
-          </a:p>
-          <a:p>
-            <a:endParaRPr lang="en-TW" sz="2800" dirty="0"/>
-          </a:p>
-          <a:p>
-            <a:r>
-              <a:rPr lang="en-TW" sz="2800" dirty="0"/>
-              <a:t>(3) the exact same token appears no more than once within block</a:t>
-            </a:r>
-          </a:p>
-        </p:txBody>
-      </p:sp>
+      </p:pic>
+      <p:pic>
+        <p:nvPicPr>
+          <p:cNvPr id="6" name="Picture 5">
+            <a:extLst>
+              <a:ext uri="{FF2B5EF4-FFF2-40B4-BE49-F238E27FC236}">
+                <a16:creationId xmlns:a16="http://schemas.microsoft.com/office/drawing/2014/main" id="{02DA3138-E8B7-18E1-6B58-70DE879866C4}"/>
+              </a:ext>
+            </a:extLst>
+          </p:cNvPr>
+          <p:cNvPicPr>
+            <a:picLocks noChangeAspect="1"/>
+          </p:cNvPicPr>
+          <p:nvPr/>
+        </p:nvPicPr>
+        <p:blipFill>
+          <a:blip r:embed="rId3"/>
+          <a:stretch>
+            <a:fillRect/>
+          </a:stretch>
+        </p:blipFill>
+        <p:spPr>
+          <a:xfrm>
+            <a:off x="5599931" y="1882940"/>
+            <a:ext cx="6519877" cy="3926639"/>
+          </a:xfrm>
+          <a:prstGeom prst="rect">
+            <a:avLst/>
+          </a:prstGeom>
+        </p:spPr>
+      </p:pic>
+      <p:pic>
+        <p:nvPicPr>
+          <p:cNvPr id="8" name="Picture 7">
+            <a:extLst>
+              <a:ext uri="{FF2B5EF4-FFF2-40B4-BE49-F238E27FC236}">
+                <a16:creationId xmlns:a16="http://schemas.microsoft.com/office/drawing/2014/main" id="{FA2A5C06-0DA1-37A3-36E9-FED8BCD51764}"/>
+              </a:ext>
+            </a:extLst>
+          </p:cNvPr>
+          <p:cNvPicPr>
+            <a:picLocks noChangeAspect="1"/>
+          </p:cNvPicPr>
+          <p:nvPr/>
+        </p:nvPicPr>
+        <p:blipFill>
+          <a:blip r:embed="rId4"/>
+          <a:stretch>
+            <a:fillRect/>
+          </a:stretch>
+        </p:blipFill>
+        <p:spPr>
+          <a:xfrm>
+            <a:off x="195133" y="4055695"/>
+            <a:ext cx="5366082" cy="2511326"/>
+          </a:xfrm>
+          <a:prstGeom prst="rect">
+            <a:avLst/>
+          </a:prstGeom>
+        </p:spPr>
+      </p:pic>
     </p:spTree>
     <p:extLst>
       <p:ext uri="{BB962C8B-B14F-4D97-AF65-F5344CB8AC3E}">
-        <p14:creationId xmlns:p14="http://schemas.microsoft.com/office/powerpoint/2010/main" val="4092480120"/>
+        <p14:creationId xmlns:p14="http://schemas.microsoft.com/office/powerpoint/2010/main" val="3218345102"/>
       </p:ext>
     </p:extLst>
   </p:cSld>

--- a/progress-updates/20260609 updates.pptx
+++ b/progress-updates/20260609 updates.pptx
@@ -5,7 +5,7 @@
     <p:sldMasterId id="2147483648" r:id="rId1"/>
   </p:sldMasterIdLst>
   <p:notesMasterIdLst>
-    <p:notesMasterId r:id="rId21"/>
+    <p:notesMasterId r:id="rId23"/>
   </p:notesMasterIdLst>
   <p:sldIdLst>
     <p:sldId id="256" r:id="rId2"/>
@@ -24,9 +24,11 @@
     <p:sldId id="286" r:id="rId15"/>
     <p:sldId id="288" r:id="rId16"/>
     <p:sldId id="289" r:id="rId17"/>
-    <p:sldId id="291" r:id="rId18"/>
-    <p:sldId id="282" r:id="rId19"/>
-    <p:sldId id="283" r:id="rId20"/>
+    <p:sldId id="295" r:id="rId18"/>
+    <p:sldId id="291" r:id="rId19"/>
+    <p:sldId id="282" r:id="rId20"/>
+    <p:sldId id="283" r:id="rId21"/>
+    <p:sldId id="294" r:id="rId22"/>
   </p:sldIdLst>
   <p:sldSz cx="12192000" cy="6858000"/>
   <p:notesSz cx="6858000" cy="9144000"/>
@@ -3734,14 +3736,21 @@
             <p:ph type="ctrTitle"/>
           </p:nvPr>
         </p:nvSpPr>
-        <p:spPr/>
+        <p:spPr>
+          <a:xfrm>
+            <a:off x="1058780" y="1290797"/>
+            <a:ext cx="10070432" cy="2387600"/>
+          </a:xfrm>
+        </p:spPr>
         <p:txBody>
-          <a:bodyPr/>
+          <a:bodyPr>
+            <a:normAutofit/>
+          </a:bodyPr>
           <a:lstStyle/>
           <a:p>
             <a:r>
-              <a:rPr lang="en-TW" dirty="0"/>
-              <a:t>Norming results</a:t>
+              <a:rPr lang="en-TW" sz="4800" dirty="0"/>
+              <a:t>RT distribution, test block design, instructions, and Spanish context setup</a:t>
             </a:r>
           </a:p>
         </p:txBody>
@@ -3762,7 +3771,12 @@
             <p:ph type="subTitle" idx="1"/>
           </p:nvPr>
         </p:nvSpPr>
-        <p:spPr/>
+        <p:spPr>
+          <a:xfrm>
+            <a:off x="1524000" y="4083304"/>
+            <a:ext cx="9144000" cy="1655762"/>
+          </a:xfrm>
+        </p:spPr>
         <p:txBody>
           <a:bodyPr/>
           <a:lstStyle/>
@@ -7209,6 +7223,81 @@
   <p:clrMapOvr>
     <a:masterClrMapping/>
   </p:clrMapOvr>
+  <p:timing>
+    <p:tnLst>
+      <p:par>
+        <p:cTn id="1" dur="indefinite" restart="never" nodeType="tmRoot">
+          <p:childTnLst>
+            <p:seq concurrent="1" nextAc="seek">
+              <p:cTn id="2" dur="indefinite" nodeType="mainSeq">
+                <p:childTnLst>
+                  <p:par>
+                    <p:cTn id="3" fill="hold">
+                      <p:stCondLst>
+                        <p:cond delay="indefinite"/>
+                      </p:stCondLst>
+                      <p:childTnLst>
+                        <p:par>
+                          <p:cTn id="4" fill="hold">
+                            <p:stCondLst>
+                              <p:cond delay="0"/>
+                            </p:stCondLst>
+                            <p:childTnLst>
+                              <p:par>
+                                <p:cTn id="5" presetID="1" presetClass="entr" presetSubtype="0" fill="hold" nodeType="clickEffect">
+                                  <p:stCondLst>
+                                    <p:cond delay="0"/>
+                                  </p:stCondLst>
+                                  <p:childTnLst>
+                                    <p:set>
+                                      <p:cBhvr>
+                                        <p:cTn id="6" dur="1" fill="hold">
+                                          <p:stCondLst>
+                                            <p:cond delay="0"/>
+                                          </p:stCondLst>
+                                        </p:cTn>
+                                        <p:tgtEl>
+                                          <p:spTgt spid="3074"/>
+                                        </p:tgtEl>
+                                        <p:attrNameLst>
+                                          <p:attrName>style.visibility</p:attrName>
+                                        </p:attrNameLst>
+                                      </p:cBhvr>
+                                      <p:to>
+                                        <p:strVal val="visible"/>
+                                      </p:to>
+                                    </p:set>
+                                  </p:childTnLst>
+                                </p:cTn>
+                              </p:par>
+                            </p:childTnLst>
+                          </p:cTn>
+                        </p:par>
+                      </p:childTnLst>
+                    </p:cTn>
+                  </p:par>
+                </p:childTnLst>
+              </p:cTn>
+              <p:prevCondLst>
+                <p:cond evt="onPrev" delay="0">
+                  <p:tgtEl>
+                    <p:sldTgt/>
+                  </p:tgtEl>
+                </p:cond>
+              </p:prevCondLst>
+              <p:nextCondLst>
+                <p:cond evt="onNext" delay="0">
+                  <p:tgtEl>
+                    <p:sldTgt/>
+                  </p:tgtEl>
+                </p:cond>
+              </p:nextCondLst>
+            </p:seq>
+          </p:childTnLst>
+        </p:cTn>
+      </p:par>
+    </p:tnLst>
+  </p:timing>
 </p:sld>
 </file>
 
@@ -23399,6 +23488,3861 @@
           </a:p>
         </p:txBody>
       </p:sp>
+    </p:spTree>
+    <p:extLst>
+      <p:ext uri="{BB962C8B-B14F-4D97-AF65-F5344CB8AC3E}">
+        <p14:creationId xmlns:p14="http://schemas.microsoft.com/office/powerpoint/2010/main" val="1008867717"/>
+      </p:ext>
+    </p:extLst>
+  </p:cSld>
+  <p:clrMapOvr>
+    <a:masterClrMapping/>
+  </p:clrMapOvr>
+</p:sld>
+</file>
+
+<file path=ppt/slides/slide17.xml><?xml version="1.0" encoding="utf-8"?>
+<p:sld xmlns:a="http://schemas.openxmlformats.org/drawingml/2006/main" xmlns:r="http://schemas.openxmlformats.org/officeDocument/2006/relationships" xmlns:p="http://schemas.openxmlformats.org/presentationml/2006/main">
+  <p:cSld>
+    <p:spTree>
+      <p:nvGrpSpPr>
+        <p:cNvPr id="1" name=""/>
+        <p:cNvGrpSpPr/>
+        <p:nvPr/>
+      </p:nvGrpSpPr>
+      <p:grpSpPr>
+        <a:xfrm>
+          <a:off x="0" y="0"/>
+          <a:ext cx="0" cy="0"/>
+          <a:chOff x="0" y="0"/>
+          <a:chExt cx="0" cy="0"/>
+        </a:xfrm>
+      </p:grpSpPr>
+      <p:sp>
+        <p:nvSpPr>
+          <p:cNvPr id="2" name="Title 1">
+            <a:extLst>
+              <a:ext uri="{FF2B5EF4-FFF2-40B4-BE49-F238E27FC236}">
+                <a16:creationId xmlns:a16="http://schemas.microsoft.com/office/drawing/2014/main" id="{39418C76-D18F-9C1B-1192-CD6192CC87ED}"/>
+              </a:ext>
+            </a:extLst>
+          </p:cNvPr>
+          <p:cNvSpPr>
+            <a:spLocks noGrp="1"/>
+          </p:cNvSpPr>
+          <p:nvPr>
+            <p:ph type="title"/>
+          </p:nvPr>
+        </p:nvSpPr>
+        <p:spPr>
+          <a:xfrm>
+            <a:off x="0" y="0"/>
+            <a:ext cx="10515600" cy="1325563"/>
+          </a:xfrm>
+        </p:spPr>
+        <p:txBody>
+          <a:bodyPr>
+            <a:normAutofit/>
+          </a:bodyPr>
+          <a:lstStyle/>
+          <a:p>
+            <a:r>
+              <a:rPr lang="en-US" sz="4000" dirty="0"/>
+              <a:t>Test blocks design</a:t>
+            </a:r>
+            <a:endParaRPr lang="en-TW" sz="4000" dirty="0"/>
+          </a:p>
+        </p:txBody>
+      </p:sp>
+      <p:graphicFrame>
+        <p:nvGraphicFramePr>
+          <p:cNvPr id="3" name="Table 2">
+            <a:extLst>
+              <a:ext uri="{FF2B5EF4-FFF2-40B4-BE49-F238E27FC236}">
+                <a16:creationId xmlns:a16="http://schemas.microsoft.com/office/drawing/2014/main" id="{F02156DC-FEB1-9E95-9557-D810936DB7EF}"/>
+              </a:ext>
+            </a:extLst>
+          </p:cNvPr>
+          <p:cNvGraphicFramePr>
+            <a:graphicFrameLocks noGrp="1"/>
+          </p:cNvGraphicFramePr>
+          <p:nvPr/>
+        </p:nvGraphicFramePr>
+        <p:xfrm>
+          <a:off x="237490" y="1325563"/>
+          <a:ext cx="11341109" cy="1817796"/>
+        </p:xfrm>
+        <a:graphic>
+          <a:graphicData uri="http://schemas.openxmlformats.org/drawingml/2006/table">
+            <a:tbl>
+              <a:tblPr firstRow="1" bandRow="1">
+                <a:tableStyleId>{5C22544A-7EE6-4342-B048-85BDC9FD1C3A}</a:tableStyleId>
+              </a:tblPr>
+              <a:tblGrid>
+                <a:gridCol w="872393">
+                  <a:extLst>
+                    <a:ext uri="{9D8B030D-6E8A-4147-A177-3AD203B41FA5}">
+                      <a16:colId xmlns:a16="http://schemas.microsoft.com/office/drawing/2014/main" val="3873259871"/>
+                    </a:ext>
+                  </a:extLst>
+                </a:gridCol>
+                <a:gridCol w="872393">
+                  <a:extLst>
+                    <a:ext uri="{9D8B030D-6E8A-4147-A177-3AD203B41FA5}">
+                      <a16:colId xmlns:a16="http://schemas.microsoft.com/office/drawing/2014/main" val="2965688517"/>
+                    </a:ext>
+                  </a:extLst>
+                </a:gridCol>
+                <a:gridCol w="872393">
+                  <a:extLst>
+                    <a:ext uri="{9D8B030D-6E8A-4147-A177-3AD203B41FA5}">
+                      <a16:colId xmlns:a16="http://schemas.microsoft.com/office/drawing/2014/main" val="331551344"/>
+                    </a:ext>
+                  </a:extLst>
+                </a:gridCol>
+                <a:gridCol w="872393">
+                  <a:extLst>
+                    <a:ext uri="{9D8B030D-6E8A-4147-A177-3AD203B41FA5}">
+                      <a16:colId xmlns:a16="http://schemas.microsoft.com/office/drawing/2014/main" val="1726901398"/>
+                    </a:ext>
+                  </a:extLst>
+                </a:gridCol>
+                <a:gridCol w="872393">
+                  <a:extLst>
+                    <a:ext uri="{9D8B030D-6E8A-4147-A177-3AD203B41FA5}">
+                      <a16:colId xmlns:a16="http://schemas.microsoft.com/office/drawing/2014/main" val="1526213709"/>
+                    </a:ext>
+                  </a:extLst>
+                </a:gridCol>
+                <a:gridCol w="872393">
+                  <a:extLst>
+                    <a:ext uri="{9D8B030D-6E8A-4147-A177-3AD203B41FA5}">
+                      <a16:colId xmlns:a16="http://schemas.microsoft.com/office/drawing/2014/main" val="1131420391"/>
+                    </a:ext>
+                  </a:extLst>
+                </a:gridCol>
+                <a:gridCol w="872393">
+                  <a:extLst>
+                    <a:ext uri="{9D8B030D-6E8A-4147-A177-3AD203B41FA5}">
+                      <a16:colId xmlns:a16="http://schemas.microsoft.com/office/drawing/2014/main" val="1885138231"/>
+                    </a:ext>
+                  </a:extLst>
+                </a:gridCol>
+                <a:gridCol w="872393">
+                  <a:extLst>
+                    <a:ext uri="{9D8B030D-6E8A-4147-A177-3AD203B41FA5}">
+                      <a16:colId xmlns:a16="http://schemas.microsoft.com/office/drawing/2014/main" val="944973025"/>
+                    </a:ext>
+                  </a:extLst>
+                </a:gridCol>
+                <a:gridCol w="872393">
+                  <a:extLst>
+                    <a:ext uri="{9D8B030D-6E8A-4147-A177-3AD203B41FA5}">
+                      <a16:colId xmlns:a16="http://schemas.microsoft.com/office/drawing/2014/main" val="910100834"/>
+                    </a:ext>
+                  </a:extLst>
+                </a:gridCol>
+                <a:gridCol w="872393">
+                  <a:extLst>
+                    <a:ext uri="{9D8B030D-6E8A-4147-A177-3AD203B41FA5}">
+                      <a16:colId xmlns:a16="http://schemas.microsoft.com/office/drawing/2014/main" val="494294347"/>
+                    </a:ext>
+                  </a:extLst>
+                </a:gridCol>
+                <a:gridCol w="872393">
+                  <a:extLst>
+                    <a:ext uri="{9D8B030D-6E8A-4147-A177-3AD203B41FA5}">
+                      <a16:colId xmlns:a16="http://schemas.microsoft.com/office/drawing/2014/main" val="928810262"/>
+                    </a:ext>
+                  </a:extLst>
+                </a:gridCol>
+                <a:gridCol w="872393">
+                  <a:extLst>
+                    <a:ext uri="{9D8B030D-6E8A-4147-A177-3AD203B41FA5}">
+                      <a16:colId xmlns:a16="http://schemas.microsoft.com/office/drawing/2014/main" val="1046766609"/>
+                    </a:ext>
+                  </a:extLst>
+                </a:gridCol>
+                <a:gridCol w="872393">
+                  <a:extLst>
+                    <a:ext uri="{9D8B030D-6E8A-4147-A177-3AD203B41FA5}">
+                      <a16:colId xmlns:a16="http://schemas.microsoft.com/office/drawing/2014/main" val="1802761757"/>
+                    </a:ext>
+                  </a:extLst>
+                </a:gridCol>
+              </a:tblGrid>
+              <a:tr h="454449">
+                <a:tc>
+                  <a:txBody>
+                    <a:bodyPr/>
+                    <a:lstStyle/>
+                    <a:p>
+                      <a:endParaRPr lang="en-TW" dirty="0"/>
+                    </a:p>
+                  </a:txBody>
+                  <a:tcPr>
+                    <a:lnL w="12700" cap="flat" cmpd="sng" algn="ctr">
+                      <a:solidFill>
+                        <a:schemeClr val="tx1"/>
+                      </a:solidFill>
+                      <a:prstDash val="solid"/>
+                      <a:round/>
+                      <a:headEnd type="none" w="med" len="med"/>
+                      <a:tailEnd type="none" w="med" len="med"/>
+                    </a:lnL>
+                    <a:lnR w="12700" cap="flat" cmpd="sng" algn="ctr">
+                      <a:solidFill>
+                        <a:schemeClr val="tx1"/>
+                      </a:solidFill>
+                      <a:prstDash val="solid"/>
+                      <a:round/>
+                      <a:headEnd type="none" w="med" len="med"/>
+                      <a:tailEnd type="none" w="med" len="med"/>
+                    </a:lnR>
+                    <a:lnT w="12700" cap="flat" cmpd="sng" algn="ctr">
+                      <a:solidFill>
+                        <a:schemeClr val="tx1"/>
+                      </a:solidFill>
+                      <a:prstDash val="solid"/>
+                      <a:round/>
+                      <a:headEnd type="none" w="med" len="med"/>
+                      <a:tailEnd type="none" w="med" len="med"/>
+                    </a:lnT>
+                    <a:lnB w="12700" cap="flat" cmpd="sng" algn="ctr">
+                      <a:solidFill>
+                        <a:schemeClr val="tx1"/>
+                      </a:solidFill>
+                      <a:prstDash val="solid"/>
+                      <a:round/>
+                      <a:headEnd type="none" w="med" len="med"/>
+                      <a:tailEnd type="none" w="med" len="med"/>
+                    </a:lnB>
+                    <a:noFill/>
+                  </a:tcPr>
+                </a:tc>
+                <a:tc>
+                  <a:txBody>
+                    <a:bodyPr/>
+                    <a:lstStyle/>
+                    <a:p>
+                      <a:pPr algn="ctr"/>
+                      <a:r>
+                        <a:rPr lang="en-TW" dirty="0">
+                          <a:solidFill>
+                            <a:schemeClr val="tx1"/>
+                          </a:solidFill>
+                        </a:rPr>
+                        <a:t>-5</a:t>
+                      </a:r>
+                    </a:p>
+                  </a:txBody>
+                  <a:tcPr anchor="ctr">
+                    <a:lnL w="12700" cap="flat" cmpd="sng" algn="ctr">
+                      <a:solidFill>
+                        <a:schemeClr val="tx1"/>
+                      </a:solidFill>
+                      <a:prstDash val="solid"/>
+                      <a:round/>
+                      <a:headEnd type="none" w="med" len="med"/>
+                      <a:tailEnd type="none" w="med" len="med"/>
+                    </a:lnL>
+                    <a:lnR w="12700" cap="flat" cmpd="sng" algn="ctr">
+                      <a:solidFill>
+                        <a:schemeClr val="tx1"/>
+                      </a:solidFill>
+                      <a:prstDash val="solid"/>
+                      <a:round/>
+                      <a:headEnd type="none" w="med" len="med"/>
+                      <a:tailEnd type="none" w="med" len="med"/>
+                    </a:lnR>
+                    <a:lnT w="12700" cap="flat" cmpd="sng" algn="ctr">
+                      <a:solidFill>
+                        <a:schemeClr val="tx1"/>
+                      </a:solidFill>
+                      <a:prstDash val="solid"/>
+                      <a:round/>
+                      <a:headEnd type="none" w="med" len="med"/>
+                      <a:tailEnd type="none" w="med" len="med"/>
+                    </a:lnT>
+                    <a:lnB w="12700" cap="flat" cmpd="sng" algn="ctr">
+                      <a:solidFill>
+                        <a:schemeClr val="tx1"/>
+                      </a:solidFill>
+                      <a:prstDash val="solid"/>
+                      <a:round/>
+                      <a:headEnd type="none" w="med" len="med"/>
+                      <a:tailEnd type="none" w="med" len="med"/>
+                    </a:lnB>
+                    <a:noFill/>
+                  </a:tcPr>
+                </a:tc>
+                <a:tc>
+                  <a:txBody>
+                    <a:bodyPr/>
+                    <a:lstStyle/>
+                    <a:p>
+                      <a:pPr algn="ctr"/>
+                      <a:r>
+                        <a:rPr lang="en-TW" dirty="0">
+                          <a:solidFill>
+                            <a:schemeClr val="tx1"/>
+                          </a:solidFill>
+                        </a:rPr>
+                        <a:t>5</a:t>
+                      </a:r>
+                    </a:p>
+                  </a:txBody>
+                  <a:tcPr anchor="ctr">
+                    <a:lnL w="12700" cap="flat" cmpd="sng" algn="ctr">
+                      <a:solidFill>
+                        <a:schemeClr val="tx1"/>
+                      </a:solidFill>
+                      <a:prstDash val="solid"/>
+                      <a:round/>
+                      <a:headEnd type="none" w="med" len="med"/>
+                      <a:tailEnd type="none" w="med" len="med"/>
+                    </a:lnL>
+                    <a:lnR w="12700" cap="flat" cmpd="sng" algn="ctr">
+                      <a:solidFill>
+                        <a:schemeClr val="tx1"/>
+                      </a:solidFill>
+                      <a:prstDash val="solid"/>
+                      <a:round/>
+                      <a:headEnd type="none" w="med" len="med"/>
+                      <a:tailEnd type="none" w="med" len="med"/>
+                    </a:lnR>
+                    <a:lnT w="12700" cap="flat" cmpd="sng" algn="ctr">
+                      <a:solidFill>
+                        <a:schemeClr val="tx1"/>
+                      </a:solidFill>
+                      <a:prstDash val="solid"/>
+                      <a:round/>
+                      <a:headEnd type="none" w="med" len="med"/>
+                      <a:tailEnd type="none" w="med" len="med"/>
+                    </a:lnT>
+                    <a:lnB w="12700" cap="flat" cmpd="sng" algn="ctr">
+                      <a:solidFill>
+                        <a:schemeClr val="tx1"/>
+                      </a:solidFill>
+                      <a:prstDash val="solid"/>
+                      <a:round/>
+                      <a:headEnd type="none" w="med" len="med"/>
+                      <a:tailEnd type="none" w="med" len="med"/>
+                    </a:lnB>
+                    <a:noFill/>
+                  </a:tcPr>
+                </a:tc>
+                <a:tc>
+                  <a:txBody>
+                    <a:bodyPr/>
+                    <a:lstStyle/>
+                    <a:p>
+                      <a:pPr algn="ctr"/>
+                      <a:r>
+                        <a:rPr lang="en-TW" dirty="0">
+                          <a:solidFill>
+                            <a:schemeClr val="tx1"/>
+                          </a:solidFill>
+                        </a:rPr>
+                        <a:t>15</a:t>
+                      </a:r>
+                    </a:p>
+                  </a:txBody>
+                  <a:tcPr anchor="ctr">
+                    <a:lnL w="12700" cap="flat" cmpd="sng" algn="ctr">
+                      <a:solidFill>
+                        <a:schemeClr val="tx1"/>
+                      </a:solidFill>
+                      <a:prstDash val="solid"/>
+                      <a:round/>
+                      <a:headEnd type="none" w="med" len="med"/>
+                      <a:tailEnd type="none" w="med" len="med"/>
+                    </a:lnL>
+                    <a:lnR w="12700" cap="flat" cmpd="sng" algn="ctr">
+                      <a:solidFill>
+                        <a:schemeClr val="tx1"/>
+                      </a:solidFill>
+                      <a:prstDash val="solid"/>
+                      <a:round/>
+                      <a:headEnd type="none" w="med" len="med"/>
+                      <a:tailEnd type="none" w="med" len="med"/>
+                    </a:lnR>
+                    <a:lnT w="12700" cap="flat" cmpd="sng" algn="ctr">
+                      <a:solidFill>
+                        <a:schemeClr val="tx1"/>
+                      </a:solidFill>
+                      <a:prstDash val="solid"/>
+                      <a:round/>
+                      <a:headEnd type="none" w="med" len="med"/>
+                      <a:tailEnd type="none" w="med" len="med"/>
+                    </a:lnT>
+                    <a:lnB w="12700" cap="flat" cmpd="sng" algn="ctr">
+                      <a:solidFill>
+                        <a:schemeClr val="tx1"/>
+                      </a:solidFill>
+                      <a:prstDash val="solid"/>
+                      <a:round/>
+                      <a:headEnd type="none" w="med" len="med"/>
+                      <a:tailEnd type="none" w="med" len="med"/>
+                    </a:lnB>
+                    <a:noFill/>
+                  </a:tcPr>
+                </a:tc>
+                <a:tc>
+                  <a:txBody>
+                    <a:bodyPr/>
+                    <a:lstStyle/>
+                    <a:p>
+                      <a:pPr algn="ctr"/>
+                      <a:r>
+                        <a:rPr lang="en-TW" dirty="0">
+                          <a:solidFill>
+                            <a:schemeClr val="tx1"/>
+                          </a:solidFill>
+                        </a:rPr>
+                        <a:t>25</a:t>
+                      </a:r>
+                    </a:p>
+                  </a:txBody>
+                  <a:tcPr anchor="ctr">
+                    <a:lnL w="12700" cap="flat" cmpd="sng" algn="ctr">
+                      <a:solidFill>
+                        <a:schemeClr val="tx1"/>
+                      </a:solidFill>
+                      <a:prstDash val="solid"/>
+                      <a:round/>
+                      <a:headEnd type="none" w="med" len="med"/>
+                      <a:tailEnd type="none" w="med" len="med"/>
+                    </a:lnL>
+                    <a:lnR w="12700" cap="flat" cmpd="sng" algn="ctr">
+                      <a:solidFill>
+                        <a:schemeClr val="tx1"/>
+                      </a:solidFill>
+                      <a:prstDash val="solid"/>
+                      <a:round/>
+                      <a:headEnd type="none" w="med" len="med"/>
+                      <a:tailEnd type="none" w="med" len="med"/>
+                    </a:lnR>
+                    <a:lnT w="12700" cap="flat" cmpd="sng" algn="ctr">
+                      <a:solidFill>
+                        <a:schemeClr val="tx1"/>
+                      </a:solidFill>
+                      <a:prstDash val="solid"/>
+                      <a:round/>
+                      <a:headEnd type="none" w="med" len="med"/>
+                      <a:tailEnd type="none" w="med" len="med"/>
+                    </a:lnT>
+                    <a:lnB w="12700" cap="flat" cmpd="sng" algn="ctr">
+                      <a:solidFill>
+                        <a:schemeClr val="tx1"/>
+                      </a:solidFill>
+                      <a:prstDash val="solid"/>
+                      <a:round/>
+                      <a:headEnd type="none" w="med" len="med"/>
+                      <a:tailEnd type="none" w="med" len="med"/>
+                    </a:lnB>
+                    <a:noFill/>
+                  </a:tcPr>
+                </a:tc>
+                <a:tc>
+                  <a:txBody>
+                    <a:bodyPr/>
+                    <a:lstStyle/>
+                    <a:p>
+                      <a:pPr algn="ctr"/>
+                      <a:r>
+                        <a:rPr lang="en-TW" dirty="0">
+                          <a:solidFill>
+                            <a:schemeClr val="tx1"/>
+                          </a:solidFill>
+                        </a:rPr>
+                        <a:t>30</a:t>
+                      </a:r>
+                    </a:p>
+                  </a:txBody>
+                  <a:tcPr anchor="ctr">
+                    <a:lnL w="12700" cap="flat" cmpd="sng" algn="ctr">
+                      <a:solidFill>
+                        <a:schemeClr val="tx1"/>
+                      </a:solidFill>
+                      <a:prstDash val="solid"/>
+                      <a:round/>
+                      <a:headEnd type="none" w="med" len="med"/>
+                      <a:tailEnd type="none" w="med" len="med"/>
+                    </a:lnL>
+                    <a:lnR w="12700" cap="flat" cmpd="sng" algn="ctr">
+                      <a:solidFill>
+                        <a:schemeClr val="tx1"/>
+                      </a:solidFill>
+                      <a:prstDash val="solid"/>
+                      <a:round/>
+                      <a:headEnd type="none" w="med" len="med"/>
+                      <a:tailEnd type="none" w="med" len="med"/>
+                    </a:lnR>
+                    <a:lnT w="12700" cap="flat" cmpd="sng" algn="ctr">
+                      <a:solidFill>
+                        <a:schemeClr val="tx1"/>
+                      </a:solidFill>
+                      <a:prstDash val="solid"/>
+                      <a:round/>
+                      <a:headEnd type="none" w="med" len="med"/>
+                      <a:tailEnd type="none" w="med" len="med"/>
+                    </a:lnT>
+                    <a:lnB w="12700" cap="flat" cmpd="sng" algn="ctr">
+                      <a:solidFill>
+                        <a:schemeClr val="tx1"/>
+                      </a:solidFill>
+                      <a:prstDash val="solid"/>
+                      <a:round/>
+                      <a:headEnd type="none" w="med" len="med"/>
+                      <a:tailEnd type="none" w="med" len="med"/>
+                    </a:lnB>
+                    <a:noFill/>
+                  </a:tcPr>
+                </a:tc>
+                <a:tc>
+                  <a:txBody>
+                    <a:bodyPr/>
+                    <a:lstStyle/>
+                    <a:p>
+                      <a:pPr algn="ctr"/>
+                      <a:r>
+                        <a:rPr lang="en-TW" dirty="0">
+                          <a:solidFill>
+                            <a:schemeClr val="tx1"/>
+                          </a:solidFill>
+                        </a:rPr>
+                        <a:t>35</a:t>
+                      </a:r>
+                    </a:p>
+                  </a:txBody>
+                  <a:tcPr anchor="ctr">
+                    <a:lnL w="12700" cap="flat" cmpd="sng" algn="ctr">
+                      <a:solidFill>
+                        <a:schemeClr val="tx1"/>
+                      </a:solidFill>
+                      <a:prstDash val="solid"/>
+                      <a:round/>
+                      <a:headEnd type="none" w="med" len="med"/>
+                      <a:tailEnd type="none" w="med" len="med"/>
+                    </a:lnL>
+                    <a:lnR w="12700" cap="flat" cmpd="sng" algn="ctr">
+                      <a:solidFill>
+                        <a:schemeClr val="tx1"/>
+                      </a:solidFill>
+                      <a:prstDash val="solid"/>
+                      <a:round/>
+                      <a:headEnd type="none" w="med" len="med"/>
+                      <a:tailEnd type="none" w="med" len="med"/>
+                    </a:lnR>
+                    <a:lnT w="12700" cap="flat" cmpd="sng" algn="ctr">
+                      <a:solidFill>
+                        <a:schemeClr val="tx1"/>
+                      </a:solidFill>
+                      <a:prstDash val="solid"/>
+                      <a:round/>
+                      <a:headEnd type="none" w="med" len="med"/>
+                      <a:tailEnd type="none" w="med" len="med"/>
+                    </a:lnT>
+                    <a:lnB w="12700" cap="flat" cmpd="sng" algn="ctr">
+                      <a:solidFill>
+                        <a:schemeClr val="tx1"/>
+                      </a:solidFill>
+                      <a:prstDash val="solid"/>
+                      <a:round/>
+                      <a:headEnd type="none" w="med" len="med"/>
+                      <a:tailEnd type="none" w="med" len="med"/>
+                    </a:lnB>
+                    <a:noFill/>
+                  </a:tcPr>
+                </a:tc>
+                <a:tc>
+                  <a:txBody>
+                    <a:bodyPr/>
+                    <a:lstStyle/>
+                    <a:p>
+                      <a:pPr algn="ctr"/>
+                      <a:r>
+                        <a:rPr lang="en-TW" dirty="0">
+                          <a:solidFill>
+                            <a:schemeClr val="tx1"/>
+                          </a:solidFill>
+                        </a:rPr>
+                        <a:t>40</a:t>
+                      </a:r>
+                    </a:p>
+                  </a:txBody>
+                  <a:tcPr anchor="ctr">
+                    <a:lnL w="12700" cap="flat" cmpd="sng" algn="ctr">
+                      <a:solidFill>
+                        <a:schemeClr val="tx1"/>
+                      </a:solidFill>
+                      <a:prstDash val="solid"/>
+                      <a:round/>
+                      <a:headEnd type="none" w="med" len="med"/>
+                      <a:tailEnd type="none" w="med" len="med"/>
+                    </a:lnL>
+                    <a:lnR w="12700" cap="flat" cmpd="sng" algn="ctr">
+                      <a:solidFill>
+                        <a:schemeClr val="tx1"/>
+                      </a:solidFill>
+                      <a:prstDash val="solid"/>
+                      <a:round/>
+                      <a:headEnd type="none" w="med" len="med"/>
+                      <a:tailEnd type="none" w="med" len="med"/>
+                    </a:lnR>
+                    <a:lnT w="12700" cap="flat" cmpd="sng" algn="ctr">
+                      <a:solidFill>
+                        <a:schemeClr val="tx1"/>
+                      </a:solidFill>
+                      <a:prstDash val="solid"/>
+                      <a:round/>
+                      <a:headEnd type="none" w="med" len="med"/>
+                      <a:tailEnd type="none" w="med" len="med"/>
+                    </a:lnT>
+                    <a:lnB w="12700" cap="flat" cmpd="sng" algn="ctr">
+                      <a:solidFill>
+                        <a:schemeClr val="tx1"/>
+                      </a:solidFill>
+                      <a:prstDash val="solid"/>
+                      <a:round/>
+                      <a:headEnd type="none" w="med" len="med"/>
+                      <a:tailEnd type="none" w="med" len="med"/>
+                    </a:lnB>
+                    <a:noFill/>
+                  </a:tcPr>
+                </a:tc>
+                <a:tc>
+                  <a:txBody>
+                    <a:bodyPr/>
+                    <a:lstStyle/>
+                    <a:p>
+                      <a:pPr algn="ctr"/>
+                      <a:r>
+                        <a:rPr lang="en-TW" dirty="0">
+                          <a:solidFill>
+                            <a:schemeClr val="tx1"/>
+                          </a:solidFill>
+                        </a:rPr>
+                        <a:t>45</a:t>
+                      </a:r>
+                    </a:p>
+                  </a:txBody>
+                  <a:tcPr anchor="ctr">
+                    <a:lnL w="12700" cap="flat" cmpd="sng" algn="ctr">
+                      <a:solidFill>
+                        <a:schemeClr val="tx1"/>
+                      </a:solidFill>
+                      <a:prstDash val="solid"/>
+                      <a:round/>
+                      <a:headEnd type="none" w="med" len="med"/>
+                      <a:tailEnd type="none" w="med" len="med"/>
+                    </a:lnL>
+                    <a:lnR w="12700" cap="flat" cmpd="sng" algn="ctr">
+                      <a:solidFill>
+                        <a:schemeClr val="tx1"/>
+                      </a:solidFill>
+                      <a:prstDash val="solid"/>
+                      <a:round/>
+                      <a:headEnd type="none" w="med" len="med"/>
+                      <a:tailEnd type="none" w="med" len="med"/>
+                    </a:lnR>
+                    <a:lnT w="12700" cap="flat" cmpd="sng" algn="ctr">
+                      <a:solidFill>
+                        <a:schemeClr val="tx1"/>
+                      </a:solidFill>
+                      <a:prstDash val="solid"/>
+                      <a:round/>
+                      <a:headEnd type="none" w="med" len="med"/>
+                      <a:tailEnd type="none" w="med" len="med"/>
+                    </a:lnT>
+                    <a:lnB w="12700" cap="flat" cmpd="sng" algn="ctr">
+                      <a:solidFill>
+                        <a:schemeClr val="tx1"/>
+                      </a:solidFill>
+                      <a:prstDash val="solid"/>
+                      <a:round/>
+                      <a:headEnd type="none" w="med" len="med"/>
+                      <a:tailEnd type="none" w="med" len="med"/>
+                    </a:lnB>
+                    <a:noFill/>
+                  </a:tcPr>
+                </a:tc>
+                <a:tc>
+                  <a:txBody>
+                    <a:bodyPr/>
+                    <a:lstStyle/>
+                    <a:p>
+                      <a:pPr algn="ctr"/>
+                      <a:r>
+                        <a:rPr lang="en-TW" dirty="0">
+                          <a:solidFill>
+                            <a:schemeClr val="tx1"/>
+                          </a:solidFill>
+                        </a:rPr>
+                        <a:t>50</a:t>
+                      </a:r>
+                    </a:p>
+                  </a:txBody>
+                  <a:tcPr anchor="ctr">
+                    <a:lnL w="12700" cap="flat" cmpd="sng" algn="ctr">
+                      <a:solidFill>
+                        <a:schemeClr val="tx1"/>
+                      </a:solidFill>
+                      <a:prstDash val="solid"/>
+                      <a:round/>
+                      <a:headEnd type="none" w="med" len="med"/>
+                      <a:tailEnd type="none" w="med" len="med"/>
+                    </a:lnL>
+                    <a:lnR w="12700" cap="flat" cmpd="sng" algn="ctr">
+                      <a:solidFill>
+                        <a:schemeClr val="tx1"/>
+                      </a:solidFill>
+                      <a:prstDash val="solid"/>
+                      <a:round/>
+                      <a:headEnd type="none" w="med" len="med"/>
+                      <a:tailEnd type="none" w="med" len="med"/>
+                    </a:lnR>
+                    <a:lnT w="12700" cap="flat" cmpd="sng" algn="ctr">
+                      <a:solidFill>
+                        <a:schemeClr val="tx1"/>
+                      </a:solidFill>
+                      <a:prstDash val="solid"/>
+                      <a:round/>
+                      <a:headEnd type="none" w="med" len="med"/>
+                      <a:tailEnd type="none" w="med" len="med"/>
+                    </a:lnT>
+                    <a:lnB w="12700" cap="flat" cmpd="sng" algn="ctr">
+                      <a:solidFill>
+                        <a:schemeClr val="tx1"/>
+                      </a:solidFill>
+                      <a:prstDash val="solid"/>
+                      <a:round/>
+                      <a:headEnd type="none" w="med" len="med"/>
+                      <a:tailEnd type="none" w="med" len="med"/>
+                    </a:lnB>
+                    <a:noFill/>
+                  </a:tcPr>
+                </a:tc>
+                <a:tc>
+                  <a:txBody>
+                    <a:bodyPr/>
+                    <a:lstStyle/>
+                    <a:p>
+                      <a:pPr algn="ctr"/>
+                      <a:r>
+                        <a:rPr lang="en-TW" dirty="0">
+                          <a:solidFill>
+                            <a:schemeClr val="tx1"/>
+                          </a:solidFill>
+                        </a:rPr>
+                        <a:t>55</a:t>
+                      </a:r>
+                    </a:p>
+                  </a:txBody>
+                  <a:tcPr anchor="ctr">
+                    <a:lnL w="12700" cap="flat" cmpd="sng" algn="ctr">
+                      <a:solidFill>
+                        <a:schemeClr val="tx1"/>
+                      </a:solidFill>
+                      <a:prstDash val="solid"/>
+                      <a:round/>
+                      <a:headEnd type="none" w="med" len="med"/>
+                      <a:tailEnd type="none" w="med" len="med"/>
+                    </a:lnL>
+                    <a:lnR w="12700" cap="flat" cmpd="sng" algn="ctr">
+                      <a:solidFill>
+                        <a:schemeClr val="tx1"/>
+                      </a:solidFill>
+                      <a:prstDash val="solid"/>
+                      <a:round/>
+                      <a:headEnd type="none" w="med" len="med"/>
+                      <a:tailEnd type="none" w="med" len="med"/>
+                    </a:lnR>
+                    <a:lnT w="12700" cap="flat" cmpd="sng" algn="ctr">
+                      <a:solidFill>
+                        <a:schemeClr val="tx1"/>
+                      </a:solidFill>
+                      <a:prstDash val="solid"/>
+                      <a:round/>
+                      <a:headEnd type="none" w="med" len="med"/>
+                      <a:tailEnd type="none" w="med" len="med"/>
+                    </a:lnT>
+                    <a:lnB w="12700" cap="flat" cmpd="sng" algn="ctr">
+                      <a:solidFill>
+                        <a:schemeClr val="tx1"/>
+                      </a:solidFill>
+                      <a:prstDash val="solid"/>
+                      <a:round/>
+                      <a:headEnd type="none" w="med" len="med"/>
+                      <a:tailEnd type="none" w="med" len="med"/>
+                    </a:lnB>
+                    <a:noFill/>
+                  </a:tcPr>
+                </a:tc>
+                <a:tc>
+                  <a:txBody>
+                    <a:bodyPr/>
+                    <a:lstStyle/>
+                    <a:p>
+                      <a:pPr algn="ctr"/>
+                      <a:r>
+                        <a:rPr lang="en-TW" dirty="0">
+                          <a:solidFill>
+                            <a:schemeClr val="tx1"/>
+                          </a:solidFill>
+                        </a:rPr>
+                        <a:t>65</a:t>
+                      </a:r>
+                    </a:p>
+                  </a:txBody>
+                  <a:tcPr anchor="ctr">
+                    <a:lnL w="12700" cap="flat" cmpd="sng" algn="ctr">
+                      <a:solidFill>
+                        <a:schemeClr val="tx1"/>
+                      </a:solidFill>
+                      <a:prstDash val="solid"/>
+                      <a:round/>
+                      <a:headEnd type="none" w="med" len="med"/>
+                      <a:tailEnd type="none" w="med" len="med"/>
+                    </a:lnL>
+                    <a:lnR w="12700" cap="flat" cmpd="sng" algn="ctr">
+                      <a:solidFill>
+                        <a:schemeClr val="tx1"/>
+                      </a:solidFill>
+                      <a:prstDash val="solid"/>
+                      <a:round/>
+                      <a:headEnd type="none" w="med" len="med"/>
+                      <a:tailEnd type="none" w="med" len="med"/>
+                    </a:lnR>
+                    <a:lnT w="12700" cap="flat" cmpd="sng" algn="ctr">
+                      <a:solidFill>
+                        <a:schemeClr val="tx1"/>
+                      </a:solidFill>
+                      <a:prstDash val="solid"/>
+                      <a:round/>
+                      <a:headEnd type="none" w="med" len="med"/>
+                      <a:tailEnd type="none" w="med" len="med"/>
+                    </a:lnT>
+                    <a:lnB w="12700" cap="flat" cmpd="sng" algn="ctr">
+                      <a:solidFill>
+                        <a:schemeClr val="tx1"/>
+                      </a:solidFill>
+                      <a:prstDash val="solid"/>
+                      <a:round/>
+                      <a:headEnd type="none" w="med" len="med"/>
+                      <a:tailEnd type="none" w="med" len="med"/>
+                    </a:lnB>
+                    <a:noFill/>
+                  </a:tcPr>
+                </a:tc>
+                <a:tc>
+                  <a:txBody>
+                    <a:bodyPr/>
+                    <a:lstStyle/>
+                    <a:p>
+                      <a:pPr algn="ctr"/>
+                      <a:r>
+                        <a:rPr lang="en-TW" dirty="0">
+                          <a:solidFill>
+                            <a:schemeClr val="tx1"/>
+                          </a:solidFill>
+                        </a:rPr>
+                        <a:t>70</a:t>
+                      </a:r>
+                    </a:p>
+                  </a:txBody>
+                  <a:tcPr anchor="ctr">
+                    <a:lnL w="12700" cap="flat" cmpd="sng" algn="ctr">
+                      <a:solidFill>
+                        <a:schemeClr val="tx1"/>
+                      </a:solidFill>
+                      <a:prstDash val="solid"/>
+                      <a:round/>
+                      <a:headEnd type="none" w="med" len="med"/>
+                      <a:tailEnd type="none" w="med" len="med"/>
+                    </a:lnL>
+                    <a:lnR w="12700" cap="flat" cmpd="sng" algn="ctr">
+                      <a:solidFill>
+                        <a:schemeClr val="tx1"/>
+                      </a:solidFill>
+                      <a:prstDash val="solid"/>
+                      <a:round/>
+                      <a:headEnd type="none" w="med" len="med"/>
+                      <a:tailEnd type="none" w="med" len="med"/>
+                    </a:lnR>
+                    <a:lnT w="12700" cap="flat" cmpd="sng" algn="ctr">
+                      <a:solidFill>
+                        <a:schemeClr val="tx1"/>
+                      </a:solidFill>
+                      <a:prstDash val="solid"/>
+                      <a:round/>
+                      <a:headEnd type="none" w="med" len="med"/>
+                      <a:tailEnd type="none" w="med" len="med"/>
+                    </a:lnT>
+                    <a:lnB w="12700" cap="flat" cmpd="sng" algn="ctr">
+                      <a:solidFill>
+                        <a:schemeClr val="tx1"/>
+                      </a:solidFill>
+                      <a:prstDash val="solid"/>
+                      <a:round/>
+                      <a:headEnd type="none" w="med" len="med"/>
+                      <a:tailEnd type="none" w="med" len="med"/>
+                    </a:lnB>
+                    <a:noFill/>
+                  </a:tcPr>
+                </a:tc>
+                <a:extLst>
+                  <a:ext uri="{0D108BD9-81ED-4DB2-BD59-A6C34878D82A}">
+                    <a16:rowId xmlns:a16="http://schemas.microsoft.com/office/drawing/2014/main" val="1813203290"/>
+                  </a:ext>
+                </a:extLst>
+              </a:tr>
+              <a:tr h="454449">
+                <a:tc>
+                  <a:txBody>
+                    <a:bodyPr/>
+                    <a:lstStyle/>
+                    <a:p>
+                      <a:r>
+                        <a:rPr lang="en-TW" dirty="0"/>
+                        <a:t>block1</a:t>
+                      </a:r>
+                    </a:p>
+                  </a:txBody>
+                  <a:tcPr>
+                    <a:lnL w="12700" cap="flat" cmpd="sng" algn="ctr">
+                      <a:solidFill>
+                        <a:schemeClr val="tx1"/>
+                      </a:solidFill>
+                      <a:prstDash val="solid"/>
+                      <a:round/>
+                      <a:headEnd type="none" w="med" len="med"/>
+                      <a:tailEnd type="none" w="med" len="med"/>
+                    </a:lnL>
+                    <a:lnR w="12700" cap="flat" cmpd="sng" algn="ctr">
+                      <a:solidFill>
+                        <a:schemeClr val="tx1"/>
+                      </a:solidFill>
+                      <a:prstDash val="solid"/>
+                      <a:round/>
+                      <a:headEnd type="none" w="med" len="med"/>
+                      <a:tailEnd type="none" w="med" len="med"/>
+                    </a:lnR>
+                    <a:lnT w="12700" cap="flat" cmpd="sng" algn="ctr">
+                      <a:solidFill>
+                        <a:schemeClr val="tx1"/>
+                      </a:solidFill>
+                      <a:prstDash val="solid"/>
+                      <a:round/>
+                      <a:headEnd type="none" w="med" len="med"/>
+                      <a:tailEnd type="none" w="med" len="med"/>
+                    </a:lnT>
+                    <a:lnB w="12700" cap="flat" cmpd="sng" algn="ctr">
+                      <a:solidFill>
+                        <a:schemeClr val="tx1"/>
+                      </a:solidFill>
+                      <a:prstDash val="solid"/>
+                      <a:round/>
+                      <a:headEnd type="none" w="med" len="med"/>
+                      <a:tailEnd type="none" w="med" len="med"/>
+                    </a:lnB>
+                    <a:noFill/>
+                  </a:tcPr>
+                </a:tc>
+                <a:tc>
+                  <a:txBody>
+                    <a:bodyPr/>
+                    <a:lstStyle/>
+                    <a:p>
+                      <a:pPr algn="ctr"/>
+                      <a:r>
+                        <a:rPr lang="en-TW" dirty="0">
+                          <a:solidFill>
+                            <a:schemeClr val="tx1"/>
+                          </a:solidFill>
+                        </a:rPr>
+                        <a:t>dill</a:t>
+                      </a:r>
+                    </a:p>
+                  </a:txBody>
+                  <a:tcPr anchor="ctr">
+                    <a:lnL w="12700" cap="flat" cmpd="sng" algn="ctr">
+                      <a:solidFill>
+                        <a:schemeClr val="tx1"/>
+                      </a:solidFill>
+                      <a:prstDash val="solid"/>
+                      <a:round/>
+                      <a:headEnd type="none" w="med" len="med"/>
+                      <a:tailEnd type="none" w="med" len="med"/>
+                    </a:lnL>
+                    <a:lnR w="12700" cap="flat" cmpd="sng" algn="ctr">
+                      <a:solidFill>
+                        <a:schemeClr val="tx1"/>
+                      </a:solidFill>
+                      <a:prstDash val="solid"/>
+                      <a:round/>
+                      <a:headEnd type="none" w="med" len="med"/>
+                      <a:tailEnd type="none" w="med" len="med"/>
+                    </a:lnR>
+                    <a:lnT w="12700" cap="flat" cmpd="sng" algn="ctr">
+                      <a:solidFill>
+                        <a:schemeClr val="tx1"/>
+                      </a:solidFill>
+                      <a:prstDash val="solid"/>
+                      <a:round/>
+                      <a:headEnd type="none" w="med" len="med"/>
+                      <a:tailEnd type="none" w="med" len="med"/>
+                    </a:lnT>
+                    <a:lnB w="12700" cap="flat" cmpd="sng" algn="ctr">
+                      <a:solidFill>
+                        <a:schemeClr val="tx1"/>
+                      </a:solidFill>
+                      <a:prstDash val="solid"/>
+                      <a:round/>
+                      <a:headEnd type="none" w="med" len="med"/>
+                      <a:tailEnd type="none" w="med" len="med"/>
+                    </a:lnB>
+                    <a:noFill/>
+                  </a:tcPr>
+                </a:tc>
+                <a:tc>
+                  <a:txBody>
+                    <a:bodyPr/>
+                    <a:lstStyle/>
+                    <a:p>
+                      <a:pPr algn="ctr"/>
+                      <a:r>
+                        <a:rPr lang="en-TW" dirty="0">
+                          <a:solidFill>
+                            <a:schemeClr val="tx1"/>
+                          </a:solidFill>
+                        </a:rPr>
+                        <a:t>dip</a:t>
+                      </a:r>
+                    </a:p>
+                  </a:txBody>
+                  <a:tcPr anchor="ctr">
+                    <a:lnL w="12700" cap="flat" cmpd="sng" algn="ctr">
+                      <a:solidFill>
+                        <a:schemeClr val="tx1"/>
+                      </a:solidFill>
+                      <a:prstDash val="solid"/>
+                      <a:round/>
+                      <a:headEnd type="none" w="med" len="med"/>
+                      <a:tailEnd type="none" w="med" len="med"/>
+                    </a:lnL>
+                    <a:lnR w="12700" cap="flat" cmpd="sng" algn="ctr">
+                      <a:solidFill>
+                        <a:schemeClr val="tx1"/>
+                      </a:solidFill>
+                      <a:prstDash val="solid"/>
+                      <a:round/>
+                      <a:headEnd type="none" w="med" len="med"/>
+                      <a:tailEnd type="none" w="med" len="med"/>
+                    </a:lnR>
+                    <a:lnT w="12700" cap="flat" cmpd="sng" algn="ctr">
+                      <a:solidFill>
+                        <a:schemeClr val="tx1"/>
+                      </a:solidFill>
+                      <a:prstDash val="solid"/>
+                      <a:round/>
+                      <a:headEnd type="none" w="med" len="med"/>
+                      <a:tailEnd type="none" w="med" len="med"/>
+                    </a:lnT>
+                    <a:lnB w="12700" cap="flat" cmpd="sng" algn="ctr">
+                      <a:solidFill>
+                        <a:schemeClr val="tx1"/>
+                      </a:solidFill>
+                      <a:prstDash val="solid"/>
+                      <a:round/>
+                      <a:headEnd type="none" w="med" len="med"/>
+                      <a:tailEnd type="none" w="med" len="med"/>
+                    </a:lnB>
+                    <a:noFill/>
+                  </a:tcPr>
+                </a:tc>
+                <a:tc>
+                  <a:txBody>
+                    <a:bodyPr/>
+                    <a:lstStyle/>
+                    <a:p>
+                      <a:pPr algn="ctr"/>
+                      <a:r>
+                        <a:rPr lang="en-TW" dirty="0">
+                          <a:solidFill>
+                            <a:schemeClr val="tx1"/>
+                          </a:solidFill>
+                        </a:rPr>
+                        <a:t>din</a:t>
+                      </a:r>
+                    </a:p>
+                  </a:txBody>
+                  <a:tcPr anchor="ctr">
+                    <a:lnL w="12700" cap="flat" cmpd="sng" algn="ctr">
+                      <a:solidFill>
+                        <a:schemeClr val="tx1"/>
+                      </a:solidFill>
+                      <a:prstDash val="solid"/>
+                      <a:round/>
+                      <a:headEnd type="none" w="med" len="med"/>
+                      <a:tailEnd type="none" w="med" len="med"/>
+                    </a:lnL>
+                    <a:lnR w="12700" cap="flat" cmpd="sng" algn="ctr">
+                      <a:solidFill>
+                        <a:schemeClr val="tx1"/>
+                      </a:solidFill>
+                      <a:prstDash val="solid"/>
+                      <a:round/>
+                      <a:headEnd type="none" w="med" len="med"/>
+                      <a:tailEnd type="none" w="med" len="med"/>
+                    </a:lnR>
+                    <a:lnT w="12700" cap="flat" cmpd="sng" algn="ctr">
+                      <a:solidFill>
+                        <a:schemeClr val="tx1"/>
+                      </a:solidFill>
+                      <a:prstDash val="solid"/>
+                      <a:round/>
+                      <a:headEnd type="none" w="med" len="med"/>
+                      <a:tailEnd type="none" w="med" len="med"/>
+                    </a:lnT>
+                    <a:lnB w="12700" cap="flat" cmpd="sng" algn="ctr">
+                      <a:solidFill>
+                        <a:schemeClr val="tx1"/>
+                      </a:solidFill>
+                      <a:prstDash val="solid"/>
+                      <a:round/>
+                      <a:headEnd type="none" w="med" len="med"/>
+                      <a:tailEnd type="none" w="med" len="med"/>
+                    </a:lnB>
+                    <a:noFill/>
+                  </a:tcPr>
+                </a:tc>
+                <a:tc>
+                  <a:txBody>
+                    <a:bodyPr/>
+                    <a:lstStyle/>
+                    <a:p>
+                      <a:pPr algn="ctr"/>
+                      <a:r>
+                        <a:rPr lang="en-US" dirty="0">
+                          <a:solidFill>
+                            <a:schemeClr val="tx1"/>
+                          </a:solidFill>
+                        </a:rPr>
+                        <a:t>d</a:t>
+                      </a:r>
+                      <a:r>
+                        <a:rPr lang="en-TW" dirty="0">
+                          <a:solidFill>
+                            <a:schemeClr val="tx1"/>
+                          </a:solidFill>
+                        </a:rPr>
+                        <a:t>ill</a:t>
+                      </a:r>
+                    </a:p>
+                  </a:txBody>
+                  <a:tcPr anchor="ctr">
+                    <a:lnL w="12700" cap="flat" cmpd="sng" algn="ctr">
+                      <a:solidFill>
+                        <a:schemeClr val="tx1"/>
+                      </a:solidFill>
+                      <a:prstDash val="solid"/>
+                      <a:round/>
+                      <a:headEnd type="none" w="med" len="med"/>
+                      <a:tailEnd type="none" w="med" len="med"/>
+                    </a:lnL>
+                    <a:lnR w="12700" cap="flat" cmpd="sng" algn="ctr">
+                      <a:solidFill>
+                        <a:schemeClr val="tx1"/>
+                      </a:solidFill>
+                      <a:prstDash val="solid"/>
+                      <a:round/>
+                      <a:headEnd type="none" w="med" len="med"/>
+                      <a:tailEnd type="none" w="med" len="med"/>
+                    </a:lnR>
+                    <a:lnT w="12700" cap="flat" cmpd="sng" algn="ctr">
+                      <a:solidFill>
+                        <a:schemeClr val="tx1"/>
+                      </a:solidFill>
+                      <a:prstDash val="solid"/>
+                      <a:round/>
+                      <a:headEnd type="none" w="med" len="med"/>
+                      <a:tailEnd type="none" w="med" len="med"/>
+                    </a:lnT>
+                    <a:lnB w="12700" cap="flat" cmpd="sng" algn="ctr">
+                      <a:solidFill>
+                        <a:schemeClr val="tx1"/>
+                      </a:solidFill>
+                      <a:prstDash val="solid"/>
+                      <a:round/>
+                      <a:headEnd type="none" w="med" len="med"/>
+                      <a:tailEnd type="none" w="med" len="med"/>
+                    </a:lnB>
+                    <a:noFill/>
+                  </a:tcPr>
+                </a:tc>
+                <a:tc>
+                  <a:txBody>
+                    <a:bodyPr/>
+                    <a:lstStyle/>
+                    <a:p>
+                      <a:pPr algn="ctr"/>
+                      <a:r>
+                        <a:rPr lang="en-TW" dirty="0">
+                          <a:solidFill>
+                            <a:schemeClr val="tx1"/>
+                          </a:solidFill>
+                        </a:rPr>
+                        <a:t>dip</a:t>
+                      </a:r>
+                    </a:p>
+                  </a:txBody>
+                  <a:tcPr anchor="ctr">
+                    <a:lnL w="12700" cap="flat" cmpd="sng" algn="ctr">
+                      <a:solidFill>
+                        <a:schemeClr val="tx1"/>
+                      </a:solidFill>
+                      <a:prstDash val="solid"/>
+                      <a:round/>
+                      <a:headEnd type="none" w="med" len="med"/>
+                      <a:tailEnd type="none" w="med" len="med"/>
+                    </a:lnL>
+                    <a:lnR w="12700" cap="flat" cmpd="sng" algn="ctr">
+                      <a:solidFill>
+                        <a:schemeClr val="tx1"/>
+                      </a:solidFill>
+                      <a:prstDash val="solid"/>
+                      <a:round/>
+                      <a:headEnd type="none" w="med" len="med"/>
+                      <a:tailEnd type="none" w="med" len="med"/>
+                    </a:lnR>
+                    <a:lnT w="12700" cap="flat" cmpd="sng" algn="ctr">
+                      <a:solidFill>
+                        <a:schemeClr val="tx1"/>
+                      </a:solidFill>
+                      <a:prstDash val="solid"/>
+                      <a:round/>
+                      <a:headEnd type="none" w="med" len="med"/>
+                      <a:tailEnd type="none" w="med" len="med"/>
+                    </a:lnT>
+                    <a:lnB w="12700" cap="flat" cmpd="sng" algn="ctr">
+                      <a:solidFill>
+                        <a:schemeClr val="tx1"/>
+                      </a:solidFill>
+                      <a:prstDash val="solid"/>
+                      <a:round/>
+                      <a:headEnd type="none" w="med" len="med"/>
+                      <a:tailEnd type="none" w="med" len="med"/>
+                    </a:lnB>
+                    <a:noFill/>
+                  </a:tcPr>
+                </a:tc>
+                <a:tc>
+                  <a:txBody>
+                    <a:bodyPr/>
+                    <a:lstStyle/>
+                    <a:p>
+                      <a:pPr algn="ctr"/>
+                      <a:r>
+                        <a:rPr lang="en-TW" dirty="0">
+                          <a:solidFill>
+                            <a:schemeClr val="tx1"/>
+                          </a:solidFill>
+                        </a:rPr>
+                        <a:t>din</a:t>
+                      </a:r>
+                    </a:p>
+                  </a:txBody>
+                  <a:tcPr anchor="ctr">
+                    <a:lnL w="12700" cap="flat" cmpd="sng" algn="ctr">
+                      <a:solidFill>
+                        <a:schemeClr val="tx1"/>
+                      </a:solidFill>
+                      <a:prstDash val="solid"/>
+                      <a:round/>
+                      <a:headEnd type="none" w="med" len="med"/>
+                      <a:tailEnd type="none" w="med" len="med"/>
+                    </a:lnL>
+                    <a:lnR w="12700" cap="flat" cmpd="sng" algn="ctr">
+                      <a:solidFill>
+                        <a:schemeClr val="tx1"/>
+                      </a:solidFill>
+                      <a:prstDash val="solid"/>
+                      <a:round/>
+                      <a:headEnd type="none" w="med" len="med"/>
+                      <a:tailEnd type="none" w="med" len="med"/>
+                    </a:lnR>
+                    <a:lnT w="12700" cap="flat" cmpd="sng" algn="ctr">
+                      <a:solidFill>
+                        <a:schemeClr val="tx1"/>
+                      </a:solidFill>
+                      <a:prstDash val="solid"/>
+                      <a:round/>
+                      <a:headEnd type="none" w="med" len="med"/>
+                      <a:tailEnd type="none" w="med" len="med"/>
+                    </a:lnT>
+                    <a:lnB w="12700" cap="flat" cmpd="sng" algn="ctr">
+                      <a:solidFill>
+                        <a:schemeClr val="tx1"/>
+                      </a:solidFill>
+                      <a:prstDash val="solid"/>
+                      <a:round/>
+                      <a:headEnd type="none" w="med" len="med"/>
+                      <a:tailEnd type="none" w="med" len="med"/>
+                    </a:lnB>
+                    <a:noFill/>
+                  </a:tcPr>
+                </a:tc>
+                <a:tc>
+                  <a:txBody>
+                    <a:bodyPr/>
+                    <a:lstStyle/>
+                    <a:p>
+                      <a:pPr algn="ctr"/>
+                      <a:r>
+                        <a:rPr lang="en-TW" dirty="0">
+                          <a:solidFill>
+                            <a:schemeClr val="tx1"/>
+                          </a:solidFill>
+                        </a:rPr>
+                        <a:t>dill</a:t>
+                      </a:r>
+                    </a:p>
+                  </a:txBody>
+                  <a:tcPr anchor="ctr">
+                    <a:lnL w="12700" cap="flat" cmpd="sng" algn="ctr">
+                      <a:solidFill>
+                        <a:schemeClr val="tx1"/>
+                      </a:solidFill>
+                      <a:prstDash val="solid"/>
+                      <a:round/>
+                      <a:headEnd type="none" w="med" len="med"/>
+                      <a:tailEnd type="none" w="med" len="med"/>
+                    </a:lnL>
+                    <a:lnR w="12700" cap="flat" cmpd="sng" algn="ctr">
+                      <a:solidFill>
+                        <a:schemeClr val="tx1"/>
+                      </a:solidFill>
+                      <a:prstDash val="solid"/>
+                      <a:round/>
+                      <a:headEnd type="none" w="med" len="med"/>
+                      <a:tailEnd type="none" w="med" len="med"/>
+                    </a:lnR>
+                    <a:lnT w="12700" cap="flat" cmpd="sng" algn="ctr">
+                      <a:solidFill>
+                        <a:schemeClr val="tx1"/>
+                      </a:solidFill>
+                      <a:prstDash val="solid"/>
+                      <a:round/>
+                      <a:headEnd type="none" w="med" len="med"/>
+                      <a:tailEnd type="none" w="med" len="med"/>
+                    </a:lnT>
+                    <a:lnB w="12700" cap="flat" cmpd="sng" algn="ctr">
+                      <a:solidFill>
+                        <a:schemeClr val="tx1"/>
+                      </a:solidFill>
+                      <a:prstDash val="solid"/>
+                      <a:round/>
+                      <a:headEnd type="none" w="med" len="med"/>
+                      <a:tailEnd type="none" w="med" len="med"/>
+                    </a:lnB>
+                    <a:noFill/>
+                  </a:tcPr>
+                </a:tc>
+                <a:tc>
+                  <a:txBody>
+                    <a:bodyPr/>
+                    <a:lstStyle/>
+                    <a:p>
+                      <a:pPr algn="ctr"/>
+                      <a:r>
+                        <a:rPr lang="en-TW" dirty="0">
+                          <a:solidFill>
+                            <a:schemeClr val="tx1"/>
+                          </a:solidFill>
+                        </a:rPr>
+                        <a:t>dip</a:t>
+                      </a:r>
+                    </a:p>
+                  </a:txBody>
+                  <a:tcPr anchor="ctr">
+                    <a:lnL w="12700" cap="flat" cmpd="sng" algn="ctr">
+                      <a:solidFill>
+                        <a:schemeClr val="tx1"/>
+                      </a:solidFill>
+                      <a:prstDash val="solid"/>
+                      <a:round/>
+                      <a:headEnd type="none" w="med" len="med"/>
+                      <a:tailEnd type="none" w="med" len="med"/>
+                    </a:lnL>
+                    <a:lnR w="12700" cap="flat" cmpd="sng" algn="ctr">
+                      <a:solidFill>
+                        <a:schemeClr val="tx1"/>
+                      </a:solidFill>
+                      <a:prstDash val="solid"/>
+                      <a:round/>
+                      <a:headEnd type="none" w="med" len="med"/>
+                      <a:tailEnd type="none" w="med" len="med"/>
+                    </a:lnR>
+                    <a:lnT w="12700" cap="flat" cmpd="sng" algn="ctr">
+                      <a:solidFill>
+                        <a:schemeClr val="tx1"/>
+                      </a:solidFill>
+                      <a:prstDash val="solid"/>
+                      <a:round/>
+                      <a:headEnd type="none" w="med" len="med"/>
+                      <a:tailEnd type="none" w="med" len="med"/>
+                    </a:lnT>
+                    <a:lnB w="12700" cap="flat" cmpd="sng" algn="ctr">
+                      <a:solidFill>
+                        <a:schemeClr val="tx1"/>
+                      </a:solidFill>
+                      <a:prstDash val="solid"/>
+                      <a:round/>
+                      <a:headEnd type="none" w="med" len="med"/>
+                      <a:tailEnd type="none" w="med" len="med"/>
+                    </a:lnB>
+                    <a:noFill/>
+                  </a:tcPr>
+                </a:tc>
+                <a:tc>
+                  <a:txBody>
+                    <a:bodyPr/>
+                    <a:lstStyle/>
+                    <a:p>
+                      <a:pPr algn="ctr"/>
+                      <a:r>
+                        <a:rPr lang="en-TW" dirty="0">
+                          <a:solidFill>
+                            <a:schemeClr val="tx1"/>
+                          </a:solidFill>
+                        </a:rPr>
+                        <a:t>din</a:t>
+                      </a:r>
+                    </a:p>
+                  </a:txBody>
+                  <a:tcPr anchor="ctr">
+                    <a:lnL w="12700" cap="flat" cmpd="sng" algn="ctr">
+                      <a:solidFill>
+                        <a:schemeClr val="tx1"/>
+                      </a:solidFill>
+                      <a:prstDash val="solid"/>
+                      <a:round/>
+                      <a:headEnd type="none" w="med" len="med"/>
+                      <a:tailEnd type="none" w="med" len="med"/>
+                    </a:lnL>
+                    <a:lnR w="12700" cap="flat" cmpd="sng" algn="ctr">
+                      <a:solidFill>
+                        <a:schemeClr val="tx1"/>
+                      </a:solidFill>
+                      <a:prstDash val="solid"/>
+                      <a:round/>
+                      <a:headEnd type="none" w="med" len="med"/>
+                      <a:tailEnd type="none" w="med" len="med"/>
+                    </a:lnR>
+                    <a:lnT w="12700" cap="flat" cmpd="sng" algn="ctr">
+                      <a:solidFill>
+                        <a:schemeClr val="tx1"/>
+                      </a:solidFill>
+                      <a:prstDash val="solid"/>
+                      <a:round/>
+                      <a:headEnd type="none" w="med" len="med"/>
+                      <a:tailEnd type="none" w="med" len="med"/>
+                    </a:lnT>
+                    <a:lnB w="12700" cap="flat" cmpd="sng" algn="ctr">
+                      <a:solidFill>
+                        <a:schemeClr val="tx1"/>
+                      </a:solidFill>
+                      <a:prstDash val="solid"/>
+                      <a:round/>
+                      <a:headEnd type="none" w="med" len="med"/>
+                      <a:tailEnd type="none" w="med" len="med"/>
+                    </a:lnB>
+                    <a:noFill/>
+                  </a:tcPr>
+                </a:tc>
+                <a:tc>
+                  <a:txBody>
+                    <a:bodyPr/>
+                    <a:lstStyle/>
+                    <a:p>
+                      <a:pPr algn="ctr"/>
+                      <a:r>
+                        <a:rPr lang="en-TW" dirty="0">
+                          <a:solidFill>
+                            <a:schemeClr val="tx1"/>
+                          </a:solidFill>
+                        </a:rPr>
+                        <a:t>dill</a:t>
+                      </a:r>
+                    </a:p>
+                  </a:txBody>
+                  <a:tcPr anchor="ctr">
+                    <a:lnL w="12700" cap="flat" cmpd="sng" algn="ctr">
+                      <a:solidFill>
+                        <a:schemeClr val="tx1"/>
+                      </a:solidFill>
+                      <a:prstDash val="solid"/>
+                      <a:round/>
+                      <a:headEnd type="none" w="med" len="med"/>
+                      <a:tailEnd type="none" w="med" len="med"/>
+                    </a:lnL>
+                    <a:lnR w="12700" cap="flat" cmpd="sng" algn="ctr">
+                      <a:solidFill>
+                        <a:schemeClr val="tx1"/>
+                      </a:solidFill>
+                      <a:prstDash val="solid"/>
+                      <a:round/>
+                      <a:headEnd type="none" w="med" len="med"/>
+                      <a:tailEnd type="none" w="med" len="med"/>
+                    </a:lnR>
+                    <a:lnT w="12700" cap="flat" cmpd="sng" algn="ctr">
+                      <a:solidFill>
+                        <a:schemeClr val="tx1"/>
+                      </a:solidFill>
+                      <a:prstDash val="solid"/>
+                      <a:round/>
+                      <a:headEnd type="none" w="med" len="med"/>
+                      <a:tailEnd type="none" w="med" len="med"/>
+                    </a:lnT>
+                    <a:lnB w="12700" cap="flat" cmpd="sng" algn="ctr">
+                      <a:solidFill>
+                        <a:schemeClr val="tx1"/>
+                      </a:solidFill>
+                      <a:prstDash val="solid"/>
+                      <a:round/>
+                      <a:headEnd type="none" w="med" len="med"/>
+                      <a:tailEnd type="none" w="med" len="med"/>
+                    </a:lnB>
+                    <a:noFill/>
+                  </a:tcPr>
+                </a:tc>
+                <a:tc>
+                  <a:txBody>
+                    <a:bodyPr/>
+                    <a:lstStyle/>
+                    <a:p>
+                      <a:pPr algn="ctr"/>
+                      <a:r>
+                        <a:rPr lang="en-TW" dirty="0">
+                          <a:solidFill>
+                            <a:schemeClr val="tx1"/>
+                          </a:solidFill>
+                        </a:rPr>
+                        <a:t>dip</a:t>
+                      </a:r>
+                    </a:p>
+                  </a:txBody>
+                  <a:tcPr anchor="ctr">
+                    <a:lnL w="12700" cap="flat" cmpd="sng" algn="ctr">
+                      <a:solidFill>
+                        <a:schemeClr val="tx1"/>
+                      </a:solidFill>
+                      <a:prstDash val="solid"/>
+                      <a:round/>
+                      <a:headEnd type="none" w="med" len="med"/>
+                      <a:tailEnd type="none" w="med" len="med"/>
+                    </a:lnL>
+                    <a:lnR w="12700" cap="flat" cmpd="sng" algn="ctr">
+                      <a:solidFill>
+                        <a:schemeClr val="tx1"/>
+                      </a:solidFill>
+                      <a:prstDash val="solid"/>
+                      <a:round/>
+                      <a:headEnd type="none" w="med" len="med"/>
+                      <a:tailEnd type="none" w="med" len="med"/>
+                    </a:lnR>
+                    <a:lnT w="12700" cap="flat" cmpd="sng" algn="ctr">
+                      <a:solidFill>
+                        <a:schemeClr val="tx1"/>
+                      </a:solidFill>
+                      <a:prstDash val="solid"/>
+                      <a:round/>
+                      <a:headEnd type="none" w="med" len="med"/>
+                      <a:tailEnd type="none" w="med" len="med"/>
+                    </a:lnT>
+                    <a:lnB w="12700" cap="flat" cmpd="sng" algn="ctr">
+                      <a:solidFill>
+                        <a:schemeClr val="tx1"/>
+                      </a:solidFill>
+                      <a:prstDash val="solid"/>
+                      <a:round/>
+                      <a:headEnd type="none" w="med" len="med"/>
+                      <a:tailEnd type="none" w="med" len="med"/>
+                    </a:lnB>
+                    <a:noFill/>
+                  </a:tcPr>
+                </a:tc>
+                <a:tc>
+                  <a:txBody>
+                    <a:bodyPr/>
+                    <a:lstStyle/>
+                    <a:p>
+                      <a:pPr algn="ctr"/>
+                      <a:r>
+                        <a:rPr lang="en-TW" dirty="0">
+                          <a:solidFill>
+                            <a:schemeClr val="tx1"/>
+                          </a:solidFill>
+                        </a:rPr>
+                        <a:t>din</a:t>
+                      </a:r>
+                    </a:p>
+                  </a:txBody>
+                  <a:tcPr anchor="ctr">
+                    <a:lnL w="12700" cap="flat" cmpd="sng" algn="ctr">
+                      <a:solidFill>
+                        <a:schemeClr val="tx1"/>
+                      </a:solidFill>
+                      <a:prstDash val="solid"/>
+                      <a:round/>
+                      <a:headEnd type="none" w="med" len="med"/>
+                      <a:tailEnd type="none" w="med" len="med"/>
+                    </a:lnL>
+                    <a:lnR w="12700" cap="flat" cmpd="sng" algn="ctr">
+                      <a:solidFill>
+                        <a:schemeClr val="tx1"/>
+                      </a:solidFill>
+                      <a:prstDash val="solid"/>
+                      <a:round/>
+                      <a:headEnd type="none" w="med" len="med"/>
+                      <a:tailEnd type="none" w="med" len="med"/>
+                    </a:lnR>
+                    <a:lnT w="12700" cap="flat" cmpd="sng" algn="ctr">
+                      <a:solidFill>
+                        <a:schemeClr val="tx1"/>
+                      </a:solidFill>
+                      <a:prstDash val="solid"/>
+                      <a:round/>
+                      <a:headEnd type="none" w="med" len="med"/>
+                      <a:tailEnd type="none" w="med" len="med"/>
+                    </a:lnT>
+                    <a:lnB w="12700" cap="flat" cmpd="sng" algn="ctr">
+                      <a:solidFill>
+                        <a:schemeClr val="tx1"/>
+                      </a:solidFill>
+                      <a:prstDash val="solid"/>
+                      <a:round/>
+                      <a:headEnd type="none" w="med" len="med"/>
+                      <a:tailEnd type="none" w="med" len="med"/>
+                    </a:lnB>
+                    <a:noFill/>
+                  </a:tcPr>
+                </a:tc>
+                <a:extLst>
+                  <a:ext uri="{0D108BD9-81ED-4DB2-BD59-A6C34878D82A}">
+                    <a16:rowId xmlns:a16="http://schemas.microsoft.com/office/drawing/2014/main" val="423736658"/>
+                  </a:ext>
+                </a:extLst>
+              </a:tr>
+              <a:tr h="454449">
+                <a:tc>
+                  <a:txBody>
+                    <a:bodyPr/>
+                    <a:lstStyle/>
+                    <a:p>
+                      <a:r>
+                        <a:rPr lang="en-TW" dirty="0"/>
+                        <a:t>block2</a:t>
+                      </a:r>
+                    </a:p>
+                  </a:txBody>
+                  <a:tcPr>
+                    <a:lnL w="12700" cap="flat" cmpd="sng" algn="ctr">
+                      <a:solidFill>
+                        <a:schemeClr val="tx1"/>
+                      </a:solidFill>
+                      <a:prstDash val="solid"/>
+                      <a:round/>
+                      <a:headEnd type="none" w="med" len="med"/>
+                      <a:tailEnd type="none" w="med" len="med"/>
+                    </a:lnL>
+                    <a:lnR w="12700" cap="flat" cmpd="sng" algn="ctr">
+                      <a:solidFill>
+                        <a:schemeClr val="tx1"/>
+                      </a:solidFill>
+                      <a:prstDash val="solid"/>
+                      <a:round/>
+                      <a:headEnd type="none" w="med" len="med"/>
+                      <a:tailEnd type="none" w="med" len="med"/>
+                    </a:lnR>
+                    <a:lnT w="12700" cap="flat" cmpd="sng" algn="ctr">
+                      <a:solidFill>
+                        <a:schemeClr val="tx1"/>
+                      </a:solidFill>
+                      <a:prstDash val="solid"/>
+                      <a:round/>
+                      <a:headEnd type="none" w="med" len="med"/>
+                      <a:tailEnd type="none" w="med" len="med"/>
+                    </a:lnT>
+                    <a:lnB w="12700" cap="flat" cmpd="sng" algn="ctr">
+                      <a:solidFill>
+                        <a:schemeClr val="tx1"/>
+                      </a:solidFill>
+                      <a:prstDash val="solid"/>
+                      <a:round/>
+                      <a:headEnd type="none" w="med" len="med"/>
+                      <a:tailEnd type="none" w="med" len="med"/>
+                    </a:lnB>
+                    <a:noFill/>
+                  </a:tcPr>
+                </a:tc>
+                <a:tc>
+                  <a:txBody>
+                    <a:bodyPr/>
+                    <a:lstStyle/>
+                    <a:p>
+                      <a:pPr algn="ctr"/>
+                      <a:r>
+                        <a:rPr lang="en-TW" dirty="0">
+                          <a:solidFill>
+                            <a:schemeClr val="tx1"/>
+                          </a:solidFill>
+                        </a:rPr>
+                        <a:t>dip</a:t>
+                      </a:r>
+                    </a:p>
+                  </a:txBody>
+                  <a:tcPr anchor="ctr">
+                    <a:lnL w="12700" cap="flat" cmpd="sng" algn="ctr">
+                      <a:solidFill>
+                        <a:schemeClr val="tx1"/>
+                      </a:solidFill>
+                      <a:prstDash val="solid"/>
+                      <a:round/>
+                      <a:headEnd type="none" w="med" len="med"/>
+                      <a:tailEnd type="none" w="med" len="med"/>
+                    </a:lnL>
+                    <a:lnR w="12700" cap="flat" cmpd="sng" algn="ctr">
+                      <a:solidFill>
+                        <a:schemeClr val="tx1"/>
+                      </a:solidFill>
+                      <a:prstDash val="solid"/>
+                      <a:round/>
+                      <a:headEnd type="none" w="med" len="med"/>
+                      <a:tailEnd type="none" w="med" len="med"/>
+                    </a:lnR>
+                    <a:lnT w="12700" cap="flat" cmpd="sng" algn="ctr">
+                      <a:solidFill>
+                        <a:schemeClr val="tx1"/>
+                      </a:solidFill>
+                      <a:prstDash val="solid"/>
+                      <a:round/>
+                      <a:headEnd type="none" w="med" len="med"/>
+                      <a:tailEnd type="none" w="med" len="med"/>
+                    </a:lnT>
+                    <a:lnB w="12700" cap="flat" cmpd="sng" algn="ctr">
+                      <a:solidFill>
+                        <a:schemeClr val="tx1"/>
+                      </a:solidFill>
+                      <a:prstDash val="solid"/>
+                      <a:round/>
+                      <a:headEnd type="none" w="med" len="med"/>
+                      <a:tailEnd type="none" w="med" len="med"/>
+                    </a:lnB>
+                    <a:noFill/>
+                  </a:tcPr>
+                </a:tc>
+                <a:tc>
+                  <a:txBody>
+                    <a:bodyPr/>
+                    <a:lstStyle/>
+                    <a:p>
+                      <a:pPr algn="ctr"/>
+                      <a:r>
+                        <a:rPr lang="en-TW" dirty="0">
+                          <a:solidFill>
+                            <a:schemeClr val="tx1"/>
+                          </a:solidFill>
+                        </a:rPr>
+                        <a:t>din</a:t>
+                      </a:r>
+                    </a:p>
+                  </a:txBody>
+                  <a:tcPr anchor="ctr">
+                    <a:lnL w="12700" cap="flat" cmpd="sng" algn="ctr">
+                      <a:solidFill>
+                        <a:schemeClr val="tx1"/>
+                      </a:solidFill>
+                      <a:prstDash val="solid"/>
+                      <a:round/>
+                      <a:headEnd type="none" w="med" len="med"/>
+                      <a:tailEnd type="none" w="med" len="med"/>
+                    </a:lnL>
+                    <a:lnR w="12700" cap="flat" cmpd="sng" algn="ctr">
+                      <a:solidFill>
+                        <a:schemeClr val="tx1"/>
+                      </a:solidFill>
+                      <a:prstDash val="solid"/>
+                      <a:round/>
+                      <a:headEnd type="none" w="med" len="med"/>
+                      <a:tailEnd type="none" w="med" len="med"/>
+                    </a:lnR>
+                    <a:lnT w="12700" cap="flat" cmpd="sng" algn="ctr">
+                      <a:solidFill>
+                        <a:schemeClr val="tx1"/>
+                      </a:solidFill>
+                      <a:prstDash val="solid"/>
+                      <a:round/>
+                      <a:headEnd type="none" w="med" len="med"/>
+                      <a:tailEnd type="none" w="med" len="med"/>
+                    </a:lnT>
+                    <a:lnB w="12700" cap="flat" cmpd="sng" algn="ctr">
+                      <a:solidFill>
+                        <a:schemeClr val="tx1"/>
+                      </a:solidFill>
+                      <a:prstDash val="solid"/>
+                      <a:round/>
+                      <a:headEnd type="none" w="med" len="med"/>
+                      <a:tailEnd type="none" w="med" len="med"/>
+                    </a:lnB>
+                    <a:noFill/>
+                  </a:tcPr>
+                </a:tc>
+                <a:tc>
+                  <a:txBody>
+                    <a:bodyPr/>
+                    <a:lstStyle/>
+                    <a:p>
+                      <a:pPr algn="ctr"/>
+                      <a:r>
+                        <a:rPr lang="en-TW" dirty="0">
+                          <a:solidFill>
+                            <a:schemeClr val="tx1"/>
+                          </a:solidFill>
+                        </a:rPr>
+                        <a:t>dill</a:t>
+                      </a:r>
+                    </a:p>
+                  </a:txBody>
+                  <a:tcPr anchor="ctr">
+                    <a:lnL w="12700" cap="flat" cmpd="sng" algn="ctr">
+                      <a:solidFill>
+                        <a:schemeClr val="tx1"/>
+                      </a:solidFill>
+                      <a:prstDash val="solid"/>
+                      <a:round/>
+                      <a:headEnd type="none" w="med" len="med"/>
+                      <a:tailEnd type="none" w="med" len="med"/>
+                    </a:lnL>
+                    <a:lnR w="12700" cap="flat" cmpd="sng" algn="ctr">
+                      <a:solidFill>
+                        <a:schemeClr val="tx1"/>
+                      </a:solidFill>
+                      <a:prstDash val="solid"/>
+                      <a:round/>
+                      <a:headEnd type="none" w="med" len="med"/>
+                      <a:tailEnd type="none" w="med" len="med"/>
+                    </a:lnR>
+                    <a:lnT w="12700" cap="flat" cmpd="sng" algn="ctr">
+                      <a:solidFill>
+                        <a:schemeClr val="tx1"/>
+                      </a:solidFill>
+                      <a:prstDash val="solid"/>
+                      <a:round/>
+                      <a:headEnd type="none" w="med" len="med"/>
+                      <a:tailEnd type="none" w="med" len="med"/>
+                    </a:lnT>
+                    <a:lnB w="12700" cap="flat" cmpd="sng" algn="ctr">
+                      <a:solidFill>
+                        <a:schemeClr val="tx1"/>
+                      </a:solidFill>
+                      <a:prstDash val="solid"/>
+                      <a:round/>
+                      <a:headEnd type="none" w="med" len="med"/>
+                      <a:tailEnd type="none" w="med" len="med"/>
+                    </a:lnB>
+                    <a:noFill/>
+                  </a:tcPr>
+                </a:tc>
+                <a:tc>
+                  <a:txBody>
+                    <a:bodyPr/>
+                    <a:lstStyle/>
+                    <a:p>
+                      <a:pPr algn="ctr"/>
+                      <a:r>
+                        <a:rPr lang="en-TW" dirty="0">
+                          <a:solidFill>
+                            <a:schemeClr val="tx1"/>
+                          </a:solidFill>
+                        </a:rPr>
+                        <a:t>din</a:t>
+                      </a:r>
+                    </a:p>
+                  </a:txBody>
+                  <a:tcPr anchor="ctr">
+                    <a:lnL w="12700" cap="flat" cmpd="sng" algn="ctr">
+                      <a:solidFill>
+                        <a:schemeClr val="tx1"/>
+                      </a:solidFill>
+                      <a:prstDash val="solid"/>
+                      <a:round/>
+                      <a:headEnd type="none" w="med" len="med"/>
+                      <a:tailEnd type="none" w="med" len="med"/>
+                    </a:lnL>
+                    <a:lnR w="12700" cap="flat" cmpd="sng" algn="ctr">
+                      <a:solidFill>
+                        <a:schemeClr val="tx1"/>
+                      </a:solidFill>
+                      <a:prstDash val="solid"/>
+                      <a:round/>
+                      <a:headEnd type="none" w="med" len="med"/>
+                      <a:tailEnd type="none" w="med" len="med"/>
+                    </a:lnR>
+                    <a:lnT w="12700" cap="flat" cmpd="sng" algn="ctr">
+                      <a:solidFill>
+                        <a:schemeClr val="tx1"/>
+                      </a:solidFill>
+                      <a:prstDash val="solid"/>
+                      <a:round/>
+                      <a:headEnd type="none" w="med" len="med"/>
+                      <a:tailEnd type="none" w="med" len="med"/>
+                    </a:lnT>
+                    <a:lnB w="12700" cap="flat" cmpd="sng" algn="ctr">
+                      <a:solidFill>
+                        <a:schemeClr val="tx1"/>
+                      </a:solidFill>
+                      <a:prstDash val="solid"/>
+                      <a:round/>
+                      <a:headEnd type="none" w="med" len="med"/>
+                      <a:tailEnd type="none" w="med" len="med"/>
+                    </a:lnB>
+                    <a:noFill/>
+                  </a:tcPr>
+                </a:tc>
+                <a:tc>
+                  <a:txBody>
+                    <a:bodyPr/>
+                    <a:lstStyle/>
+                    <a:p>
+                      <a:pPr algn="ctr"/>
+                      <a:r>
+                        <a:rPr lang="en-TW" dirty="0">
+                          <a:solidFill>
+                            <a:schemeClr val="tx1"/>
+                          </a:solidFill>
+                        </a:rPr>
+                        <a:t>dill</a:t>
+                      </a:r>
+                    </a:p>
+                  </a:txBody>
+                  <a:tcPr anchor="ctr">
+                    <a:lnL w="12700" cap="flat" cmpd="sng" algn="ctr">
+                      <a:solidFill>
+                        <a:schemeClr val="tx1"/>
+                      </a:solidFill>
+                      <a:prstDash val="solid"/>
+                      <a:round/>
+                      <a:headEnd type="none" w="med" len="med"/>
+                      <a:tailEnd type="none" w="med" len="med"/>
+                    </a:lnL>
+                    <a:lnR w="12700" cap="flat" cmpd="sng" algn="ctr">
+                      <a:solidFill>
+                        <a:schemeClr val="tx1"/>
+                      </a:solidFill>
+                      <a:prstDash val="solid"/>
+                      <a:round/>
+                      <a:headEnd type="none" w="med" len="med"/>
+                      <a:tailEnd type="none" w="med" len="med"/>
+                    </a:lnR>
+                    <a:lnT w="12700" cap="flat" cmpd="sng" algn="ctr">
+                      <a:solidFill>
+                        <a:schemeClr val="tx1"/>
+                      </a:solidFill>
+                      <a:prstDash val="solid"/>
+                      <a:round/>
+                      <a:headEnd type="none" w="med" len="med"/>
+                      <a:tailEnd type="none" w="med" len="med"/>
+                    </a:lnT>
+                    <a:lnB w="12700" cap="flat" cmpd="sng" algn="ctr">
+                      <a:solidFill>
+                        <a:schemeClr val="tx1"/>
+                      </a:solidFill>
+                      <a:prstDash val="solid"/>
+                      <a:round/>
+                      <a:headEnd type="none" w="med" len="med"/>
+                      <a:tailEnd type="none" w="med" len="med"/>
+                    </a:lnB>
+                    <a:noFill/>
+                  </a:tcPr>
+                </a:tc>
+                <a:tc>
+                  <a:txBody>
+                    <a:bodyPr/>
+                    <a:lstStyle/>
+                    <a:p>
+                      <a:pPr algn="ctr"/>
+                      <a:r>
+                        <a:rPr lang="en-TW" dirty="0">
+                          <a:solidFill>
+                            <a:schemeClr val="tx1"/>
+                          </a:solidFill>
+                        </a:rPr>
+                        <a:t>dip</a:t>
+                      </a:r>
+                    </a:p>
+                  </a:txBody>
+                  <a:tcPr anchor="ctr">
+                    <a:lnL w="12700" cap="flat" cmpd="sng" algn="ctr">
+                      <a:solidFill>
+                        <a:schemeClr val="tx1"/>
+                      </a:solidFill>
+                      <a:prstDash val="solid"/>
+                      <a:round/>
+                      <a:headEnd type="none" w="med" len="med"/>
+                      <a:tailEnd type="none" w="med" len="med"/>
+                    </a:lnL>
+                    <a:lnR w="12700" cap="flat" cmpd="sng" algn="ctr">
+                      <a:solidFill>
+                        <a:schemeClr val="tx1"/>
+                      </a:solidFill>
+                      <a:prstDash val="solid"/>
+                      <a:round/>
+                      <a:headEnd type="none" w="med" len="med"/>
+                      <a:tailEnd type="none" w="med" len="med"/>
+                    </a:lnR>
+                    <a:lnT w="12700" cap="flat" cmpd="sng" algn="ctr">
+                      <a:solidFill>
+                        <a:schemeClr val="tx1"/>
+                      </a:solidFill>
+                      <a:prstDash val="solid"/>
+                      <a:round/>
+                      <a:headEnd type="none" w="med" len="med"/>
+                      <a:tailEnd type="none" w="med" len="med"/>
+                    </a:lnT>
+                    <a:lnB w="12700" cap="flat" cmpd="sng" algn="ctr">
+                      <a:solidFill>
+                        <a:schemeClr val="tx1"/>
+                      </a:solidFill>
+                      <a:prstDash val="solid"/>
+                      <a:round/>
+                      <a:headEnd type="none" w="med" len="med"/>
+                      <a:tailEnd type="none" w="med" len="med"/>
+                    </a:lnB>
+                    <a:noFill/>
+                  </a:tcPr>
+                </a:tc>
+                <a:tc>
+                  <a:txBody>
+                    <a:bodyPr/>
+                    <a:lstStyle/>
+                    <a:p>
+                      <a:pPr algn="ctr"/>
+                      <a:r>
+                        <a:rPr lang="en-TW" dirty="0">
+                          <a:solidFill>
+                            <a:schemeClr val="tx1"/>
+                          </a:solidFill>
+                        </a:rPr>
+                        <a:t>din</a:t>
+                      </a:r>
+                    </a:p>
+                  </a:txBody>
+                  <a:tcPr anchor="ctr">
+                    <a:lnL w="12700" cap="flat" cmpd="sng" algn="ctr">
+                      <a:solidFill>
+                        <a:schemeClr val="tx1"/>
+                      </a:solidFill>
+                      <a:prstDash val="solid"/>
+                      <a:round/>
+                      <a:headEnd type="none" w="med" len="med"/>
+                      <a:tailEnd type="none" w="med" len="med"/>
+                    </a:lnL>
+                    <a:lnR w="12700" cap="flat" cmpd="sng" algn="ctr">
+                      <a:solidFill>
+                        <a:schemeClr val="tx1"/>
+                      </a:solidFill>
+                      <a:prstDash val="solid"/>
+                      <a:round/>
+                      <a:headEnd type="none" w="med" len="med"/>
+                      <a:tailEnd type="none" w="med" len="med"/>
+                    </a:lnR>
+                    <a:lnT w="12700" cap="flat" cmpd="sng" algn="ctr">
+                      <a:solidFill>
+                        <a:schemeClr val="tx1"/>
+                      </a:solidFill>
+                      <a:prstDash val="solid"/>
+                      <a:round/>
+                      <a:headEnd type="none" w="med" len="med"/>
+                      <a:tailEnd type="none" w="med" len="med"/>
+                    </a:lnT>
+                    <a:lnB w="12700" cap="flat" cmpd="sng" algn="ctr">
+                      <a:solidFill>
+                        <a:schemeClr val="tx1"/>
+                      </a:solidFill>
+                      <a:prstDash val="solid"/>
+                      <a:round/>
+                      <a:headEnd type="none" w="med" len="med"/>
+                      <a:tailEnd type="none" w="med" len="med"/>
+                    </a:lnB>
+                    <a:noFill/>
+                  </a:tcPr>
+                </a:tc>
+                <a:tc>
+                  <a:txBody>
+                    <a:bodyPr/>
+                    <a:lstStyle/>
+                    <a:p>
+                      <a:pPr algn="ctr"/>
+                      <a:r>
+                        <a:rPr lang="en-TW" dirty="0">
+                          <a:solidFill>
+                            <a:schemeClr val="tx1"/>
+                          </a:solidFill>
+                        </a:rPr>
+                        <a:t>dill</a:t>
+                      </a:r>
+                    </a:p>
+                  </a:txBody>
+                  <a:tcPr anchor="ctr">
+                    <a:lnL w="12700" cap="flat" cmpd="sng" algn="ctr">
+                      <a:solidFill>
+                        <a:schemeClr val="tx1"/>
+                      </a:solidFill>
+                      <a:prstDash val="solid"/>
+                      <a:round/>
+                      <a:headEnd type="none" w="med" len="med"/>
+                      <a:tailEnd type="none" w="med" len="med"/>
+                    </a:lnL>
+                    <a:lnR w="12700" cap="flat" cmpd="sng" algn="ctr">
+                      <a:solidFill>
+                        <a:schemeClr val="tx1"/>
+                      </a:solidFill>
+                      <a:prstDash val="solid"/>
+                      <a:round/>
+                      <a:headEnd type="none" w="med" len="med"/>
+                      <a:tailEnd type="none" w="med" len="med"/>
+                    </a:lnR>
+                    <a:lnT w="12700" cap="flat" cmpd="sng" algn="ctr">
+                      <a:solidFill>
+                        <a:schemeClr val="tx1"/>
+                      </a:solidFill>
+                      <a:prstDash val="solid"/>
+                      <a:round/>
+                      <a:headEnd type="none" w="med" len="med"/>
+                      <a:tailEnd type="none" w="med" len="med"/>
+                    </a:lnT>
+                    <a:lnB w="12700" cap="flat" cmpd="sng" algn="ctr">
+                      <a:solidFill>
+                        <a:schemeClr val="tx1"/>
+                      </a:solidFill>
+                      <a:prstDash val="solid"/>
+                      <a:round/>
+                      <a:headEnd type="none" w="med" len="med"/>
+                      <a:tailEnd type="none" w="med" len="med"/>
+                    </a:lnB>
+                    <a:noFill/>
+                  </a:tcPr>
+                </a:tc>
+                <a:tc>
+                  <a:txBody>
+                    <a:bodyPr/>
+                    <a:lstStyle/>
+                    <a:p>
+                      <a:pPr algn="ctr"/>
+                      <a:r>
+                        <a:rPr lang="en-TW" dirty="0">
+                          <a:solidFill>
+                            <a:schemeClr val="tx1"/>
+                          </a:solidFill>
+                        </a:rPr>
+                        <a:t>dip</a:t>
+                      </a:r>
+                    </a:p>
+                  </a:txBody>
+                  <a:tcPr anchor="ctr">
+                    <a:lnL w="12700" cap="flat" cmpd="sng" algn="ctr">
+                      <a:solidFill>
+                        <a:schemeClr val="tx1"/>
+                      </a:solidFill>
+                      <a:prstDash val="solid"/>
+                      <a:round/>
+                      <a:headEnd type="none" w="med" len="med"/>
+                      <a:tailEnd type="none" w="med" len="med"/>
+                    </a:lnL>
+                    <a:lnR w="12700" cap="flat" cmpd="sng" algn="ctr">
+                      <a:solidFill>
+                        <a:schemeClr val="tx1"/>
+                      </a:solidFill>
+                      <a:prstDash val="solid"/>
+                      <a:round/>
+                      <a:headEnd type="none" w="med" len="med"/>
+                      <a:tailEnd type="none" w="med" len="med"/>
+                    </a:lnR>
+                    <a:lnT w="12700" cap="flat" cmpd="sng" algn="ctr">
+                      <a:solidFill>
+                        <a:schemeClr val="tx1"/>
+                      </a:solidFill>
+                      <a:prstDash val="solid"/>
+                      <a:round/>
+                      <a:headEnd type="none" w="med" len="med"/>
+                      <a:tailEnd type="none" w="med" len="med"/>
+                    </a:lnT>
+                    <a:lnB w="12700" cap="flat" cmpd="sng" algn="ctr">
+                      <a:solidFill>
+                        <a:schemeClr val="tx1"/>
+                      </a:solidFill>
+                      <a:prstDash val="solid"/>
+                      <a:round/>
+                      <a:headEnd type="none" w="med" len="med"/>
+                      <a:tailEnd type="none" w="med" len="med"/>
+                    </a:lnB>
+                    <a:noFill/>
+                  </a:tcPr>
+                </a:tc>
+                <a:tc>
+                  <a:txBody>
+                    <a:bodyPr/>
+                    <a:lstStyle/>
+                    <a:p>
+                      <a:pPr algn="ctr"/>
+                      <a:r>
+                        <a:rPr lang="en-TW" dirty="0">
+                          <a:solidFill>
+                            <a:schemeClr val="tx1"/>
+                          </a:solidFill>
+                        </a:rPr>
+                        <a:t>dip</a:t>
+                      </a:r>
+                    </a:p>
+                  </a:txBody>
+                  <a:tcPr anchor="ctr">
+                    <a:lnL w="12700" cap="flat" cmpd="sng" algn="ctr">
+                      <a:solidFill>
+                        <a:schemeClr val="tx1"/>
+                      </a:solidFill>
+                      <a:prstDash val="solid"/>
+                      <a:round/>
+                      <a:headEnd type="none" w="med" len="med"/>
+                      <a:tailEnd type="none" w="med" len="med"/>
+                    </a:lnL>
+                    <a:lnR w="12700" cap="flat" cmpd="sng" algn="ctr">
+                      <a:solidFill>
+                        <a:schemeClr val="tx1"/>
+                      </a:solidFill>
+                      <a:prstDash val="solid"/>
+                      <a:round/>
+                      <a:headEnd type="none" w="med" len="med"/>
+                      <a:tailEnd type="none" w="med" len="med"/>
+                    </a:lnR>
+                    <a:lnT w="12700" cap="flat" cmpd="sng" algn="ctr">
+                      <a:solidFill>
+                        <a:schemeClr val="tx1"/>
+                      </a:solidFill>
+                      <a:prstDash val="solid"/>
+                      <a:round/>
+                      <a:headEnd type="none" w="med" len="med"/>
+                      <a:tailEnd type="none" w="med" len="med"/>
+                    </a:lnT>
+                    <a:lnB w="12700" cap="flat" cmpd="sng" algn="ctr">
+                      <a:solidFill>
+                        <a:schemeClr val="tx1"/>
+                      </a:solidFill>
+                      <a:prstDash val="solid"/>
+                      <a:round/>
+                      <a:headEnd type="none" w="med" len="med"/>
+                      <a:tailEnd type="none" w="med" len="med"/>
+                    </a:lnB>
+                    <a:noFill/>
+                  </a:tcPr>
+                </a:tc>
+                <a:tc>
+                  <a:txBody>
+                    <a:bodyPr/>
+                    <a:lstStyle/>
+                    <a:p>
+                      <a:pPr algn="ctr"/>
+                      <a:r>
+                        <a:rPr lang="en-TW" dirty="0">
+                          <a:solidFill>
+                            <a:schemeClr val="tx1"/>
+                          </a:solidFill>
+                        </a:rPr>
+                        <a:t>din</a:t>
+                      </a:r>
+                    </a:p>
+                  </a:txBody>
+                  <a:tcPr anchor="ctr">
+                    <a:lnL w="12700" cap="flat" cmpd="sng" algn="ctr">
+                      <a:solidFill>
+                        <a:schemeClr val="tx1"/>
+                      </a:solidFill>
+                      <a:prstDash val="solid"/>
+                      <a:round/>
+                      <a:headEnd type="none" w="med" len="med"/>
+                      <a:tailEnd type="none" w="med" len="med"/>
+                    </a:lnL>
+                    <a:lnR w="12700" cap="flat" cmpd="sng" algn="ctr">
+                      <a:solidFill>
+                        <a:schemeClr val="tx1"/>
+                      </a:solidFill>
+                      <a:prstDash val="solid"/>
+                      <a:round/>
+                      <a:headEnd type="none" w="med" len="med"/>
+                      <a:tailEnd type="none" w="med" len="med"/>
+                    </a:lnR>
+                    <a:lnT w="12700" cap="flat" cmpd="sng" algn="ctr">
+                      <a:solidFill>
+                        <a:schemeClr val="tx1"/>
+                      </a:solidFill>
+                      <a:prstDash val="solid"/>
+                      <a:round/>
+                      <a:headEnd type="none" w="med" len="med"/>
+                      <a:tailEnd type="none" w="med" len="med"/>
+                    </a:lnT>
+                    <a:lnB w="12700" cap="flat" cmpd="sng" algn="ctr">
+                      <a:solidFill>
+                        <a:schemeClr val="tx1"/>
+                      </a:solidFill>
+                      <a:prstDash val="solid"/>
+                      <a:round/>
+                      <a:headEnd type="none" w="med" len="med"/>
+                      <a:tailEnd type="none" w="med" len="med"/>
+                    </a:lnB>
+                    <a:noFill/>
+                  </a:tcPr>
+                </a:tc>
+                <a:tc>
+                  <a:txBody>
+                    <a:bodyPr/>
+                    <a:lstStyle/>
+                    <a:p>
+                      <a:pPr algn="ctr"/>
+                      <a:r>
+                        <a:rPr lang="en-TW" dirty="0">
+                          <a:solidFill>
+                            <a:schemeClr val="tx1"/>
+                          </a:solidFill>
+                        </a:rPr>
+                        <a:t>dill</a:t>
+                      </a:r>
+                    </a:p>
+                  </a:txBody>
+                  <a:tcPr anchor="ctr">
+                    <a:lnL w="12700" cap="flat" cmpd="sng" algn="ctr">
+                      <a:solidFill>
+                        <a:schemeClr val="tx1"/>
+                      </a:solidFill>
+                      <a:prstDash val="solid"/>
+                      <a:round/>
+                      <a:headEnd type="none" w="med" len="med"/>
+                      <a:tailEnd type="none" w="med" len="med"/>
+                    </a:lnL>
+                    <a:lnR w="12700" cap="flat" cmpd="sng" algn="ctr">
+                      <a:solidFill>
+                        <a:schemeClr val="tx1"/>
+                      </a:solidFill>
+                      <a:prstDash val="solid"/>
+                      <a:round/>
+                      <a:headEnd type="none" w="med" len="med"/>
+                      <a:tailEnd type="none" w="med" len="med"/>
+                    </a:lnR>
+                    <a:lnT w="12700" cap="flat" cmpd="sng" algn="ctr">
+                      <a:solidFill>
+                        <a:schemeClr val="tx1"/>
+                      </a:solidFill>
+                      <a:prstDash val="solid"/>
+                      <a:round/>
+                      <a:headEnd type="none" w="med" len="med"/>
+                      <a:tailEnd type="none" w="med" len="med"/>
+                    </a:lnT>
+                    <a:lnB w="12700" cap="flat" cmpd="sng" algn="ctr">
+                      <a:solidFill>
+                        <a:schemeClr val="tx1"/>
+                      </a:solidFill>
+                      <a:prstDash val="solid"/>
+                      <a:round/>
+                      <a:headEnd type="none" w="med" len="med"/>
+                      <a:tailEnd type="none" w="med" len="med"/>
+                    </a:lnB>
+                    <a:noFill/>
+                  </a:tcPr>
+                </a:tc>
+                <a:extLst>
+                  <a:ext uri="{0D108BD9-81ED-4DB2-BD59-A6C34878D82A}">
+                    <a16:rowId xmlns:a16="http://schemas.microsoft.com/office/drawing/2014/main" val="2044093041"/>
+                  </a:ext>
+                </a:extLst>
+              </a:tr>
+              <a:tr h="454449">
+                <a:tc>
+                  <a:txBody>
+                    <a:bodyPr/>
+                    <a:lstStyle/>
+                    <a:p>
+                      <a:r>
+                        <a:rPr lang="en-TW" dirty="0"/>
+                        <a:t>block3</a:t>
+                      </a:r>
+                    </a:p>
+                  </a:txBody>
+                  <a:tcPr>
+                    <a:lnL w="12700" cap="flat" cmpd="sng" algn="ctr">
+                      <a:solidFill>
+                        <a:schemeClr val="tx1"/>
+                      </a:solidFill>
+                      <a:prstDash val="solid"/>
+                      <a:round/>
+                      <a:headEnd type="none" w="med" len="med"/>
+                      <a:tailEnd type="none" w="med" len="med"/>
+                    </a:lnL>
+                    <a:lnR w="12700" cap="flat" cmpd="sng" algn="ctr">
+                      <a:solidFill>
+                        <a:schemeClr val="tx1"/>
+                      </a:solidFill>
+                      <a:prstDash val="solid"/>
+                      <a:round/>
+                      <a:headEnd type="none" w="med" len="med"/>
+                      <a:tailEnd type="none" w="med" len="med"/>
+                    </a:lnR>
+                    <a:lnT w="12700" cap="flat" cmpd="sng" algn="ctr">
+                      <a:solidFill>
+                        <a:schemeClr val="tx1"/>
+                      </a:solidFill>
+                      <a:prstDash val="solid"/>
+                      <a:round/>
+                      <a:headEnd type="none" w="med" len="med"/>
+                      <a:tailEnd type="none" w="med" len="med"/>
+                    </a:lnT>
+                    <a:lnB w="12700" cap="flat" cmpd="sng" algn="ctr">
+                      <a:solidFill>
+                        <a:schemeClr val="tx1"/>
+                      </a:solidFill>
+                      <a:prstDash val="solid"/>
+                      <a:round/>
+                      <a:headEnd type="none" w="med" len="med"/>
+                      <a:tailEnd type="none" w="med" len="med"/>
+                    </a:lnB>
+                    <a:noFill/>
+                  </a:tcPr>
+                </a:tc>
+                <a:tc>
+                  <a:txBody>
+                    <a:bodyPr/>
+                    <a:lstStyle/>
+                    <a:p>
+                      <a:pPr algn="ctr"/>
+                      <a:r>
+                        <a:rPr lang="en-TW" dirty="0">
+                          <a:solidFill>
+                            <a:schemeClr val="tx1"/>
+                          </a:solidFill>
+                        </a:rPr>
+                        <a:t>din</a:t>
+                      </a:r>
+                    </a:p>
+                  </a:txBody>
+                  <a:tcPr anchor="ctr">
+                    <a:lnL w="12700" cap="flat" cmpd="sng" algn="ctr">
+                      <a:solidFill>
+                        <a:schemeClr val="tx1"/>
+                      </a:solidFill>
+                      <a:prstDash val="solid"/>
+                      <a:round/>
+                      <a:headEnd type="none" w="med" len="med"/>
+                      <a:tailEnd type="none" w="med" len="med"/>
+                    </a:lnL>
+                    <a:lnR w="12700" cap="flat" cmpd="sng" algn="ctr">
+                      <a:solidFill>
+                        <a:schemeClr val="tx1"/>
+                      </a:solidFill>
+                      <a:prstDash val="solid"/>
+                      <a:round/>
+                      <a:headEnd type="none" w="med" len="med"/>
+                      <a:tailEnd type="none" w="med" len="med"/>
+                    </a:lnR>
+                    <a:lnT w="12700" cap="flat" cmpd="sng" algn="ctr">
+                      <a:solidFill>
+                        <a:schemeClr val="tx1"/>
+                      </a:solidFill>
+                      <a:prstDash val="solid"/>
+                      <a:round/>
+                      <a:headEnd type="none" w="med" len="med"/>
+                      <a:tailEnd type="none" w="med" len="med"/>
+                    </a:lnT>
+                    <a:lnB w="12700" cap="flat" cmpd="sng" algn="ctr">
+                      <a:solidFill>
+                        <a:schemeClr val="tx1"/>
+                      </a:solidFill>
+                      <a:prstDash val="solid"/>
+                      <a:round/>
+                      <a:headEnd type="none" w="med" len="med"/>
+                      <a:tailEnd type="none" w="med" len="med"/>
+                    </a:lnB>
+                    <a:noFill/>
+                  </a:tcPr>
+                </a:tc>
+                <a:tc>
+                  <a:txBody>
+                    <a:bodyPr/>
+                    <a:lstStyle/>
+                    <a:p>
+                      <a:pPr algn="ctr"/>
+                      <a:r>
+                        <a:rPr lang="en-TW" dirty="0">
+                          <a:solidFill>
+                            <a:schemeClr val="tx1"/>
+                          </a:solidFill>
+                        </a:rPr>
+                        <a:t>dill</a:t>
+                      </a:r>
+                    </a:p>
+                  </a:txBody>
+                  <a:tcPr anchor="ctr">
+                    <a:lnL w="12700" cap="flat" cmpd="sng" algn="ctr">
+                      <a:solidFill>
+                        <a:schemeClr val="tx1"/>
+                      </a:solidFill>
+                      <a:prstDash val="solid"/>
+                      <a:round/>
+                      <a:headEnd type="none" w="med" len="med"/>
+                      <a:tailEnd type="none" w="med" len="med"/>
+                    </a:lnL>
+                    <a:lnR w="12700" cap="flat" cmpd="sng" algn="ctr">
+                      <a:solidFill>
+                        <a:schemeClr val="tx1"/>
+                      </a:solidFill>
+                      <a:prstDash val="solid"/>
+                      <a:round/>
+                      <a:headEnd type="none" w="med" len="med"/>
+                      <a:tailEnd type="none" w="med" len="med"/>
+                    </a:lnR>
+                    <a:lnT w="12700" cap="flat" cmpd="sng" algn="ctr">
+                      <a:solidFill>
+                        <a:schemeClr val="tx1"/>
+                      </a:solidFill>
+                      <a:prstDash val="solid"/>
+                      <a:round/>
+                      <a:headEnd type="none" w="med" len="med"/>
+                      <a:tailEnd type="none" w="med" len="med"/>
+                    </a:lnT>
+                    <a:lnB w="12700" cap="flat" cmpd="sng" algn="ctr">
+                      <a:solidFill>
+                        <a:schemeClr val="tx1"/>
+                      </a:solidFill>
+                      <a:prstDash val="solid"/>
+                      <a:round/>
+                      <a:headEnd type="none" w="med" len="med"/>
+                      <a:tailEnd type="none" w="med" len="med"/>
+                    </a:lnB>
+                    <a:noFill/>
+                  </a:tcPr>
+                </a:tc>
+                <a:tc>
+                  <a:txBody>
+                    <a:bodyPr/>
+                    <a:lstStyle/>
+                    <a:p>
+                      <a:pPr algn="ctr"/>
+                      <a:r>
+                        <a:rPr lang="en-TW" dirty="0">
+                          <a:solidFill>
+                            <a:schemeClr val="tx1"/>
+                          </a:solidFill>
+                        </a:rPr>
+                        <a:t>dip</a:t>
+                      </a:r>
+                    </a:p>
+                  </a:txBody>
+                  <a:tcPr anchor="ctr">
+                    <a:lnL w="12700" cap="flat" cmpd="sng" algn="ctr">
+                      <a:solidFill>
+                        <a:schemeClr val="tx1"/>
+                      </a:solidFill>
+                      <a:prstDash val="solid"/>
+                      <a:round/>
+                      <a:headEnd type="none" w="med" len="med"/>
+                      <a:tailEnd type="none" w="med" len="med"/>
+                    </a:lnL>
+                    <a:lnR w="12700" cap="flat" cmpd="sng" algn="ctr">
+                      <a:solidFill>
+                        <a:schemeClr val="tx1"/>
+                      </a:solidFill>
+                      <a:prstDash val="solid"/>
+                      <a:round/>
+                      <a:headEnd type="none" w="med" len="med"/>
+                      <a:tailEnd type="none" w="med" len="med"/>
+                    </a:lnR>
+                    <a:lnT w="12700" cap="flat" cmpd="sng" algn="ctr">
+                      <a:solidFill>
+                        <a:schemeClr val="tx1"/>
+                      </a:solidFill>
+                      <a:prstDash val="solid"/>
+                      <a:round/>
+                      <a:headEnd type="none" w="med" len="med"/>
+                      <a:tailEnd type="none" w="med" len="med"/>
+                    </a:lnT>
+                    <a:lnB w="12700" cap="flat" cmpd="sng" algn="ctr">
+                      <a:solidFill>
+                        <a:schemeClr val="tx1"/>
+                      </a:solidFill>
+                      <a:prstDash val="solid"/>
+                      <a:round/>
+                      <a:headEnd type="none" w="med" len="med"/>
+                      <a:tailEnd type="none" w="med" len="med"/>
+                    </a:lnB>
+                    <a:noFill/>
+                  </a:tcPr>
+                </a:tc>
+                <a:tc>
+                  <a:txBody>
+                    <a:bodyPr/>
+                    <a:lstStyle/>
+                    <a:p>
+                      <a:pPr algn="ctr"/>
+                      <a:r>
+                        <a:rPr lang="en-TW" dirty="0">
+                          <a:solidFill>
+                            <a:schemeClr val="tx1"/>
+                          </a:solidFill>
+                        </a:rPr>
+                        <a:t>dip</a:t>
+                      </a:r>
+                    </a:p>
+                  </a:txBody>
+                  <a:tcPr anchor="ctr">
+                    <a:lnL w="12700" cap="flat" cmpd="sng" algn="ctr">
+                      <a:solidFill>
+                        <a:schemeClr val="tx1"/>
+                      </a:solidFill>
+                      <a:prstDash val="solid"/>
+                      <a:round/>
+                      <a:headEnd type="none" w="med" len="med"/>
+                      <a:tailEnd type="none" w="med" len="med"/>
+                    </a:lnL>
+                    <a:lnR w="12700" cap="flat" cmpd="sng" algn="ctr">
+                      <a:solidFill>
+                        <a:schemeClr val="tx1"/>
+                      </a:solidFill>
+                      <a:prstDash val="solid"/>
+                      <a:round/>
+                      <a:headEnd type="none" w="med" len="med"/>
+                      <a:tailEnd type="none" w="med" len="med"/>
+                    </a:lnR>
+                    <a:lnT w="12700" cap="flat" cmpd="sng" algn="ctr">
+                      <a:solidFill>
+                        <a:schemeClr val="tx1"/>
+                      </a:solidFill>
+                      <a:prstDash val="solid"/>
+                      <a:round/>
+                      <a:headEnd type="none" w="med" len="med"/>
+                      <a:tailEnd type="none" w="med" len="med"/>
+                    </a:lnT>
+                    <a:lnB w="12700" cap="flat" cmpd="sng" algn="ctr">
+                      <a:solidFill>
+                        <a:schemeClr val="tx1"/>
+                      </a:solidFill>
+                      <a:prstDash val="solid"/>
+                      <a:round/>
+                      <a:headEnd type="none" w="med" len="med"/>
+                      <a:tailEnd type="none" w="med" len="med"/>
+                    </a:lnB>
+                    <a:noFill/>
+                  </a:tcPr>
+                </a:tc>
+                <a:tc>
+                  <a:txBody>
+                    <a:bodyPr/>
+                    <a:lstStyle/>
+                    <a:p>
+                      <a:pPr algn="ctr"/>
+                      <a:r>
+                        <a:rPr lang="en-TW" dirty="0">
+                          <a:solidFill>
+                            <a:schemeClr val="tx1"/>
+                          </a:solidFill>
+                        </a:rPr>
+                        <a:t>din</a:t>
+                      </a:r>
+                    </a:p>
+                  </a:txBody>
+                  <a:tcPr anchor="ctr">
+                    <a:lnL w="12700" cap="flat" cmpd="sng" algn="ctr">
+                      <a:solidFill>
+                        <a:schemeClr val="tx1"/>
+                      </a:solidFill>
+                      <a:prstDash val="solid"/>
+                      <a:round/>
+                      <a:headEnd type="none" w="med" len="med"/>
+                      <a:tailEnd type="none" w="med" len="med"/>
+                    </a:lnL>
+                    <a:lnR w="12700" cap="flat" cmpd="sng" algn="ctr">
+                      <a:solidFill>
+                        <a:schemeClr val="tx1"/>
+                      </a:solidFill>
+                      <a:prstDash val="solid"/>
+                      <a:round/>
+                      <a:headEnd type="none" w="med" len="med"/>
+                      <a:tailEnd type="none" w="med" len="med"/>
+                    </a:lnR>
+                    <a:lnT w="12700" cap="flat" cmpd="sng" algn="ctr">
+                      <a:solidFill>
+                        <a:schemeClr val="tx1"/>
+                      </a:solidFill>
+                      <a:prstDash val="solid"/>
+                      <a:round/>
+                      <a:headEnd type="none" w="med" len="med"/>
+                      <a:tailEnd type="none" w="med" len="med"/>
+                    </a:lnT>
+                    <a:lnB w="12700" cap="flat" cmpd="sng" algn="ctr">
+                      <a:solidFill>
+                        <a:schemeClr val="tx1"/>
+                      </a:solidFill>
+                      <a:prstDash val="solid"/>
+                      <a:round/>
+                      <a:headEnd type="none" w="med" len="med"/>
+                      <a:tailEnd type="none" w="med" len="med"/>
+                    </a:lnB>
+                    <a:noFill/>
+                  </a:tcPr>
+                </a:tc>
+                <a:tc>
+                  <a:txBody>
+                    <a:bodyPr/>
+                    <a:lstStyle/>
+                    <a:p>
+                      <a:pPr algn="ctr"/>
+                      <a:r>
+                        <a:rPr lang="en-TW" dirty="0">
+                          <a:solidFill>
+                            <a:schemeClr val="tx1"/>
+                          </a:solidFill>
+                        </a:rPr>
+                        <a:t>dill</a:t>
+                      </a:r>
+                    </a:p>
+                  </a:txBody>
+                  <a:tcPr anchor="ctr">
+                    <a:lnL w="12700" cap="flat" cmpd="sng" algn="ctr">
+                      <a:solidFill>
+                        <a:schemeClr val="tx1"/>
+                      </a:solidFill>
+                      <a:prstDash val="solid"/>
+                      <a:round/>
+                      <a:headEnd type="none" w="med" len="med"/>
+                      <a:tailEnd type="none" w="med" len="med"/>
+                    </a:lnL>
+                    <a:lnR w="12700" cap="flat" cmpd="sng" algn="ctr">
+                      <a:solidFill>
+                        <a:schemeClr val="tx1"/>
+                      </a:solidFill>
+                      <a:prstDash val="solid"/>
+                      <a:round/>
+                      <a:headEnd type="none" w="med" len="med"/>
+                      <a:tailEnd type="none" w="med" len="med"/>
+                    </a:lnR>
+                    <a:lnT w="12700" cap="flat" cmpd="sng" algn="ctr">
+                      <a:solidFill>
+                        <a:schemeClr val="tx1"/>
+                      </a:solidFill>
+                      <a:prstDash val="solid"/>
+                      <a:round/>
+                      <a:headEnd type="none" w="med" len="med"/>
+                      <a:tailEnd type="none" w="med" len="med"/>
+                    </a:lnT>
+                    <a:lnB w="12700" cap="flat" cmpd="sng" algn="ctr">
+                      <a:solidFill>
+                        <a:schemeClr val="tx1"/>
+                      </a:solidFill>
+                      <a:prstDash val="solid"/>
+                      <a:round/>
+                      <a:headEnd type="none" w="med" len="med"/>
+                      <a:tailEnd type="none" w="med" len="med"/>
+                    </a:lnB>
+                    <a:noFill/>
+                  </a:tcPr>
+                </a:tc>
+                <a:tc>
+                  <a:txBody>
+                    <a:bodyPr/>
+                    <a:lstStyle/>
+                    <a:p>
+                      <a:pPr algn="ctr"/>
+                      <a:r>
+                        <a:rPr lang="en-TW" dirty="0">
+                          <a:solidFill>
+                            <a:schemeClr val="tx1"/>
+                          </a:solidFill>
+                        </a:rPr>
+                        <a:t>dip</a:t>
+                      </a:r>
+                    </a:p>
+                  </a:txBody>
+                  <a:tcPr anchor="ctr">
+                    <a:lnL w="12700" cap="flat" cmpd="sng" algn="ctr">
+                      <a:solidFill>
+                        <a:schemeClr val="tx1"/>
+                      </a:solidFill>
+                      <a:prstDash val="solid"/>
+                      <a:round/>
+                      <a:headEnd type="none" w="med" len="med"/>
+                      <a:tailEnd type="none" w="med" len="med"/>
+                    </a:lnL>
+                    <a:lnR w="12700" cap="flat" cmpd="sng" algn="ctr">
+                      <a:solidFill>
+                        <a:schemeClr val="tx1"/>
+                      </a:solidFill>
+                      <a:prstDash val="solid"/>
+                      <a:round/>
+                      <a:headEnd type="none" w="med" len="med"/>
+                      <a:tailEnd type="none" w="med" len="med"/>
+                    </a:lnR>
+                    <a:lnT w="12700" cap="flat" cmpd="sng" algn="ctr">
+                      <a:solidFill>
+                        <a:schemeClr val="tx1"/>
+                      </a:solidFill>
+                      <a:prstDash val="solid"/>
+                      <a:round/>
+                      <a:headEnd type="none" w="med" len="med"/>
+                      <a:tailEnd type="none" w="med" len="med"/>
+                    </a:lnT>
+                    <a:lnB w="12700" cap="flat" cmpd="sng" algn="ctr">
+                      <a:solidFill>
+                        <a:schemeClr val="tx1"/>
+                      </a:solidFill>
+                      <a:prstDash val="solid"/>
+                      <a:round/>
+                      <a:headEnd type="none" w="med" len="med"/>
+                      <a:tailEnd type="none" w="med" len="med"/>
+                    </a:lnB>
+                    <a:noFill/>
+                  </a:tcPr>
+                </a:tc>
+                <a:tc>
+                  <a:txBody>
+                    <a:bodyPr/>
+                    <a:lstStyle/>
+                    <a:p>
+                      <a:pPr algn="ctr"/>
+                      <a:r>
+                        <a:rPr lang="en-TW" dirty="0">
+                          <a:solidFill>
+                            <a:schemeClr val="tx1"/>
+                          </a:solidFill>
+                        </a:rPr>
+                        <a:t>din</a:t>
+                      </a:r>
+                    </a:p>
+                  </a:txBody>
+                  <a:tcPr anchor="ctr">
+                    <a:lnL w="12700" cap="flat" cmpd="sng" algn="ctr">
+                      <a:solidFill>
+                        <a:schemeClr val="tx1"/>
+                      </a:solidFill>
+                      <a:prstDash val="solid"/>
+                      <a:round/>
+                      <a:headEnd type="none" w="med" len="med"/>
+                      <a:tailEnd type="none" w="med" len="med"/>
+                    </a:lnL>
+                    <a:lnR w="12700" cap="flat" cmpd="sng" algn="ctr">
+                      <a:solidFill>
+                        <a:schemeClr val="tx1"/>
+                      </a:solidFill>
+                      <a:prstDash val="solid"/>
+                      <a:round/>
+                      <a:headEnd type="none" w="med" len="med"/>
+                      <a:tailEnd type="none" w="med" len="med"/>
+                    </a:lnR>
+                    <a:lnT w="12700" cap="flat" cmpd="sng" algn="ctr">
+                      <a:solidFill>
+                        <a:schemeClr val="tx1"/>
+                      </a:solidFill>
+                      <a:prstDash val="solid"/>
+                      <a:round/>
+                      <a:headEnd type="none" w="med" len="med"/>
+                      <a:tailEnd type="none" w="med" len="med"/>
+                    </a:lnT>
+                    <a:lnB w="12700" cap="flat" cmpd="sng" algn="ctr">
+                      <a:solidFill>
+                        <a:schemeClr val="tx1"/>
+                      </a:solidFill>
+                      <a:prstDash val="solid"/>
+                      <a:round/>
+                      <a:headEnd type="none" w="med" len="med"/>
+                      <a:tailEnd type="none" w="med" len="med"/>
+                    </a:lnB>
+                    <a:noFill/>
+                  </a:tcPr>
+                </a:tc>
+                <a:tc>
+                  <a:txBody>
+                    <a:bodyPr/>
+                    <a:lstStyle/>
+                    <a:p>
+                      <a:pPr algn="ctr"/>
+                      <a:r>
+                        <a:rPr lang="en-TW" dirty="0">
+                          <a:solidFill>
+                            <a:schemeClr val="tx1"/>
+                          </a:solidFill>
+                        </a:rPr>
+                        <a:t>dill</a:t>
+                      </a:r>
+                    </a:p>
+                  </a:txBody>
+                  <a:tcPr anchor="ctr">
+                    <a:lnL w="12700" cap="flat" cmpd="sng" algn="ctr">
+                      <a:solidFill>
+                        <a:schemeClr val="tx1"/>
+                      </a:solidFill>
+                      <a:prstDash val="solid"/>
+                      <a:round/>
+                      <a:headEnd type="none" w="med" len="med"/>
+                      <a:tailEnd type="none" w="med" len="med"/>
+                    </a:lnL>
+                    <a:lnR w="12700" cap="flat" cmpd="sng" algn="ctr">
+                      <a:solidFill>
+                        <a:schemeClr val="tx1"/>
+                      </a:solidFill>
+                      <a:prstDash val="solid"/>
+                      <a:round/>
+                      <a:headEnd type="none" w="med" len="med"/>
+                      <a:tailEnd type="none" w="med" len="med"/>
+                    </a:lnR>
+                    <a:lnT w="12700" cap="flat" cmpd="sng" algn="ctr">
+                      <a:solidFill>
+                        <a:schemeClr val="tx1"/>
+                      </a:solidFill>
+                      <a:prstDash val="solid"/>
+                      <a:round/>
+                      <a:headEnd type="none" w="med" len="med"/>
+                      <a:tailEnd type="none" w="med" len="med"/>
+                    </a:lnT>
+                    <a:lnB w="12700" cap="flat" cmpd="sng" algn="ctr">
+                      <a:solidFill>
+                        <a:schemeClr val="tx1"/>
+                      </a:solidFill>
+                      <a:prstDash val="solid"/>
+                      <a:round/>
+                      <a:headEnd type="none" w="med" len="med"/>
+                      <a:tailEnd type="none" w="med" len="med"/>
+                    </a:lnB>
+                    <a:noFill/>
+                  </a:tcPr>
+                </a:tc>
+                <a:tc>
+                  <a:txBody>
+                    <a:bodyPr/>
+                    <a:lstStyle/>
+                    <a:p>
+                      <a:pPr algn="ctr"/>
+                      <a:r>
+                        <a:rPr lang="en-TW" dirty="0">
+                          <a:solidFill>
+                            <a:schemeClr val="tx1"/>
+                          </a:solidFill>
+                        </a:rPr>
+                        <a:t>din</a:t>
+                      </a:r>
+                    </a:p>
+                  </a:txBody>
+                  <a:tcPr anchor="ctr">
+                    <a:lnL w="12700" cap="flat" cmpd="sng" algn="ctr">
+                      <a:solidFill>
+                        <a:schemeClr val="tx1"/>
+                      </a:solidFill>
+                      <a:prstDash val="solid"/>
+                      <a:round/>
+                      <a:headEnd type="none" w="med" len="med"/>
+                      <a:tailEnd type="none" w="med" len="med"/>
+                    </a:lnL>
+                    <a:lnR w="12700" cap="flat" cmpd="sng" algn="ctr">
+                      <a:solidFill>
+                        <a:schemeClr val="tx1"/>
+                      </a:solidFill>
+                      <a:prstDash val="solid"/>
+                      <a:round/>
+                      <a:headEnd type="none" w="med" len="med"/>
+                      <a:tailEnd type="none" w="med" len="med"/>
+                    </a:lnR>
+                    <a:lnT w="12700" cap="flat" cmpd="sng" algn="ctr">
+                      <a:solidFill>
+                        <a:schemeClr val="tx1"/>
+                      </a:solidFill>
+                      <a:prstDash val="solid"/>
+                      <a:round/>
+                      <a:headEnd type="none" w="med" len="med"/>
+                      <a:tailEnd type="none" w="med" len="med"/>
+                    </a:lnT>
+                    <a:lnB w="12700" cap="flat" cmpd="sng" algn="ctr">
+                      <a:solidFill>
+                        <a:schemeClr val="tx1"/>
+                      </a:solidFill>
+                      <a:prstDash val="solid"/>
+                      <a:round/>
+                      <a:headEnd type="none" w="med" len="med"/>
+                      <a:tailEnd type="none" w="med" len="med"/>
+                    </a:lnB>
+                    <a:noFill/>
+                  </a:tcPr>
+                </a:tc>
+                <a:tc>
+                  <a:txBody>
+                    <a:bodyPr/>
+                    <a:lstStyle/>
+                    <a:p>
+                      <a:pPr algn="ctr"/>
+                      <a:r>
+                        <a:rPr lang="en-TW" dirty="0">
+                          <a:solidFill>
+                            <a:schemeClr val="tx1"/>
+                          </a:solidFill>
+                        </a:rPr>
+                        <a:t>dill</a:t>
+                      </a:r>
+                    </a:p>
+                  </a:txBody>
+                  <a:tcPr anchor="ctr">
+                    <a:lnL w="12700" cap="flat" cmpd="sng" algn="ctr">
+                      <a:solidFill>
+                        <a:schemeClr val="tx1"/>
+                      </a:solidFill>
+                      <a:prstDash val="solid"/>
+                      <a:round/>
+                      <a:headEnd type="none" w="med" len="med"/>
+                      <a:tailEnd type="none" w="med" len="med"/>
+                    </a:lnL>
+                    <a:lnR w="12700" cap="flat" cmpd="sng" algn="ctr">
+                      <a:solidFill>
+                        <a:schemeClr val="tx1"/>
+                      </a:solidFill>
+                      <a:prstDash val="solid"/>
+                      <a:round/>
+                      <a:headEnd type="none" w="med" len="med"/>
+                      <a:tailEnd type="none" w="med" len="med"/>
+                    </a:lnR>
+                    <a:lnT w="12700" cap="flat" cmpd="sng" algn="ctr">
+                      <a:solidFill>
+                        <a:schemeClr val="tx1"/>
+                      </a:solidFill>
+                      <a:prstDash val="solid"/>
+                      <a:round/>
+                      <a:headEnd type="none" w="med" len="med"/>
+                      <a:tailEnd type="none" w="med" len="med"/>
+                    </a:lnT>
+                    <a:lnB w="12700" cap="flat" cmpd="sng" algn="ctr">
+                      <a:solidFill>
+                        <a:schemeClr val="tx1"/>
+                      </a:solidFill>
+                      <a:prstDash val="solid"/>
+                      <a:round/>
+                      <a:headEnd type="none" w="med" len="med"/>
+                      <a:tailEnd type="none" w="med" len="med"/>
+                    </a:lnB>
+                    <a:noFill/>
+                  </a:tcPr>
+                </a:tc>
+                <a:tc>
+                  <a:txBody>
+                    <a:bodyPr/>
+                    <a:lstStyle/>
+                    <a:p>
+                      <a:pPr algn="ctr"/>
+                      <a:r>
+                        <a:rPr lang="en-TW" dirty="0">
+                          <a:solidFill>
+                            <a:schemeClr val="tx1"/>
+                          </a:solidFill>
+                        </a:rPr>
+                        <a:t>dip</a:t>
+                      </a:r>
+                    </a:p>
+                  </a:txBody>
+                  <a:tcPr anchor="ctr">
+                    <a:lnL w="12700" cap="flat" cmpd="sng" algn="ctr">
+                      <a:solidFill>
+                        <a:schemeClr val="tx1"/>
+                      </a:solidFill>
+                      <a:prstDash val="solid"/>
+                      <a:round/>
+                      <a:headEnd type="none" w="med" len="med"/>
+                      <a:tailEnd type="none" w="med" len="med"/>
+                    </a:lnL>
+                    <a:lnR w="12700" cap="flat" cmpd="sng" algn="ctr">
+                      <a:solidFill>
+                        <a:schemeClr val="tx1"/>
+                      </a:solidFill>
+                      <a:prstDash val="solid"/>
+                      <a:round/>
+                      <a:headEnd type="none" w="med" len="med"/>
+                      <a:tailEnd type="none" w="med" len="med"/>
+                    </a:lnR>
+                    <a:lnT w="12700" cap="flat" cmpd="sng" algn="ctr">
+                      <a:solidFill>
+                        <a:schemeClr val="tx1"/>
+                      </a:solidFill>
+                      <a:prstDash val="solid"/>
+                      <a:round/>
+                      <a:headEnd type="none" w="med" len="med"/>
+                      <a:tailEnd type="none" w="med" len="med"/>
+                    </a:lnT>
+                    <a:lnB w="12700" cap="flat" cmpd="sng" algn="ctr">
+                      <a:solidFill>
+                        <a:schemeClr val="tx1"/>
+                      </a:solidFill>
+                      <a:prstDash val="solid"/>
+                      <a:round/>
+                      <a:headEnd type="none" w="med" len="med"/>
+                      <a:tailEnd type="none" w="med" len="med"/>
+                    </a:lnB>
+                    <a:noFill/>
+                  </a:tcPr>
+                </a:tc>
+                <a:extLst>
+                  <a:ext uri="{0D108BD9-81ED-4DB2-BD59-A6C34878D82A}">
+                    <a16:rowId xmlns:a16="http://schemas.microsoft.com/office/drawing/2014/main" val="3655851588"/>
+                  </a:ext>
+                </a:extLst>
+              </a:tr>
+            </a:tbl>
+          </a:graphicData>
+        </a:graphic>
+      </p:graphicFrame>
+      <p:pic>
+        <p:nvPicPr>
+          <p:cNvPr id="1026" name="Picture 2" descr="Shuffle - Free ui icons">
+            <a:extLst>
+              <a:ext uri="{FF2B5EF4-FFF2-40B4-BE49-F238E27FC236}">
+                <a16:creationId xmlns:a16="http://schemas.microsoft.com/office/drawing/2014/main" id="{8285A62F-AA38-3D4E-D6AD-DDEDB8232E7C}"/>
+              </a:ext>
+            </a:extLst>
+          </p:cNvPr>
+          <p:cNvPicPr>
+            <a:picLocks noChangeAspect="1" noChangeArrowheads="1"/>
+          </p:cNvPicPr>
+          <p:nvPr/>
+        </p:nvPicPr>
+        <p:blipFill>
+          <a:blip r:embed="rId2">
+            <a:extLst>
+              <a:ext uri="{28A0092B-C50C-407E-A947-70E740481C1C}">
+                <a14:useLocalDpi xmlns:a14="http://schemas.microsoft.com/office/drawing/2010/main" val="0"/>
+              </a:ext>
+            </a:extLst>
+          </a:blip>
+          <a:srcRect/>
+          <a:stretch>
+            <a:fillRect/>
+          </a:stretch>
+        </p:blipFill>
+        <p:spPr bwMode="auto">
+          <a:xfrm>
+            <a:off x="10566273" y="124418"/>
+            <a:ext cx="1076725" cy="1076725"/>
+          </a:xfrm>
+          <a:prstGeom prst="rect">
+            <a:avLst/>
+          </a:prstGeom>
+          <a:noFill/>
+          <a:extLst>
+            <a:ext uri="{909E8E84-426E-40DD-AFC4-6F175D3DCCD1}">
+              <a14:hiddenFill xmlns:a14="http://schemas.microsoft.com/office/drawing/2010/main">
+                <a:solidFill>
+                  <a:srgbClr val="FFFFFF"/>
+                </a:solidFill>
+              </a14:hiddenFill>
+            </a:ext>
+          </a:extLst>
+        </p:spPr>
+      </p:pic>
+      <p:sp>
+        <p:nvSpPr>
+          <p:cNvPr id="4" name="Frame 3">
+            <a:extLst>
+              <a:ext uri="{FF2B5EF4-FFF2-40B4-BE49-F238E27FC236}">
+                <a16:creationId xmlns:a16="http://schemas.microsoft.com/office/drawing/2014/main" id="{BB597CB4-8569-031C-D276-BD1661C2BBE1}"/>
+              </a:ext>
+            </a:extLst>
+          </p:cNvPr>
+          <p:cNvSpPr/>
+          <p:nvPr/>
+        </p:nvSpPr>
+        <p:spPr>
+          <a:xfrm>
+            <a:off x="1120140" y="1325563"/>
+            <a:ext cx="857250" cy="458992"/>
+          </a:xfrm>
+          <a:prstGeom prst="frame">
+            <a:avLst>
+              <a:gd name="adj1" fmla="val 10380"/>
+            </a:avLst>
+          </a:prstGeom>
+          <a:solidFill>
+            <a:srgbClr val="7030A0"/>
+          </a:solidFill>
+          <a:ln>
+            <a:noFill/>
+          </a:ln>
+        </p:spPr>
+        <p:style>
+          <a:lnRef idx="2">
+            <a:schemeClr val="accent1">
+              <a:shade val="15000"/>
+            </a:schemeClr>
+          </a:lnRef>
+          <a:fillRef idx="1">
+            <a:schemeClr val="accent1"/>
+          </a:fillRef>
+          <a:effectRef idx="0">
+            <a:schemeClr val="accent1"/>
+          </a:effectRef>
+          <a:fontRef idx="minor">
+            <a:schemeClr val="lt1"/>
+          </a:fontRef>
+        </p:style>
+        <p:txBody>
+          <a:bodyPr rtlCol="0" anchor="ctr"/>
+          <a:lstStyle/>
+          <a:p>
+            <a:pPr algn="ctr"/>
+            <a:endParaRPr lang="en-TW">
+              <a:solidFill>
+                <a:schemeClr val="tx1"/>
+              </a:solidFill>
+            </a:endParaRPr>
+          </a:p>
+        </p:txBody>
+      </p:sp>
+      <p:sp>
+        <p:nvSpPr>
+          <p:cNvPr id="11" name="Frame 10">
+            <a:extLst>
+              <a:ext uri="{FF2B5EF4-FFF2-40B4-BE49-F238E27FC236}">
+                <a16:creationId xmlns:a16="http://schemas.microsoft.com/office/drawing/2014/main" id="{FFBE11D2-D37F-55E1-EF64-F049CBFCB345}"/>
+              </a:ext>
+            </a:extLst>
+          </p:cNvPr>
+          <p:cNvSpPr/>
+          <p:nvPr/>
+        </p:nvSpPr>
+        <p:spPr>
+          <a:xfrm>
+            <a:off x="2007992" y="1325563"/>
+            <a:ext cx="857250" cy="458992"/>
+          </a:xfrm>
+          <a:prstGeom prst="frame">
+            <a:avLst>
+              <a:gd name="adj1" fmla="val 10380"/>
+            </a:avLst>
+          </a:prstGeom>
+          <a:solidFill>
+            <a:srgbClr val="7030A0"/>
+          </a:solidFill>
+          <a:ln>
+            <a:noFill/>
+          </a:ln>
+        </p:spPr>
+        <p:style>
+          <a:lnRef idx="2">
+            <a:schemeClr val="accent1">
+              <a:shade val="15000"/>
+            </a:schemeClr>
+          </a:lnRef>
+          <a:fillRef idx="1">
+            <a:schemeClr val="accent1"/>
+          </a:fillRef>
+          <a:effectRef idx="0">
+            <a:schemeClr val="accent1"/>
+          </a:effectRef>
+          <a:fontRef idx="minor">
+            <a:schemeClr val="lt1"/>
+          </a:fontRef>
+        </p:style>
+        <p:txBody>
+          <a:bodyPr rtlCol="0" anchor="ctr"/>
+          <a:lstStyle/>
+          <a:p>
+            <a:pPr algn="ctr"/>
+            <a:endParaRPr lang="en-TW">
+              <a:solidFill>
+                <a:schemeClr val="tx1"/>
+              </a:solidFill>
+            </a:endParaRPr>
+          </a:p>
+        </p:txBody>
+      </p:sp>
+      <p:sp>
+        <p:nvSpPr>
+          <p:cNvPr id="17" name="Frame 16">
+            <a:extLst>
+              <a:ext uri="{FF2B5EF4-FFF2-40B4-BE49-F238E27FC236}">
+                <a16:creationId xmlns:a16="http://schemas.microsoft.com/office/drawing/2014/main" id="{6516AA35-E565-4319-1709-2F9555FBAAE9}"/>
+              </a:ext>
+            </a:extLst>
+          </p:cNvPr>
+          <p:cNvSpPr/>
+          <p:nvPr/>
+        </p:nvSpPr>
+        <p:spPr>
+          <a:xfrm>
+            <a:off x="2879990" y="1325563"/>
+            <a:ext cx="857250" cy="458992"/>
+          </a:xfrm>
+          <a:prstGeom prst="frame">
+            <a:avLst>
+              <a:gd name="adj1" fmla="val 10380"/>
+            </a:avLst>
+          </a:prstGeom>
+          <a:solidFill>
+            <a:srgbClr val="7030A0"/>
+          </a:solidFill>
+          <a:ln>
+            <a:noFill/>
+          </a:ln>
+        </p:spPr>
+        <p:style>
+          <a:lnRef idx="2">
+            <a:schemeClr val="accent1">
+              <a:shade val="15000"/>
+            </a:schemeClr>
+          </a:lnRef>
+          <a:fillRef idx="1">
+            <a:schemeClr val="accent1"/>
+          </a:fillRef>
+          <a:effectRef idx="0">
+            <a:schemeClr val="accent1"/>
+          </a:effectRef>
+          <a:fontRef idx="minor">
+            <a:schemeClr val="lt1"/>
+          </a:fontRef>
+        </p:style>
+        <p:txBody>
+          <a:bodyPr rtlCol="0" anchor="ctr"/>
+          <a:lstStyle/>
+          <a:p>
+            <a:pPr algn="ctr"/>
+            <a:endParaRPr lang="en-TW">
+              <a:solidFill>
+                <a:schemeClr val="tx1"/>
+              </a:solidFill>
+            </a:endParaRPr>
+          </a:p>
+        </p:txBody>
+      </p:sp>
+      <p:sp>
+        <p:nvSpPr>
+          <p:cNvPr id="43" name="Frame 42">
+            <a:extLst>
+              <a:ext uri="{FF2B5EF4-FFF2-40B4-BE49-F238E27FC236}">
+                <a16:creationId xmlns:a16="http://schemas.microsoft.com/office/drawing/2014/main" id="{46492845-120B-4E0B-407C-5E610A0310A6}"/>
+              </a:ext>
+            </a:extLst>
+          </p:cNvPr>
+          <p:cNvSpPr/>
+          <p:nvPr/>
+        </p:nvSpPr>
+        <p:spPr>
+          <a:xfrm>
+            <a:off x="3738168" y="1325563"/>
+            <a:ext cx="857250" cy="458992"/>
+          </a:xfrm>
+          <a:prstGeom prst="frame">
+            <a:avLst>
+              <a:gd name="adj1" fmla="val 10380"/>
+            </a:avLst>
+          </a:prstGeom>
+          <a:solidFill>
+            <a:srgbClr val="7030A0"/>
+          </a:solidFill>
+          <a:ln>
+            <a:noFill/>
+          </a:ln>
+        </p:spPr>
+        <p:style>
+          <a:lnRef idx="2">
+            <a:schemeClr val="accent1">
+              <a:shade val="15000"/>
+            </a:schemeClr>
+          </a:lnRef>
+          <a:fillRef idx="1">
+            <a:schemeClr val="accent1"/>
+          </a:fillRef>
+          <a:effectRef idx="0">
+            <a:schemeClr val="accent1"/>
+          </a:effectRef>
+          <a:fontRef idx="minor">
+            <a:schemeClr val="lt1"/>
+          </a:fontRef>
+        </p:style>
+        <p:txBody>
+          <a:bodyPr rtlCol="0" anchor="ctr"/>
+          <a:lstStyle/>
+          <a:p>
+            <a:pPr algn="ctr"/>
+            <a:endParaRPr lang="en-TW">
+              <a:solidFill>
+                <a:schemeClr val="tx1"/>
+              </a:solidFill>
+            </a:endParaRPr>
+          </a:p>
+        </p:txBody>
+      </p:sp>
+      <p:sp>
+        <p:nvSpPr>
+          <p:cNvPr id="44" name="Frame 43">
+            <a:extLst>
+              <a:ext uri="{FF2B5EF4-FFF2-40B4-BE49-F238E27FC236}">
+                <a16:creationId xmlns:a16="http://schemas.microsoft.com/office/drawing/2014/main" id="{61D0C70F-87C5-90B8-F836-D7EBD8E77E78}"/>
+              </a:ext>
+            </a:extLst>
+          </p:cNvPr>
+          <p:cNvSpPr/>
+          <p:nvPr/>
+        </p:nvSpPr>
+        <p:spPr>
+          <a:xfrm>
+            <a:off x="4626020" y="1325563"/>
+            <a:ext cx="857250" cy="458992"/>
+          </a:xfrm>
+          <a:prstGeom prst="frame">
+            <a:avLst>
+              <a:gd name="adj1" fmla="val 10380"/>
+            </a:avLst>
+          </a:prstGeom>
+          <a:solidFill>
+            <a:srgbClr val="7030A0"/>
+          </a:solidFill>
+          <a:ln>
+            <a:noFill/>
+          </a:ln>
+        </p:spPr>
+        <p:style>
+          <a:lnRef idx="2">
+            <a:schemeClr val="accent1">
+              <a:shade val="15000"/>
+            </a:schemeClr>
+          </a:lnRef>
+          <a:fillRef idx="1">
+            <a:schemeClr val="accent1"/>
+          </a:fillRef>
+          <a:effectRef idx="0">
+            <a:schemeClr val="accent1"/>
+          </a:effectRef>
+          <a:fontRef idx="minor">
+            <a:schemeClr val="lt1"/>
+          </a:fontRef>
+        </p:style>
+        <p:txBody>
+          <a:bodyPr rtlCol="0" anchor="ctr"/>
+          <a:lstStyle/>
+          <a:p>
+            <a:pPr algn="ctr"/>
+            <a:endParaRPr lang="en-TW">
+              <a:solidFill>
+                <a:schemeClr val="tx1"/>
+              </a:solidFill>
+            </a:endParaRPr>
+          </a:p>
+        </p:txBody>
+      </p:sp>
+      <p:sp>
+        <p:nvSpPr>
+          <p:cNvPr id="45" name="Frame 44">
+            <a:extLst>
+              <a:ext uri="{FF2B5EF4-FFF2-40B4-BE49-F238E27FC236}">
+                <a16:creationId xmlns:a16="http://schemas.microsoft.com/office/drawing/2014/main" id="{D2B1D42E-8216-DB79-3EB9-94F80602B14E}"/>
+              </a:ext>
+            </a:extLst>
+          </p:cNvPr>
+          <p:cNvSpPr/>
+          <p:nvPr/>
+        </p:nvSpPr>
+        <p:spPr>
+          <a:xfrm>
+            <a:off x="5498018" y="1325563"/>
+            <a:ext cx="857250" cy="458992"/>
+          </a:xfrm>
+          <a:prstGeom prst="frame">
+            <a:avLst>
+              <a:gd name="adj1" fmla="val 10380"/>
+            </a:avLst>
+          </a:prstGeom>
+          <a:solidFill>
+            <a:srgbClr val="7030A0"/>
+          </a:solidFill>
+          <a:ln>
+            <a:noFill/>
+          </a:ln>
+        </p:spPr>
+        <p:style>
+          <a:lnRef idx="2">
+            <a:schemeClr val="accent1">
+              <a:shade val="15000"/>
+            </a:schemeClr>
+          </a:lnRef>
+          <a:fillRef idx="1">
+            <a:schemeClr val="accent1"/>
+          </a:fillRef>
+          <a:effectRef idx="0">
+            <a:schemeClr val="accent1"/>
+          </a:effectRef>
+          <a:fontRef idx="minor">
+            <a:schemeClr val="lt1"/>
+          </a:fontRef>
+        </p:style>
+        <p:txBody>
+          <a:bodyPr rtlCol="0" anchor="ctr"/>
+          <a:lstStyle/>
+          <a:p>
+            <a:pPr algn="ctr"/>
+            <a:endParaRPr lang="en-TW">
+              <a:solidFill>
+                <a:schemeClr val="tx1"/>
+              </a:solidFill>
+            </a:endParaRPr>
+          </a:p>
+        </p:txBody>
+      </p:sp>
+      <p:sp>
+        <p:nvSpPr>
+          <p:cNvPr id="46" name="Frame 45">
+            <a:extLst>
+              <a:ext uri="{FF2B5EF4-FFF2-40B4-BE49-F238E27FC236}">
+                <a16:creationId xmlns:a16="http://schemas.microsoft.com/office/drawing/2014/main" id="{A149656E-AC70-0D69-45A7-EDB359EF4D3D}"/>
+              </a:ext>
+            </a:extLst>
+          </p:cNvPr>
+          <p:cNvSpPr/>
+          <p:nvPr/>
+        </p:nvSpPr>
+        <p:spPr>
+          <a:xfrm>
+            <a:off x="6367069" y="1331225"/>
+            <a:ext cx="857250" cy="458992"/>
+          </a:xfrm>
+          <a:prstGeom prst="frame">
+            <a:avLst>
+              <a:gd name="adj1" fmla="val 10380"/>
+            </a:avLst>
+          </a:prstGeom>
+          <a:solidFill>
+            <a:srgbClr val="7030A0"/>
+          </a:solidFill>
+          <a:ln>
+            <a:noFill/>
+          </a:ln>
+        </p:spPr>
+        <p:style>
+          <a:lnRef idx="2">
+            <a:schemeClr val="accent1">
+              <a:shade val="15000"/>
+            </a:schemeClr>
+          </a:lnRef>
+          <a:fillRef idx="1">
+            <a:schemeClr val="accent1"/>
+          </a:fillRef>
+          <a:effectRef idx="0">
+            <a:schemeClr val="accent1"/>
+          </a:effectRef>
+          <a:fontRef idx="minor">
+            <a:schemeClr val="lt1"/>
+          </a:fontRef>
+        </p:style>
+        <p:txBody>
+          <a:bodyPr rtlCol="0" anchor="ctr"/>
+          <a:lstStyle/>
+          <a:p>
+            <a:pPr algn="ctr"/>
+            <a:endParaRPr lang="en-TW">
+              <a:solidFill>
+                <a:schemeClr val="tx1"/>
+              </a:solidFill>
+            </a:endParaRPr>
+          </a:p>
+        </p:txBody>
+      </p:sp>
+      <p:sp>
+        <p:nvSpPr>
+          <p:cNvPr id="47" name="Frame 46">
+            <a:extLst>
+              <a:ext uri="{FF2B5EF4-FFF2-40B4-BE49-F238E27FC236}">
+                <a16:creationId xmlns:a16="http://schemas.microsoft.com/office/drawing/2014/main" id="{DFE532B7-94B6-17CC-7C95-2F985BFF99C6}"/>
+              </a:ext>
+            </a:extLst>
+          </p:cNvPr>
+          <p:cNvSpPr/>
+          <p:nvPr/>
+        </p:nvSpPr>
+        <p:spPr>
+          <a:xfrm>
+            <a:off x="7254921" y="1331225"/>
+            <a:ext cx="857250" cy="458992"/>
+          </a:xfrm>
+          <a:prstGeom prst="frame">
+            <a:avLst>
+              <a:gd name="adj1" fmla="val 10380"/>
+            </a:avLst>
+          </a:prstGeom>
+          <a:solidFill>
+            <a:srgbClr val="7030A0"/>
+          </a:solidFill>
+          <a:ln>
+            <a:noFill/>
+          </a:ln>
+        </p:spPr>
+        <p:style>
+          <a:lnRef idx="2">
+            <a:schemeClr val="accent1">
+              <a:shade val="15000"/>
+            </a:schemeClr>
+          </a:lnRef>
+          <a:fillRef idx="1">
+            <a:schemeClr val="accent1"/>
+          </a:fillRef>
+          <a:effectRef idx="0">
+            <a:schemeClr val="accent1"/>
+          </a:effectRef>
+          <a:fontRef idx="minor">
+            <a:schemeClr val="lt1"/>
+          </a:fontRef>
+        </p:style>
+        <p:txBody>
+          <a:bodyPr rtlCol="0" anchor="ctr"/>
+          <a:lstStyle/>
+          <a:p>
+            <a:pPr algn="ctr"/>
+            <a:endParaRPr lang="en-TW">
+              <a:solidFill>
+                <a:schemeClr val="tx1"/>
+              </a:solidFill>
+            </a:endParaRPr>
+          </a:p>
+        </p:txBody>
+      </p:sp>
+      <p:sp>
+        <p:nvSpPr>
+          <p:cNvPr id="48" name="Frame 47">
+            <a:extLst>
+              <a:ext uri="{FF2B5EF4-FFF2-40B4-BE49-F238E27FC236}">
+                <a16:creationId xmlns:a16="http://schemas.microsoft.com/office/drawing/2014/main" id="{2ED7D615-05D6-C506-44AD-5AA6AF6DC34C}"/>
+              </a:ext>
+            </a:extLst>
+          </p:cNvPr>
+          <p:cNvSpPr/>
+          <p:nvPr/>
+        </p:nvSpPr>
+        <p:spPr>
+          <a:xfrm>
+            <a:off x="8126919" y="1331225"/>
+            <a:ext cx="857250" cy="458992"/>
+          </a:xfrm>
+          <a:prstGeom prst="frame">
+            <a:avLst>
+              <a:gd name="adj1" fmla="val 10380"/>
+            </a:avLst>
+          </a:prstGeom>
+          <a:solidFill>
+            <a:srgbClr val="7030A0"/>
+          </a:solidFill>
+          <a:ln>
+            <a:noFill/>
+          </a:ln>
+        </p:spPr>
+        <p:style>
+          <a:lnRef idx="2">
+            <a:schemeClr val="accent1">
+              <a:shade val="15000"/>
+            </a:schemeClr>
+          </a:lnRef>
+          <a:fillRef idx="1">
+            <a:schemeClr val="accent1"/>
+          </a:fillRef>
+          <a:effectRef idx="0">
+            <a:schemeClr val="accent1"/>
+          </a:effectRef>
+          <a:fontRef idx="minor">
+            <a:schemeClr val="lt1"/>
+          </a:fontRef>
+        </p:style>
+        <p:txBody>
+          <a:bodyPr rtlCol="0" anchor="ctr"/>
+          <a:lstStyle/>
+          <a:p>
+            <a:pPr algn="ctr"/>
+            <a:endParaRPr lang="en-TW">
+              <a:solidFill>
+                <a:schemeClr val="tx1"/>
+              </a:solidFill>
+            </a:endParaRPr>
+          </a:p>
+        </p:txBody>
+      </p:sp>
+      <p:sp>
+        <p:nvSpPr>
+          <p:cNvPr id="49" name="Frame 48">
+            <a:extLst>
+              <a:ext uri="{FF2B5EF4-FFF2-40B4-BE49-F238E27FC236}">
+                <a16:creationId xmlns:a16="http://schemas.microsoft.com/office/drawing/2014/main" id="{C263100D-0784-3D88-2C34-2BCA28B3030B}"/>
+              </a:ext>
+            </a:extLst>
+          </p:cNvPr>
+          <p:cNvSpPr/>
+          <p:nvPr/>
+        </p:nvSpPr>
+        <p:spPr>
+          <a:xfrm>
+            <a:off x="8985097" y="1331225"/>
+            <a:ext cx="857250" cy="458992"/>
+          </a:xfrm>
+          <a:prstGeom prst="frame">
+            <a:avLst>
+              <a:gd name="adj1" fmla="val 10380"/>
+            </a:avLst>
+          </a:prstGeom>
+          <a:solidFill>
+            <a:srgbClr val="7030A0"/>
+          </a:solidFill>
+          <a:ln>
+            <a:noFill/>
+          </a:ln>
+        </p:spPr>
+        <p:style>
+          <a:lnRef idx="2">
+            <a:schemeClr val="accent1">
+              <a:shade val="15000"/>
+            </a:schemeClr>
+          </a:lnRef>
+          <a:fillRef idx="1">
+            <a:schemeClr val="accent1"/>
+          </a:fillRef>
+          <a:effectRef idx="0">
+            <a:schemeClr val="accent1"/>
+          </a:effectRef>
+          <a:fontRef idx="minor">
+            <a:schemeClr val="lt1"/>
+          </a:fontRef>
+        </p:style>
+        <p:txBody>
+          <a:bodyPr rtlCol="0" anchor="ctr"/>
+          <a:lstStyle/>
+          <a:p>
+            <a:pPr algn="ctr"/>
+            <a:endParaRPr lang="en-TW">
+              <a:solidFill>
+                <a:schemeClr val="tx1"/>
+              </a:solidFill>
+            </a:endParaRPr>
+          </a:p>
+        </p:txBody>
+      </p:sp>
+      <p:sp>
+        <p:nvSpPr>
+          <p:cNvPr id="50" name="Frame 49">
+            <a:extLst>
+              <a:ext uri="{FF2B5EF4-FFF2-40B4-BE49-F238E27FC236}">
+                <a16:creationId xmlns:a16="http://schemas.microsoft.com/office/drawing/2014/main" id="{96B01DDE-F268-EF93-C725-6AB3C0C2A752}"/>
+              </a:ext>
+            </a:extLst>
+          </p:cNvPr>
+          <p:cNvSpPr/>
+          <p:nvPr/>
+        </p:nvSpPr>
+        <p:spPr>
+          <a:xfrm>
+            <a:off x="9872949" y="1331225"/>
+            <a:ext cx="857250" cy="458992"/>
+          </a:xfrm>
+          <a:prstGeom prst="frame">
+            <a:avLst>
+              <a:gd name="adj1" fmla="val 10380"/>
+            </a:avLst>
+          </a:prstGeom>
+          <a:solidFill>
+            <a:srgbClr val="7030A0"/>
+          </a:solidFill>
+          <a:ln>
+            <a:noFill/>
+          </a:ln>
+        </p:spPr>
+        <p:style>
+          <a:lnRef idx="2">
+            <a:schemeClr val="accent1">
+              <a:shade val="15000"/>
+            </a:schemeClr>
+          </a:lnRef>
+          <a:fillRef idx="1">
+            <a:schemeClr val="accent1"/>
+          </a:fillRef>
+          <a:effectRef idx="0">
+            <a:schemeClr val="accent1"/>
+          </a:effectRef>
+          <a:fontRef idx="minor">
+            <a:schemeClr val="lt1"/>
+          </a:fontRef>
+        </p:style>
+        <p:txBody>
+          <a:bodyPr rtlCol="0" anchor="ctr"/>
+          <a:lstStyle/>
+          <a:p>
+            <a:pPr algn="ctr"/>
+            <a:endParaRPr lang="en-TW">
+              <a:solidFill>
+                <a:schemeClr val="tx1"/>
+              </a:solidFill>
+            </a:endParaRPr>
+          </a:p>
+        </p:txBody>
+      </p:sp>
+      <p:sp>
+        <p:nvSpPr>
+          <p:cNvPr id="51" name="Frame 50">
+            <a:extLst>
+              <a:ext uri="{FF2B5EF4-FFF2-40B4-BE49-F238E27FC236}">
+                <a16:creationId xmlns:a16="http://schemas.microsoft.com/office/drawing/2014/main" id="{E84EA492-57D6-D751-E33C-3372732C21F2}"/>
+              </a:ext>
+            </a:extLst>
+          </p:cNvPr>
+          <p:cNvSpPr/>
+          <p:nvPr/>
+        </p:nvSpPr>
+        <p:spPr>
+          <a:xfrm>
+            <a:off x="10744947" y="1331225"/>
+            <a:ext cx="857250" cy="458992"/>
+          </a:xfrm>
+          <a:prstGeom prst="frame">
+            <a:avLst>
+              <a:gd name="adj1" fmla="val 10380"/>
+            </a:avLst>
+          </a:prstGeom>
+          <a:solidFill>
+            <a:srgbClr val="7030A0"/>
+          </a:solidFill>
+          <a:ln>
+            <a:noFill/>
+          </a:ln>
+        </p:spPr>
+        <p:style>
+          <a:lnRef idx="2">
+            <a:schemeClr val="accent1">
+              <a:shade val="15000"/>
+            </a:schemeClr>
+          </a:lnRef>
+          <a:fillRef idx="1">
+            <a:schemeClr val="accent1"/>
+          </a:fillRef>
+          <a:effectRef idx="0">
+            <a:schemeClr val="accent1"/>
+          </a:effectRef>
+          <a:fontRef idx="minor">
+            <a:schemeClr val="lt1"/>
+          </a:fontRef>
+        </p:style>
+        <p:txBody>
+          <a:bodyPr rtlCol="0" anchor="ctr"/>
+          <a:lstStyle/>
+          <a:p>
+            <a:pPr algn="ctr"/>
+            <a:endParaRPr lang="en-TW">
+              <a:solidFill>
+                <a:schemeClr val="tx1"/>
+              </a:solidFill>
+            </a:endParaRPr>
+          </a:p>
+        </p:txBody>
+      </p:sp>
       <p:graphicFrame>
         <p:nvGraphicFramePr>
           <p:cNvPr id="52" name="Table 51">
@@ -23411,13 +27355,7 @@
           <p:cNvGraphicFramePr>
             <a:graphicFrameLocks noGrp="1"/>
           </p:cNvGraphicFramePr>
-          <p:nvPr>
-            <p:extLst>
-              <p:ext uri="{D42A27DB-BD31-4B8C-83A1-F6EECF244321}">
-                <p14:modId xmlns:p14="http://schemas.microsoft.com/office/powerpoint/2010/main" val="3299728850"/>
-              </p:ext>
-            </p:extLst>
-          </p:nvPr>
+          <p:nvPr/>
         </p:nvGraphicFramePr>
         <p:xfrm>
           <a:off x="237490" y="4158886"/>
@@ -26454,7 +30392,7 @@
     </p:spTree>
     <p:extLst>
       <p:ext uri="{BB962C8B-B14F-4D97-AF65-F5344CB8AC3E}">
-        <p14:creationId xmlns:p14="http://schemas.microsoft.com/office/powerpoint/2010/main" val="1008867717"/>
+        <p14:creationId xmlns:p14="http://schemas.microsoft.com/office/powerpoint/2010/main" val="1170130394"/>
       </p:ext>
     </p:extLst>
   </p:cSld>
@@ -26464,7 +30402,7 @@
 </p:sld>
 </file>
 
-<file path=ppt/slides/slide17.xml><?xml version="1.0" encoding="utf-8"?>
+<file path=ppt/slides/slide18.xml><?xml version="1.0" encoding="utf-8"?>
 <p:sld xmlns:a="http://schemas.openxmlformats.org/drawingml/2006/main" xmlns:r="http://schemas.openxmlformats.org/officeDocument/2006/relationships" xmlns:p="http://schemas.openxmlformats.org/presentationml/2006/main">
   <p:cSld>
     <p:spTree>
@@ -26569,7 +30507,7 @@
 </p:sld>
 </file>
 
-<file path=ppt/slides/slide18.xml><?xml version="1.0" encoding="utf-8"?>
+<file path=ppt/slides/slide19.xml><?xml version="1.0" encoding="utf-8"?>
 <p:sld xmlns:a="http://schemas.openxmlformats.org/drawingml/2006/main" xmlns:r="http://schemas.openxmlformats.org/officeDocument/2006/relationships" xmlns:p="http://schemas.openxmlformats.org/presentationml/2006/main">
   <p:cSld>
     <p:spTree>
@@ -26780,7 +30718,172 @@
 </p:sld>
 </file>
 
-<file path=ppt/slides/slide19.xml><?xml version="1.0" encoding="utf-8"?>
+<file path=ppt/slides/slide2.xml><?xml version="1.0" encoding="utf-8"?>
+<p:sld xmlns:a="http://schemas.openxmlformats.org/drawingml/2006/main" xmlns:r="http://schemas.openxmlformats.org/officeDocument/2006/relationships" xmlns:p="http://schemas.openxmlformats.org/presentationml/2006/main">
+  <p:cSld>
+    <p:spTree>
+      <p:nvGrpSpPr>
+        <p:cNvPr id="1" name=""/>
+        <p:cNvGrpSpPr/>
+        <p:nvPr/>
+      </p:nvGrpSpPr>
+      <p:grpSpPr>
+        <a:xfrm>
+          <a:off x="0" y="0"/>
+          <a:ext cx="0" cy="0"/>
+          <a:chOff x="0" y="0"/>
+          <a:chExt cx="0" cy="0"/>
+        </a:xfrm>
+      </p:grpSpPr>
+      <p:sp>
+        <p:nvSpPr>
+          <p:cNvPr id="2" name="Title 1">
+            <a:extLst>
+              <a:ext uri="{FF2B5EF4-FFF2-40B4-BE49-F238E27FC236}">
+                <a16:creationId xmlns:a16="http://schemas.microsoft.com/office/drawing/2014/main" id="{39418C76-D18F-9C1B-1192-CD6192CC87ED}"/>
+              </a:ext>
+            </a:extLst>
+          </p:cNvPr>
+          <p:cNvSpPr>
+            <a:spLocks noGrp="1"/>
+          </p:cNvSpPr>
+          <p:nvPr>
+            <p:ph type="title"/>
+          </p:nvPr>
+        </p:nvSpPr>
+        <p:spPr>
+          <a:xfrm>
+            <a:off x="838200" y="329029"/>
+            <a:ext cx="10515600" cy="1325563"/>
+          </a:xfrm>
+        </p:spPr>
+        <p:txBody>
+          <a:bodyPr/>
+          <a:lstStyle/>
+          <a:p>
+            <a:r>
+              <a:rPr lang="en-TW" dirty="0"/>
+              <a:t>2026/06/05 updates</a:t>
+            </a:r>
+          </a:p>
+        </p:txBody>
+      </p:sp>
+      <p:sp>
+        <p:nvSpPr>
+          <p:cNvPr id="3" name="Content Placeholder 2">
+            <a:extLst>
+              <a:ext uri="{FF2B5EF4-FFF2-40B4-BE49-F238E27FC236}">
+                <a16:creationId xmlns:a16="http://schemas.microsoft.com/office/drawing/2014/main" id="{4D2F1A5B-13D3-35FF-171F-DB143AA72883}"/>
+              </a:ext>
+            </a:extLst>
+          </p:cNvPr>
+          <p:cNvSpPr>
+            <a:spLocks noGrp="1"/>
+          </p:cNvSpPr>
+          <p:nvPr>
+            <p:ph idx="1"/>
+          </p:nvPr>
+        </p:nvSpPr>
+        <p:spPr>
+          <a:xfrm>
+            <a:off x="838200" y="1645150"/>
+            <a:ext cx="10515600" cy="4351338"/>
+          </a:xfrm>
+        </p:spPr>
+        <p:txBody>
+          <a:bodyPr/>
+          <a:lstStyle/>
+          <a:p>
+            <a:r>
+              <a:rPr lang="en-US" dirty="0"/>
+              <a:t>Full dataset: N=30</a:t>
+            </a:r>
+          </a:p>
+          <a:p>
+            <a:r>
+              <a:rPr lang="en-US" dirty="0"/>
+              <a:t>Revisit</a:t>
+            </a:r>
+            <a:r>
+              <a:rPr lang="en-TW" dirty="0"/>
+              <a:t> data exclusion criteria</a:t>
+            </a:r>
+          </a:p>
+          <a:p>
+            <a:pPr marL="0" indent="0">
+              <a:buNone/>
+            </a:pPr>
+            <a:r>
+              <a:rPr lang="en-TW" b="1" dirty="0">
+                <a:solidFill>
+                  <a:schemeClr val="accent5">
+                    <a:lumMod val="75000"/>
+                  </a:schemeClr>
+                </a:solidFill>
+              </a:rPr>
+              <a:t>Participant-level exclusion: </a:t>
+            </a:r>
+            <a:r>
+              <a:rPr lang="en-TW" dirty="0"/>
+              <a:t>low accuracy in catch trials (N=2), over 15% trials with RTs &lt; 200ms (N=4), flat categorization curve (N=1), RT +-3D from group mean (N=0)</a:t>
+            </a:r>
+          </a:p>
+          <a:p>
+            <a:pPr marL="0" indent="0">
+              <a:buNone/>
+            </a:pPr>
+            <a:r>
+              <a:rPr lang="en-TW" b="1" dirty="0">
+                <a:solidFill>
+                  <a:schemeClr val="accent4">
+                    <a:lumMod val="75000"/>
+                  </a:schemeClr>
+                </a:solidFill>
+              </a:rPr>
+              <a:t>Trial-level exclusion: </a:t>
+            </a:r>
+            <a:r>
+              <a:rPr lang="en-TW" dirty="0"/>
+              <a:t>RT&lt;200ms or &gt;3000ms (303 trials), RT +-3SD within participant (34 trials)</a:t>
+            </a:r>
+          </a:p>
+          <a:p>
+            <a:pPr marL="0" indent="0">
+              <a:buNone/>
+            </a:pPr>
+            <a:endParaRPr lang="en-TW" dirty="0"/>
+          </a:p>
+          <a:p>
+            <a:pPr marL="0" indent="0">
+              <a:buNone/>
+            </a:pPr>
+            <a:r>
+              <a:rPr lang="en-TW" dirty="0"/>
+              <a:t>Total number of trials after exclusion: 6015 trials from 23 participants</a:t>
+            </a:r>
+          </a:p>
+          <a:p>
+            <a:pPr marL="0" indent="0">
+              <a:buNone/>
+            </a:pPr>
+            <a:endParaRPr lang="en-TW" dirty="0"/>
+          </a:p>
+        </p:txBody>
+      </p:sp>
+    </p:spTree>
+    <p:extLst>
+      <p:ext uri="{BB962C8B-B14F-4D97-AF65-F5344CB8AC3E}">
+        <p14:creationId xmlns:p14="http://schemas.microsoft.com/office/powerpoint/2010/main" val="4241748809"/>
+      </p:ext>
+    </p:extLst>
+  </p:cSld>
+  <p:clrMapOvr>
+    <a:masterClrMapping/>
+  </p:clrMapOvr>
+</p:sld>
+</file>
+
+<file path=ppt/slides/slide20.xml><?xml version="1.0" encoding="utf-8"?>
 <p:sld xmlns:a="http://schemas.openxmlformats.org/drawingml/2006/main" xmlns:r="http://schemas.openxmlformats.org/officeDocument/2006/relationships" xmlns:p="http://schemas.openxmlformats.org/presentationml/2006/main">
   <p:cSld>
     <p:spTree>
@@ -26971,7 +31074,7 @@
 </p:sld>
 </file>
 
-<file path=ppt/slides/slide2.xml><?xml version="1.0" encoding="utf-8"?>
+<file path=ppt/slides/slide21.xml><?xml version="1.0" encoding="utf-8"?>
 <p:sld xmlns:a="http://schemas.openxmlformats.org/drawingml/2006/main" xmlns:r="http://schemas.openxmlformats.org/officeDocument/2006/relationships" xmlns:p="http://schemas.openxmlformats.org/presentationml/2006/main">
   <p:cSld>
     <p:spTree>
@@ -27006,127 +31109,76 @@
         </p:nvSpPr>
         <p:spPr>
           <a:xfrm>
-            <a:off x="838200" y="329029"/>
+            <a:off x="0" y="0"/>
             <a:ext cx="10515600" cy="1325563"/>
           </a:xfrm>
         </p:spPr>
         <p:txBody>
-          <a:bodyPr/>
+          <a:bodyPr>
+            <a:normAutofit/>
+          </a:bodyPr>
           <a:lstStyle/>
           <a:p>
             <a:r>
-              <a:rPr lang="en-TW" dirty="0"/>
-              <a:t>2026/06/05 updates</a:t>
+              <a:rPr lang="en-US" sz="4000" dirty="0"/>
+              <a:t>To-dos:</a:t>
             </a:r>
+            <a:endParaRPr lang="en-TW" sz="4000" dirty="0"/>
           </a:p>
         </p:txBody>
       </p:sp>
       <p:sp>
         <p:nvSpPr>
-          <p:cNvPr id="3" name="Content Placeholder 2">
+          <p:cNvPr id="10" name="TextBox 9">
             <a:extLst>
               <a:ext uri="{FF2B5EF4-FFF2-40B4-BE49-F238E27FC236}">
-                <a16:creationId xmlns:a16="http://schemas.microsoft.com/office/drawing/2014/main" id="{4D2F1A5B-13D3-35FF-171F-DB143AA72883}"/>
+                <a16:creationId xmlns:a16="http://schemas.microsoft.com/office/drawing/2014/main" id="{99766FC6-9284-42DC-EBCA-F06B1D853AE7}"/>
               </a:ext>
             </a:extLst>
           </p:cNvPr>
-          <p:cNvSpPr>
-            <a:spLocks noGrp="1"/>
-          </p:cNvSpPr>
-          <p:nvPr>
-            <p:ph idx="1"/>
-          </p:nvPr>
+          <p:cNvSpPr txBox="1"/>
+          <p:nvPr/>
         </p:nvSpPr>
         <p:spPr>
           <a:xfrm>
-            <a:off x="838200" y="1645150"/>
-            <a:ext cx="10515600" cy="4351338"/>
+            <a:off x="71437" y="1325563"/>
+            <a:ext cx="12049125" cy="1815882"/>
           </a:xfrm>
+          <a:prstGeom prst="rect">
+            <a:avLst/>
+          </a:prstGeom>
+          <a:noFill/>
         </p:spPr>
         <p:txBody>
-          <a:bodyPr/>
+          <a:bodyPr wrap="square">
+            <a:spAutoFit/>
+          </a:bodyPr>
           <a:lstStyle/>
           <a:p>
             <a:r>
-              <a:rPr lang="en-US" dirty="0"/>
-              <a:t>Full dataset: N=30</a:t>
+              <a:rPr lang="en-US" sz="2800" dirty="0"/>
+              <a:t>Finalize counterbalancing stimuli lists</a:t>
             </a:r>
           </a:p>
           <a:p>
             <a:r>
-              <a:rPr lang="en-US" dirty="0"/>
-              <a:t>Revisit</a:t>
+              <a:rPr lang="en-US" sz="2800" dirty="0"/>
+              <a:t>Finalize Spanish context materials</a:t>
             </a:r>
-            <a:r>
-              <a:rPr lang="en-TW" dirty="0"/>
-              <a:t> data exclusion criteria</a:t>
-            </a:r>
+            <a:endParaRPr lang="en-TW" sz="2800" dirty="0"/>
           </a:p>
           <a:p>
-            <a:pPr marL="0" indent="0">
-              <a:buNone/>
-            </a:pPr>
             <a:r>
-              <a:rPr lang="en-TW" b="1" dirty="0">
-                <a:solidFill>
-                  <a:schemeClr val="accent5">
-                    <a:lumMod val="75000"/>
-                  </a:schemeClr>
-                </a:solidFill>
-              </a:rPr>
-              <a:t>Participant-level exclusion: </a:t>
+              <a:rPr lang="en-TW" sz="2800" dirty="0"/>
+              <a:t>Gorilla setup (earphone screening, Spanish context setup, instruction, practice, exposure, test, break, post-test questionnaire)</a:t>
             </a:r>
-            <a:r>
-              <a:rPr lang="en-TW" dirty="0"/>
-              <a:t>low accuracy in catch trials (N=2), over 15% trials with RTs &lt; 200ms (N=4), flat categorization curve (N=1), RT +-3D from group mean (N=0)</a:t>
-            </a:r>
-          </a:p>
-          <a:p>
-            <a:pPr marL="0" indent="0">
-              <a:buNone/>
-            </a:pPr>
-            <a:r>
-              <a:rPr lang="en-TW" b="1" dirty="0">
-                <a:solidFill>
-                  <a:schemeClr val="accent4">
-                    <a:lumMod val="75000"/>
-                  </a:schemeClr>
-                </a:solidFill>
-              </a:rPr>
-              <a:t>Trial-level exclusion: </a:t>
-            </a:r>
-            <a:r>
-              <a:rPr lang="en-TW" dirty="0"/>
-              <a:t>RT&lt;200ms or &gt;3000ms (303 trials), RT +-3SD within participant (34 trials)</a:t>
-            </a:r>
-          </a:p>
-          <a:p>
-            <a:pPr marL="0" indent="0">
-              <a:buNone/>
-            </a:pPr>
-            <a:endParaRPr lang="en-TW" dirty="0"/>
-          </a:p>
-          <a:p>
-            <a:pPr marL="0" indent="0">
-              <a:buNone/>
-            </a:pPr>
-            <a:r>
-              <a:rPr lang="en-TW" dirty="0"/>
-              <a:t>Total number of trials after exclusion: 6015 trials from 23 participants</a:t>
-            </a:r>
-          </a:p>
-          <a:p>
-            <a:pPr marL="0" indent="0">
-              <a:buNone/>
-            </a:pPr>
-            <a:endParaRPr lang="en-TW" dirty="0"/>
           </a:p>
         </p:txBody>
       </p:sp>
     </p:spTree>
     <p:extLst>
       <p:ext uri="{BB962C8B-B14F-4D97-AF65-F5344CB8AC3E}">
-        <p14:creationId xmlns:p14="http://schemas.microsoft.com/office/powerpoint/2010/main" val="4241748809"/>
+        <p14:creationId xmlns:p14="http://schemas.microsoft.com/office/powerpoint/2010/main" val="2461701155"/>
       </p:ext>
     </p:extLst>
   </p:cSld>
